--- a/slide_decks/Correlation-Regression-demo2.pptx
+++ b/slide_decks/Correlation-Regression-demo2.pptx
@@ -23,8 +23,8 @@
     <p:sldId id="269" r:id="rId14"/>
     <p:sldId id="270" r:id="rId15"/>
     <p:sldId id="313" r:id="rId16"/>
-    <p:sldId id="301" r:id="rId17"/>
-    <p:sldId id="302" r:id="rId18"/>
+    <p:sldId id="317" r:id="rId17"/>
+    <p:sldId id="318" r:id="rId18"/>
     <p:sldId id="304" r:id="rId19"/>
     <p:sldId id="309" r:id="rId20"/>
     <p:sldId id="277" r:id="rId21"/>
@@ -39,10 +39,10 @@
     <p:sldId id="291" r:id="rId30"/>
     <p:sldId id="286" r:id="rId31"/>
     <p:sldId id="305" r:id="rId32"/>
-    <p:sldId id="296" r:id="rId33"/>
-    <p:sldId id="280" r:id="rId34"/>
-    <p:sldId id="298" r:id="rId35"/>
-    <p:sldId id="297" r:id="rId36"/>
+    <p:sldId id="302" r:id="rId33"/>
+    <p:sldId id="296" r:id="rId34"/>
+    <p:sldId id="280" r:id="rId35"/>
+    <p:sldId id="298" r:id="rId36"/>
   </p:sldIdLst>
   <p:sldSz cx="12192000" cy="6858000"/>
   <p:notesSz cx="6858000" cy="9144000"/>
@@ -594,7 +594,7 @@
             </a:r>
             <a:r>
               <a:rPr lang="en-CA" dirty="0"/>
-              <a:t> them — so in this demonstration we'll progress from correlation to regression to make predictions and assess how well the model fits.</a:t>
+              <a:t> them — so in this demonstration we'll progress from correlation to regression.</a:t>
             </a:r>
           </a:p>
           <a:p>
@@ -751,14 +751,14 @@
             </a:r>
             <a:r>
               <a:rPr lang="en-CA" dirty="0"/>
-              <a:t> to make sure our results are valid.</a:t>
+              <a:t>.</a:t>
             </a:r>
             <a:br>
               <a:rPr lang="en-CA" dirty="0"/>
             </a:br>
             <a:r>
               <a:rPr lang="en-CA" dirty="0"/>
-              <a:t>Let’s go through them one by one.</a:t>
+              <a:t>Th first one is </a:t>
             </a:r>
           </a:p>
           <a:p>
@@ -844,7 +844,7 @@
             </a:r>
             <a:r>
               <a:rPr lang="en-CA" dirty="0"/>
-              <a:t> pattern, a straight line wouldn’t be the best fit.</a:t>
+              <a:t> pattern, a straight line may not be the best way to model our data.</a:t>
             </a:r>
           </a:p>
           <a:p>
@@ -863,47 +863,22 @@
             </a:br>
             <a:r>
               <a:rPr lang="en-CA" dirty="0"/>
-              <a:t>Each data point should be </a:t>
-            </a:r>
-            <a:r>
-              <a:rPr lang="en-CA" b="1" dirty="0"/>
-              <a:t>independent</a:t>
-            </a:r>
-            <a:r>
-              <a:rPr lang="en-CA" dirty="0"/>
-              <a:t>, meaning each observation is drawn </a:t>
-            </a:r>
-            <a:r>
-              <a:rPr lang="en-CA" b="1" dirty="0"/>
-              <a:t>randomly and doesn’t influence another</a:t>
-            </a:r>
-            <a:r>
-              <a:rPr lang="en-CA" dirty="0"/>
-              <a:t>.</a:t>
+              <a:t>Each data point should be independent, meaning that one observation doesn’t influence another.</a:t>
             </a:r>
             <a:br>
               <a:rPr lang="en-CA" dirty="0"/>
             </a:br>
             <a:r>
               <a:rPr lang="en-CA" dirty="0"/>
-              <a:t>This assumption is usually built into how the data are collected — for example, if each house in our dataset was sampled separately, we can assume independence.</a:t>
-            </a:r>
-          </a:p>
-          <a:p>
-            <a:r>
+              <a:t>This assumption is typically built into how the data are collected — for example, if each house in our dataset was sampled separately, we can assume independence.</a:t>
+            </a:r>
+            <a:br>
               <a:rPr lang="en-CA" dirty="0"/>
-              <a:t>However, if data points are </a:t>
-            </a:r>
-            <a:r>
-              <a:rPr lang="en-CA" b="1" dirty="0"/>
-              <a:t>related or clustered</a:t>
-            </a:r>
+            </a:br>
             <a:r>
               <a:rPr lang="en-CA" dirty="0"/>
-              <a:t> — like repeated measurements from the same person or houses from the same street — then the independence assumption may be violated.</a:t>
-            </a:r>
-          </a:p>
-          <a:p>
+              <a:t>However, if the data are related or clustered — say, many houses come from the same street or neighborhood — then that assumption may be violated.</a:t>
+            </a:r>
             <a:br>
               <a:rPr lang="en-CA" dirty="0"/>
             </a:br>
@@ -1112,6 +1087,9 @@
             </a:r>
           </a:p>
           <a:p>
+            <a:endParaRPr lang="en-CA" sz="4000" dirty="0"/>
+          </a:p>
+          <a:p>
             <a:pPr>
               <a:buFont typeface="Arial" panose="020B0604020202020204" pitchFamily="34" charset="0"/>
               <a:buChar char="•"/>
@@ -1126,15 +1104,7 @@
             </a:r>
             <a:r>
               <a:rPr lang="en-CA" sz="4000" dirty="0"/>
-              <a:t>or the y </a:t>
-            </a:r>
-            <a:r>
-              <a:rPr lang="en-CA" sz="4000" b="1" dirty="0"/>
-              <a:t>intercept</a:t>
-            </a:r>
-            <a:r>
-              <a:rPr lang="en-CA" sz="4000" dirty="0"/>
-              <a:t>, represents the estimated base price of a house with </a:t>
+              <a:t>the estimated base price of a house with </a:t>
             </a:r>
             <a:r>
               <a:rPr lang="en-CA" sz="4000" b="1" dirty="0"/>
@@ -1165,6 +1135,13 @@
               <a:buFont typeface="Arial" panose="020B0604020202020204" pitchFamily="34" charset="0"/>
               <a:buChar char="•"/>
             </a:pPr>
+            <a:endParaRPr lang="en-CA" sz="4000" dirty="0"/>
+          </a:p>
+          <a:p>
+            <a:pPr>
+              <a:buFont typeface="Arial" panose="020B0604020202020204" pitchFamily="34" charset="0"/>
+              <a:buChar char="•"/>
+            </a:pPr>
             <a:r>
               <a:rPr lang="el-GR" sz="4000" b="1" dirty="0"/>
               <a:t>β₁</a:t>
@@ -1196,20 +1173,13 @@
             <a:br>
               <a:rPr lang="en-CA" sz="4000" dirty="0"/>
             </a:br>
-            <a:r>
-              <a:rPr lang="en-CA" sz="4000" dirty="0"/>
-              <a:t>For example, if </a:t>
-            </a:r>
-            <a:r>
-              <a:rPr lang="el-GR" sz="4000" dirty="0"/>
-              <a:t>β₁ = 150, </a:t>
-            </a:r>
-            <a:r>
-              <a:rPr lang="en-CA" sz="4000" dirty="0"/>
-              <a:t>that means for every extra square foot, the predicted price increases by 150 dollars</a:t>
-            </a:r>
-          </a:p>
-          <a:p>
+            <a:endParaRPr lang="en-CA" sz="4000" dirty="0"/>
+          </a:p>
+          <a:p>
+            <a:pPr>
+              <a:buFont typeface="Arial" panose="020B0604020202020204" pitchFamily="34" charset="0"/>
+              <a:buChar char="•"/>
+            </a:pPr>
             <a:r>
               <a:rPr lang="en-CA" sz="4000" dirty="0"/>
               <a:t>Together, </a:t>
@@ -1811,7 +1781,7 @@
                 <a:effectLst/>
                 <a:latin typeface="Arial" panose="020B0604020202020204" pitchFamily="34" charset="0"/>
               </a:rPr>
-              <a:t>$285,000</a:t>
+              <a:t>$286,000</a:t>
             </a:r>
             <a:r>
               <a:rPr lang="en-CA" sz="1800" b="0" i="0" u="none" strike="noStrike" dirty="0">
@@ -1879,7 +1849,7 @@
                 <a:effectLst/>
                 <a:latin typeface="Arial" panose="020B0604020202020204" pitchFamily="34" charset="0"/>
               </a:rPr>
-              <a:t>A </a:t>
+              <a:t>if we plugged in a </a:t>
             </a:r>
             <a:r>
               <a:rPr lang="en-CA" sz="1800" b="1" i="0" u="none" strike="noStrike" dirty="0">
@@ -1889,7 +1859,7 @@
                 <a:effectLst/>
                 <a:latin typeface="Arial" panose="020B0604020202020204" pitchFamily="34" charset="0"/>
               </a:rPr>
-              <a:t>6-million-square-foot house</a:t>
+              <a:t>6-million-square-foot house into our equation</a:t>
             </a:r>
             <a:r>
               <a:rPr lang="en-CA" sz="1800" b="0" i="0" u="none" strike="noStrike" dirty="0">
@@ -1899,7 +1869,7 @@
                 <a:effectLst/>
                 <a:latin typeface="Arial" panose="020B0604020202020204" pitchFamily="34" charset="0"/>
               </a:rPr>
-              <a:t>, which would produce an unusually high price,</a:t>
+              <a:t>, this would produce an unusually high price,</a:t>
             </a:r>
           </a:p>
           <a:p>
@@ -1921,7 +1891,7 @@
                 <a:effectLst/>
                 <a:latin typeface="Arial" panose="020B0604020202020204" pitchFamily="34" charset="0"/>
               </a:rPr>
-              <a:t>A </a:t>
+              <a:t>similarly, if we plugged in a  </a:t>
             </a:r>
             <a:r>
               <a:rPr lang="en-CA" sz="1800" b="1" i="0" u="none" strike="noStrike" dirty="0">
@@ -1931,7 +1901,7 @@
                 <a:effectLst/>
                 <a:latin typeface="Arial" panose="020B0604020202020204" pitchFamily="34" charset="0"/>
               </a:rPr>
-              <a:t>-2,000 square-foot house</a:t>
+              <a:t>-2,000 square-foot house into our equation</a:t>
             </a:r>
             <a:r>
               <a:rPr lang="en-CA" sz="1800" b="0" i="0" u="none" strike="noStrike" dirty="0">
@@ -1941,7 +1911,7 @@
                 <a:effectLst/>
                 <a:latin typeface="Arial" panose="020B0604020202020204" pitchFamily="34" charset="0"/>
               </a:rPr>
-              <a:t>, which would result in an illogical negative price.</a:t>
+              <a:t>, this would result in an illogical negative price.</a:t>
             </a:r>
           </a:p>
           <a:p>
@@ -2007,84 +1977,24 @@
               </a:spcAft>
             </a:pPr>
             <a:r>
-              <a:rPr lang="en-CA" sz="1800" b="0" i="0" u="none" strike="noStrike" dirty="0">
-                <a:solidFill>
-                  <a:srgbClr val="000000"/>
-                </a:solidFill>
-                <a:effectLst/>
-                <a:latin typeface="Arial" panose="020B0604020202020204" pitchFamily="34" charset="0"/>
-              </a:rPr>
-              <a:t>So, while linear regression can </a:t>
-            </a:r>
-            <a:r>
-              <a:rPr lang="en-CA" sz="1800" b="1" i="0" u="none" strike="noStrike" dirty="0">
-                <a:solidFill>
-                  <a:srgbClr val="000000"/>
-                </a:solidFill>
-                <a:effectLst/>
-                <a:latin typeface="Arial" panose="020B0604020202020204" pitchFamily="34" charset="0"/>
-              </a:rPr>
-              <a:t>extrapolate</a:t>
-            </a:r>
-            <a:r>
-              <a:rPr lang="en-CA" sz="1800" b="0" i="0" u="none" strike="noStrike" dirty="0">
-                <a:solidFill>
-                  <a:srgbClr val="000000"/>
-                </a:solidFill>
-                <a:effectLst/>
-                <a:latin typeface="Arial" panose="020B0604020202020204" pitchFamily="34" charset="0"/>
-              </a:rPr>
-              <a:t> (predict beyond the data range), it’s important to </a:t>
-            </a:r>
-            <a:r>
-              <a:rPr lang="en-CA" sz="1800" b="1" i="0" u="none" strike="noStrike" dirty="0">
-                <a:solidFill>
-                  <a:srgbClr val="000000"/>
-                </a:solidFill>
-                <a:effectLst/>
-                <a:latin typeface="Arial" panose="020B0604020202020204" pitchFamily="34" charset="0"/>
-              </a:rPr>
-              <a:t>make predictions only within the original data range</a:t>
-            </a:r>
-            <a:r>
-              <a:rPr lang="en-CA" sz="1800" b="0" i="0" u="none" strike="noStrike" dirty="0">
-                <a:solidFill>
-                  <a:srgbClr val="000000"/>
-                </a:solidFill>
-                <a:effectLst/>
-                <a:latin typeface="Arial" panose="020B0604020202020204" pitchFamily="34" charset="0"/>
-              </a:rPr>
-              <a:t>. Extrapolating outside of that range should be done </a:t>
-            </a:r>
-            <a:r>
-              <a:rPr lang="en-CA" sz="1800" b="1" i="0" u="none" strike="noStrike" dirty="0">
-                <a:solidFill>
-                  <a:srgbClr val="000000"/>
-                </a:solidFill>
-                <a:effectLst/>
-                <a:latin typeface="Arial" panose="020B0604020202020204" pitchFamily="34" charset="0"/>
-              </a:rPr>
-              <a:t>only when logically justified</a:t>
-            </a:r>
-            <a:r>
-              <a:rPr lang="en-CA" sz="1800" b="0" i="0" u="none" strike="noStrike" dirty="0">
-                <a:solidFill>
-                  <a:srgbClr val="000000"/>
-                </a:solidFill>
-                <a:effectLst/>
-                <a:latin typeface="Arial" panose="020B0604020202020204" pitchFamily="34" charset="0"/>
-              </a:rPr>
-              <a:t>.</a:t>
-            </a:r>
-            <a:endParaRPr lang="en-CA" b="0" dirty="0">
-              <a:effectLst/>
-            </a:endParaRPr>
-          </a:p>
-          <a:p>
+              <a:rPr lang="en-CA" sz="2800" dirty="0"/>
+              <a:t>So, while linear regression </a:t>
+            </a:r>
+            <a:r>
+              <a:rPr lang="en-CA" sz="2800" i="1" dirty="0"/>
+              <a:t>can</a:t>
+            </a:r>
+            <a:r>
+              <a:rPr lang="en-CA" sz="2800" dirty="0"/>
+              <a:t> extrapolate, meaning it can make predictions beyond the range of our data, those predictions become less reliable.</a:t>
+            </a:r>
             <a:br>
-              <a:rPr lang="en-CA" dirty="0"/>
+              <a:rPr lang="en-CA" sz="2800" dirty="0"/>
             </a:br>
-            <a:endParaRPr lang="en-US" dirty="0"/>
+            <a:r>
+              <a:rPr lang="en-CA" sz="2800" dirty="0"/>
+              <a:t>It’s best to make predictions only within the range of the original data — and to extrapolate beyond it only if there’s a strong, logical reason to believe the trend continues.</a:t>
+            </a:r>
           </a:p>
         </p:txBody>
       </p:sp>
@@ -2235,12 +2145,14 @@
               <a:rPr lang="en-CA" sz="2800" dirty="0"/>
               <a:t> to all the points on a scatter plot.</a:t>
             </a:r>
+          </a:p>
+          <a:p>
             <a:br>
               <a:rPr lang="en-CA" sz="2800" dirty="0"/>
             </a:br>
             <a:r>
               <a:rPr lang="en-CA" sz="2800" dirty="0"/>
-              <a:t>The line is “best” because it’s drawn in a way that makes the </a:t>
+              <a:t>ANIMATION The line is “best” because it’s drawn in a way that makes the </a:t>
             </a:r>
             <a:r>
               <a:rPr lang="en-CA" sz="2800" b="1" dirty="0"/>
@@ -2263,15 +2175,7 @@
             </a:br>
             <a:r>
               <a:rPr lang="en-CA" sz="2800" dirty="0"/>
-              <a:t>In other words, it tries to keep the gaps between the real points and the line, which reflect </a:t>
-            </a:r>
-            <a:r>
-              <a:rPr lang="en-CA" sz="2800" dirty="0" err="1"/>
-              <a:t>error,as</a:t>
-            </a:r>
-            <a:r>
-              <a:rPr lang="en-CA" sz="2800" dirty="0"/>
-              <a:t> small as possible on average.</a:t>
+              <a:t>In other words, it tries to keep the gaps between the real points and the line, which reflect error or residuals, as small as possible on average.</a:t>
             </a:r>
           </a:p>
           <a:p>
@@ -2784,7 +2688,13 @@
   <p:cSld>
     <p:spTree>
       <p:nvGrpSpPr>
-        <p:cNvPr id="1" name=""/>
+        <p:cNvPr id="1" name="">
+          <a:extLst>
+            <a:ext uri="{FF2B5EF4-FFF2-40B4-BE49-F238E27FC236}">
+              <a16:creationId xmlns:a16="http://schemas.microsoft.com/office/drawing/2014/main" id="{52DE496A-6EA2-92E9-94F9-FDBC05F32A2E}"/>
+            </a:ext>
+          </a:extLst>
+        </p:cNvPr>
         <p:cNvGrpSpPr/>
         <p:nvPr/>
       </p:nvGrpSpPr>
@@ -2798,7 +2708,13 @@
       </p:grpSpPr>
       <p:sp>
         <p:nvSpPr>
-          <p:cNvPr id="2" name="Slide Image Placeholder 1"/>
+          <p:cNvPr id="2" name="Slide Image Placeholder 1">
+            <a:extLst>
+              <a:ext uri="{FF2B5EF4-FFF2-40B4-BE49-F238E27FC236}">
+                <a16:creationId xmlns:a16="http://schemas.microsoft.com/office/drawing/2014/main" id="{4361157C-F77F-8F74-AA32-08BB667AB55E}"/>
+              </a:ext>
+            </a:extLst>
+          </p:cNvPr>
           <p:cNvSpPr>
             <a:spLocks noGrp="1" noRot="1" noChangeAspect="1"/>
           </p:cNvSpPr>
@@ -2810,7 +2726,13 @@
       </p:sp>
       <p:sp>
         <p:nvSpPr>
-          <p:cNvPr id="3" name="Notes Placeholder 2"/>
+          <p:cNvPr id="3" name="Notes Placeholder 2">
+            <a:extLst>
+              <a:ext uri="{FF2B5EF4-FFF2-40B4-BE49-F238E27FC236}">
+                <a16:creationId xmlns:a16="http://schemas.microsoft.com/office/drawing/2014/main" id="{45267C95-BEAA-BF38-2D46-C145CD196D9C}"/>
+              </a:ext>
+            </a:extLst>
+          </p:cNvPr>
           <p:cNvSpPr>
             <a:spLocks noGrp="1"/>
           </p:cNvSpPr>
@@ -2906,161 +2828,26 @@
             </a:r>
           </a:p>
           <a:p>
-            <a:endParaRPr lang="en-CA" sz="7200" dirty="0"/>
-          </a:p>
-          <a:p>
-            <a:r>
-              <a:rPr lang="en-CA" sz="7200" dirty="0"/>
-              <a:t>While RMSE focuses on prediction accuracy, </a:t>
-            </a:r>
-            <a:r>
-              <a:rPr lang="en-CA" sz="7200" b="1" dirty="0"/>
-              <a:t>R²</a:t>
-            </a:r>
-            <a:r>
-              <a:rPr lang="en-CA" sz="7200" dirty="0"/>
-              <a:t> tells us </a:t>
-            </a:r>
-            <a:r>
-              <a:rPr lang="en-CA" sz="7200" b="1" dirty="0"/>
-              <a:t>how well the model explains the variation</a:t>
-            </a:r>
-            <a:r>
-              <a:rPr lang="en-CA" sz="7200" dirty="0"/>
-              <a:t> in the response variable — or how much of the change in </a:t>
-            </a:r>
-            <a:r>
-              <a:rPr lang="en-CA" sz="7200" i="1" dirty="0"/>
-              <a:t>Y</a:t>
-            </a:r>
-            <a:r>
-              <a:rPr lang="en-CA" sz="7200" dirty="0"/>
-              <a:t> can be explained by </a:t>
-            </a:r>
-            <a:r>
-              <a:rPr lang="en-CA" sz="7200" i="1" dirty="0"/>
-              <a:t>X</a:t>
-            </a:r>
-            <a:r>
-              <a:rPr lang="en-CA" sz="7200" dirty="0"/>
-              <a:t>.</a:t>
-            </a:r>
-            <a:br>
-              <a:rPr lang="en-CA" sz="7200" dirty="0"/>
-            </a:br>
-            <a:r>
-              <a:rPr lang="en-CA" sz="7200" dirty="0"/>
-              <a:t>It ranges from 0 to 1:</a:t>
-            </a:r>
-          </a:p>
-          <a:p>
-            <a:pPr>
-              <a:buFont typeface="Arial" panose="020B0604020202020204" pitchFamily="34" charset="0"/>
-              <a:buChar char="•"/>
-            </a:pPr>
-            <a:r>
-              <a:rPr lang="en-CA" sz="7200" dirty="0"/>
-              <a:t>An </a:t>
-            </a:r>
-            <a:r>
-              <a:rPr lang="en-CA" sz="7200" b="1" dirty="0"/>
-              <a:t>R² close to 1</a:t>
-            </a:r>
-            <a:r>
-              <a:rPr lang="en-CA" sz="7200" dirty="0"/>
-              <a:t> means the model explains most of the variation — the line fits the data well.</a:t>
-            </a:r>
-          </a:p>
-          <a:p>
-            <a:pPr>
-              <a:buFont typeface="Arial" panose="020B0604020202020204" pitchFamily="34" charset="0"/>
-              <a:buChar char="•"/>
-            </a:pPr>
-            <a:r>
-              <a:rPr lang="en-CA" sz="7200" dirty="0"/>
-              <a:t>An </a:t>
-            </a:r>
-            <a:r>
-              <a:rPr lang="en-CA" sz="7200" b="1" dirty="0"/>
-              <a:t>R² close to 0</a:t>
-            </a:r>
-            <a:r>
-              <a:rPr lang="en-CA" sz="7200" dirty="0"/>
-              <a:t> means it explains very little — the line doesn’t capture the pattern effectively.</a:t>
-            </a:r>
-          </a:p>
-          <a:p>
-            <a:r>
-              <a:rPr lang="en-CA" sz="7200" dirty="0"/>
-              <a:t>In simple linear regression, </a:t>
-            </a:r>
-            <a:r>
-              <a:rPr lang="en-CA" sz="7200" b="1" dirty="0"/>
-              <a:t>R² is the square of the correlation coefficient (r)</a:t>
-            </a:r>
-            <a:r>
-              <a:rPr lang="en-CA" sz="7200" dirty="0"/>
-              <a:t>, meaning it reflects the strength of the linear relationship, but in terms of </a:t>
-            </a:r>
-            <a:r>
-              <a:rPr lang="en-CA" sz="7200" b="1" dirty="0"/>
-              <a:t>explained variance</a:t>
-            </a:r>
-            <a:r>
-              <a:rPr lang="en-CA" sz="7200" dirty="0"/>
-              <a:t>.</a:t>
-            </a:r>
-          </a:p>
-          <a:p>
-            <a:r>
-              <a:rPr lang="en-CA" sz="7200" dirty="0"/>
-              <a:t>Together, </a:t>
-            </a:r>
-            <a:r>
-              <a:rPr lang="en-CA" sz="7200" b="1" dirty="0"/>
-              <a:t>R² and RMSE</a:t>
-            </a:r>
-            <a:r>
-              <a:rPr lang="en-CA" sz="7200" dirty="0"/>
-              <a:t> give us a complete picture of how our model performs:</a:t>
-            </a:r>
-          </a:p>
-          <a:p>
-            <a:pPr>
-              <a:buFont typeface="Arial" panose="020B0604020202020204" pitchFamily="34" charset="0"/>
-              <a:buChar char="•"/>
-            </a:pPr>
-            <a:r>
-              <a:rPr lang="en-CA" sz="7200" b="1" dirty="0"/>
-              <a:t>R²</a:t>
-            </a:r>
-            <a:r>
-              <a:rPr lang="en-CA" sz="7200" dirty="0"/>
-              <a:t> shows how well the model fits the data overall.</a:t>
-            </a:r>
-          </a:p>
-          <a:p>
-            <a:pPr>
-              <a:buFont typeface="Arial" panose="020B0604020202020204" pitchFamily="34" charset="0"/>
-              <a:buChar char="•"/>
-            </a:pPr>
-            <a:r>
-              <a:rPr lang="en-CA" sz="7200" b="1" dirty="0"/>
-              <a:t>RMSE</a:t>
-            </a:r>
-            <a:r>
-              <a:rPr lang="en-CA" sz="7200" dirty="0"/>
-              <a:t> tells us how accurate the predictions are, on average.</a:t>
-            </a:r>
-          </a:p>
-          <a:p>
+            <a:endParaRPr lang="en-US" dirty="0"/>
+          </a:p>
+          <a:p>
+            <a:r>
+              <a:rPr lang="en-CA" sz="1200" dirty="0"/>
+              <a:t>While RMSE focuses on prediction accuracy</a:t>
+            </a:r>
             <a:endParaRPr lang="en-US" dirty="0"/>
           </a:p>
         </p:txBody>
       </p:sp>
       <p:sp>
         <p:nvSpPr>
-          <p:cNvPr id="4" name="Slide Number Placeholder 3"/>
+          <p:cNvPr id="4" name="Slide Number Placeholder 3">
+            <a:extLst>
+              <a:ext uri="{FF2B5EF4-FFF2-40B4-BE49-F238E27FC236}">
+                <a16:creationId xmlns:a16="http://schemas.microsoft.com/office/drawing/2014/main" id="{1E050EA9-249A-A903-D669-19F520D85E07}"/>
+              </a:ext>
+            </a:extLst>
+          </p:cNvPr>
           <p:cNvSpPr>
             <a:spLocks noGrp="1"/>
           </p:cNvSpPr>
@@ -3073,18 +2860,78 @@
           <a:bodyPr/>
           <a:lstStyle/>
           <a:p>
+            <a:pPr marL="0" marR="0" lvl="0" indent="0" algn="r" defTabSz="914400" rtl="0" eaLnBrk="1" fontAlgn="auto" latinLnBrk="0" hangingPunct="1">
+              <a:lnSpc>
+                <a:spcPct val="100000"/>
+              </a:lnSpc>
+              <a:spcBef>
+                <a:spcPts val="0"/>
+              </a:spcBef>
+              <a:spcAft>
+                <a:spcPts val="0"/>
+              </a:spcAft>
+              <a:buClrTx/>
+              <a:buSzTx/>
+              <a:buFontTx/>
+              <a:buNone/>
+              <a:tabLst/>
+              <a:defRPr/>
+            </a:pPr>
             <a:fld id="{BDEC409A-6EC9-B941-BC41-C561F1F9298C}" type="slidenum">
-              <a:rPr lang="en-US" smtClean="0"/>
+              <a:rPr kumimoji="0" lang="en-US" sz="1200" b="0" i="0" u="none" strike="noStrike" kern="1200" cap="none" spc="0" normalizeH="0" baseline="0" noProof="0" smtClean="0">
+                <a:ln>
+                  <a:noFill/>
+                </a:ln>
+                <a:solidFill>
+                  <a:prstClr val="black"/>
+                </a:solidFill>
+                <a:effectLst/>
+                <a:uLnTx/>
+                <a:uFillTx/>
+                <a:latin typeface="Aptos" panose="02110004020202020204"/>
+                <a:ea typeface="+mn-ea"/>
+                <a:cs typeface="+mn-cs"/>
+              </a:rPr>
+              <a:pPr marL="0" marR="0" lvl="0" indent="0" algn="r" defTabSz="914400" rtl="0" eaLnBrk="1" fontAlgn="auto" latinLnBrk="0" hangingPunct="1">
+                <a:lnSpc>
+                  <a:spcPct val="100000"/>
+                </a:lnSpc>
+                <a:spcBef>
+                  <a:spcPts val="0"/>
+                </a:spcBef>
+                <a:spcAft>
+                  <a:spcPts val="0"/>
+                </a:spcAft>
+                <a:buClrTx/>
+                <a:buSzTx/>
+                <a:buFontTx/>
+                <a:buNone/>
+                <a:tabLst/>
+                <a:defRPr/>
+              </a:pPr>
               <a:t>16</a:t>
             </a:fld>
-            <a:endParaRPr lang="en-US"/>
+            <a:endParaRPr kumimoji="0" lang="en-US" sz="1200" b="0" i="0" u="none" strike="noStrike" kern="1200" cap="none" spc="0" normalizeH="0" baseline="0" noProof="0">
+              <a:ln>
+                <a:noFill/>
+              </a:ln>
+              <a:solidFill>
+                <a:prstClr val="black"/>
+              </a:solidFill>
+              <a:effectLst/>
+              <a:uLnTx/>
+              <a:uFillTx/>
+              <a:latin typeface="Aptos" panose="02110004020202020204"/>
+              <a:ea typeface="+mn-ea"/>
+              <a:cs typeface="+mn-cs"/>
+            </a:endParaRPr>
           </a:p>
         </p:txBody>
       </p:sp>
     </p:spTree>
     <p:extLst>
       <p:ext uri="{BB962C8B-B14F-4D97-AF65-F5344CB8AC3E}">
-        <p14:creationId xmlns:p14="http://schemas.microsoft.com/office/powerpoint/2010/main" val="3939982765"/>
+        <p14:creationId xmlns:p14="http://schemas.microsoft.com/office/powerpoint/2010/main" val="1715426483"/>
       </p:ext>
     </p:extLst>
   </p:cSld>
@@ -3099,7 +2946,13 @@
   <p:cSld>
     <p:spTree>
       <p:nvGrpSpPr>
-        <p:cNvPr id="1" name=""/>
+        <p:cNvPr id="1" name="">
+          <a:extLst>
+            <a:ext uri="{FF2B5EF4-FFF2-40B4-BE49-F238E27FC236}">
+              <a16:creationId xmlns:a16="http://schemas.microsoft.com/office/drawing/2014/main" id="{02BFC161-96C1-BAC9-7F19-92DD52A073F8}"/>
+            </a:ext>
+          </a:extLst>
+        </p:cNvPr>
         <p:cNvGrpSpPr/>
         <p:nvPr/>
       </p:nvGrpSpPr>
@@ -3113,7 +2966,13 @@
       </p:grpSpPr>
       <p:sp>
         <p:nvSpPr>
-          <p:cNvPr id="2" name="Slide Image Placeholder 1"/>
+          <p:cNvPr id="2" name="Slide Image Placeholder 1">
+            <a:extLst>
+              <a:ext uri="{FF2B5EF4-FFF2-40B4-BE49-F238E27FC236}">
+                <a16:creationId xmlns:a16="http://schemas.microsoft.com/office/drawing/2014/main" id="{225190D2-2E0B-927D-6A67-70E3F4752839}"/>
+              </a:ext>
+            </a:extLst>
+          </p:cNvPr>
           <p:cNvSpPr>
             <a:spLocks noGrp="1" noRot="1" noChangeAspect="1"/>
           </p:cNvSpPr>
@@ -3125,7 +2984,13 @@
       </p:sp>
       <p:sp>
         <p:nvSpPr>
-          <p:cNvPr id="3" name="Notes Placeholder 2"/>
+          <p:cNvPr id="3" name="Notes Placeholder 2">
+            <a:extLst>
+              <a:ext uri="{FF2B5EF4-FFF2-40B4-BE49-F238E27FC236}">
+                <a16:creationId xmlns:a16="http://schemas.microsoft.com/office/drawing/2014/main" id="{54A5920E-8FBE-27C6-730D-04F5A2C7E6AE}"/>
+              </a:ext>
+            </a:extLst>
+          </p:cNvPr>
           <p:cNvSpPr>
             <a:spLocks noGrp="1"/>
           </p:cNvSpPr>
@@ -3138,57 +3003,47 @@
           <a:bodyPr/>
           <a:lstStyle/>
           <a:p>
-            <a:r>
-              <a:rPr lang="en-CA" dirty="0"/>
-              <a:t>Everything we’ve covered today — </a:t>
-            </a:r>
-            <a:r>
-              <a:rPr lang="en-CA" b="1" dirty="0"/>
-              <a:t>correlation</a:t>
-            </a:r>
-            <a:r>
-              <a:rPr lang="en-CA" dirty="0"/>
-              <a:t>, </a:t>
-            </a:r>
-            <a:r>
-              <a:rPr lang="en-CA" b="1" dirty="0"/>
-              <a:t>simple linear regression</a:t>
-            </a:r>
-            <a:r>
-              <a:rPr lang="en-CA" dirty="0"/>
-              <a:t>,— forms the foundation of how we understand and model relationships between numeric variables.</a:t>
-            </a:r>
-          </a:p>
-          <a:p>
-            <a:endParaRPr lang="en-CA" dirty="0"/>
-          </a:p>
-          <a:p>
-            <a:r>
-              <a:rPr lang="en-CA" dirty="0"/>
-              <a:t>It’s worth noting that there are also </a:t>
-            </a:r>
-            <a:r>
-              <a:rPr lang="en-CA" b="1" dirty="0"/>
-              <a:t>extensions</a:t>
-            </a:r>
-            <a:r>
-              <a:rPr lang="en-CA" dirty="0"/>
-              <a:t> that allow us to model more complex patterns in data.</a:t>
+            <a:endParaRPr lang="en-CA" sz="7200" dirty="0"/>
+          </a:p>
+          <a:p>
+            <a:r>
+              <a:rPr lang="en-CA" sz="7200" b="1" dirty="0"/>
+              <a:t>R²</a:t>
+            </a:r>
+            <a:r>
+              <a:rPr lang="en-CA" sz="7200" dirty="0"/>
+              <a:t> tells us </a:t>
+            </a:r>
+            <a:r>
+              <a:rPr lang="en-CA" sz="7200" b="1" dirty="0"/>
+              <a:t>how well the model explains the variation</a:t>
+            </a:r>
+            <a:r>
+              <a:rPr lang="en-CA" sz="7200" dirty="0"/>
+              <a:t> in the response variable — or how much of the change in </a:t>
+            </a:r>
+            <a:r>
+              <a:rPr lang="en-CA" sz="7200" i="1" dirty="0"/>
+              <a:t>Y</a:t>
+            </a:r>
+            <a:r>
+              <a:rPr lang="en-CA" sz="7200" dirty="0"/>
+              <a:t> can be explained by </a:t>
+            </a:r>
+            <a:r>
+              <a:rPr lang="en-CA" sz="7200" i="1" dirty="0"/>
+              <a:t>X</a:t>
+            </a:r>
+            <a:r>
+              <a:rPr lang="en-CA" sz="7200" dirty="0"/>
+              <a:t>.</a:t>
             </a:r>
             <a:br>
-              <a:rPr lang="en-CA" dirty="0"/>
+              <a:rPr lang="en-CA" sz="7200" dirty="0"/>
             </a:br>
             <a:r>
-              <a:rPr lang="en-CA" dirty="0"/>
-              <a:t>These are </a:t>
-            </a:r>
-            <a:r>
-              <a:rPr lang="en-CA" b="1" dirty="0"/>
-              <a:t>beyond the scope</a:t>
-            </a:r>
-            <a:r>
-              <a:rPr lang="en-CA" dirty="0"/>
-              <a:t> of today’s session, but here’s a quick preview:</a:t>
+              <a:rPr lang="en-CA" sz="7200" dirty="0"/>
+              <a:t>It ranges from 0 to 1:</a:t>
             </a:r>
           </a:p>
           <a:p>
@@ -3197,24 +3052,16 @@
               <a:buChar char="•"/>
             </a:pPr>
             <a:r>
-              <a:rPr lang="en-CA" dirty="0"/>
-              <a:t>We can </a:t>
-            </a:r>
-            <a:r>
-              <a:rPr lang="en-CA" b="1" dirty="0"/>
-              <a:t>include categorical predictors</a:t>
-            </a:r>
-            <a:r>
-              <a:rPr lang="en-CA" dirty="0"/>
-              <a:t>, such as the </a:t>
-            </a:r>
-            <a:r>
-              <a:rPr lang="en-CA" b="1" dirty="0"/>
-              <a:t>type of home</a:t>
-            </a:r>
-            <a:r>
-              <a:rPr lang="en-CA" dirty="0"/>
-              <a:t> — for instance, Residential, Multi-family, or Condo.</a:t>
+              <a:rPr lang="en-CA" sz="7200" dirty="0"/>
+              <a:t>An </a:t>
+            </a:r>
+            <a:r>
+              <a:rPr lang="en-CA" sz="7200" b="1" dirty="0"/>
+              <a:t>R² close to 1</a:t>
+            </a:r>
+            <a:r>
+              <a:rPr lang="en-CA" sz="7200" dirty="0"/>
+              <a:t> means the model explains most of the variation — the line fits the data well.</a:t>
             </a:r>
           </a:p>
           <a:p>
@@ -3223,32 +3070,55 @@
               <a:buChar char="•"/>
             </a:pPr>
             <a:r>
-              <a:rPr lang="en-CA" dirty="0"/>
-              <a:t>We can </a:t>
-            </a:r>
-            <a:r>
-              <a:rPr lang="en-CA" b="1" dirty="0"/>
-              <a:t>add multiple predictors</a:t>
-            </a:r>
-            <a:r>
-              <a:rPr lang="en-CA" dirty="0"/>
-              <a:t>, also known as multivariable linear regression, so combining </a:t>
-            </a:r>
-            <a:r>
-              <a:rPr lang="en-CA" b="1" dirty="0"/>
-              <a:t>house size</a:t>
-            </a:r>
-            <a:r>
-              <a:rPr lang="en-CA" dirty="0"/>
-              <a:t> and maybe  </a:t>
-            </a:r>
-            <a:r>
-              <a:rPr lang="en-CA" b="1" dirty="0"/>
-              <a:t>number of bedrooms</a:t>
-            </a:r>
-            <a:r>
-              <a:rPr lang="en-CA" dirty="0"/>
-              <a:t> to improve our predictions.</a:t>
+              <a:rPr lang="en-CA" sz="7200" dirty="0"/>
+              <a:t>An </a:t>
+            </a:r>
+            <a:r>
+              <a:rPr lang="en-CA" sz="7200" b="1" dirty="0"/>
+              <a:t>R² close to 0</a:t>
+            </a:r>
+            <a:r>
+              <a:rPr lang="en-CA" sz="7200" dirty="0"/>
+              <a:t> means it explains very little — the line doesn’t capture the pattern effectively.</a:t>
+            </a:r>
+          </a:p>
+          <a:p>
+            <a:r>
+              <a:rPr lang="en-CA" sz="7200" dirty="0"/>
+              <a:t>In simple linear regression, </a:t>
+            </a:r>
+            <a:r>
+              <a:rPr lang="en-CA" sz="7200" b="1" dirty="0"/>
+              <a:t>R² is the square of the correlation coefficient (r)</a:t>
+            </a:r>
+            <a:r>
+              <a:rPr lang="en-CA" sz="7200" dirty="0"/>
+              <a:t>, meaning it reflects the strength of the linear relationship, but in terms of </a:t>
+            </a:r>
+            <a:r>
+              <a:rPr lang="en-CA" sz="7200" b="1" dirty="0"/>
+              <a:t>explained variance</a:t>
+            </a:r>
+            <a:r>
+              <a:rPr lang="en-CA" sz="7200" dirty="0"/>
+              <a:t>.</a:t>
+            </a:r>
+          </a:p>
+          <a:p>
+            <a:endParaRPr lang="en-CA" sz="7200" dirty="0"/>
+          </a:p>
+          <a:p>
+            <a:r>
+              <a:rPr lang="en-CA" sz="7200" dirty="0"/>
+              <a:t>Together, </a:t>
+            </a:r>
+            <a:r>
+              <a:rPr lang="en-CA" sz="7200" b="1" dirty="0"/>
+              <a:t>R² and RMSE</a:t>
+            </a:r>
+            <a:r>
+              <a:rPr lang="en-CA" sz="7200" dirty="0"/>
+              <a:t> give us a complete picture of how our model performs:</a:t>
             </a:r>
           </a:p>
           <a:p>
@@ -3257,22 +3127,26 @@
               <a:buChar char="•"/>
             </a:pPr>
             <a:r>
-              <a:rPr lang="en-CA" dirty="0"/>
-              <a:t>And we can </a:t>
-            </a:r>
-            <a:r>
-              <a:rPr lang="en-CA" b="1" dirty="0"/>
-              <a:t>model non-linear relationships</a:t>
-            </a:r>
-            <a:r>
-              <a:rPr lang="en-CA" dirty="0"/>
-              <a:t>, where the trend in the data curves rather than forms a straight line.</a:t>
-            </a:r>
-          </a:p>
-          <a:p>
-            <a:r>
-              <a:rPr lang="en-CA" dirty="0"/>
-              <a:t>These techniques build on the same core ideas we explored in this demonstration — just extended to capture more complex real-world relationships.</a:t>
+              <a:rPr lang="en-CA" sz="7200" b="1" dirty="0"/>
+              <a:t>R²</a:t>
+            </a:r>
+            <a:r>
+              <a:rPr lang="en-CA" sz="7200" dirty="0"/>
+              <a:t> shows how well the model fits the data overall.</a:t>
+            </a:r>
+          </a:p>
+          <a:p>
+            <a:pPr>
+              <a:buFont typeface="Arial" panose="020B0604020202020204" pitchFamily="34" charset="0"/>
+              <a:buChar char="•"/>
+            </a:pPr>
+            <a:r>
+              <a:rPr lang="en-CA" sz="7200" b="1" dirty="0"/>
+              <a:t>RMSE</a:t>
+            </a:r>
+            <a:r>
+              <a:rPr lang="en-CA" sz="7200" dirty="0"/>
+              <a:t> tells us how accurate the predictions are, on average.</a:t>
             </a:r>
           </a:p>
           <a:p>
@@ -3282,7 +3156,13 @@
       </p:sp>
       <p:sp>
         <p:nvSpPr>
-          <p:cNvPr id="4" name="Slide Number Placeholder 3"/>
+          <p:cNvPr id="4" name="Slide Number Placeholder 3">
+            <a:extLst>
+              <a:ext uri="{FF2B5EF4-FFF2-40B4-BE49-F238E27FC236}">
+                <a16:creationId xmlns:a16="http://schemas.microsoft.com/office/drawing/2014/main" id="{4552B90A-C700-1EE7-F94A-652639559491}"/>
+              </a:ext>
+            </a:extLst>
+          </p:cNvPr>
           <p:cNvSpPr>
             <a:spLocks noGrp="1"/>
           </p:cNvSpPr>
@@ -3295,18 +3175,78 @@
           <a:bodyPr/>
           <a:lstStyle/>
           <a:p>
+            <a:pPr marL="0" marR="0" lvl="0" indent="0" algn="r" defTabSz="914400" rtl="0" eaLnBrk="1" fontAlgn="auto" latinLnBrk="0" hangingPunct="1">
+              <a:lnSpc>
+                <a:spcPct val="100000"/>
+              </a:lnSpc>
+              <a:spcBef>
+                <a:spcPts val="0"/>
+              </a:spcBef>
+              <a:spcAft>
+                <a:spcPts val="0"/>
+              </a:spcAft>
+              <a:buClrTx/>
+              <a:buSzTx/>
+              <a:buFontTx/>
+              <a:buNone/>
+              <a:tabLst/>
+              <a:defRPr/>
+            </a:pPr>
             <a:fld id="{BDEC409A-6EC9-B941-BC41-C561F1F9298C}" type="slidenum">
-              <a:rPr lang="en-US" smtClean="0"/>
+              <a:rPr kumimoji="0" lang="en-US" sz="1200" b="0" i="0" u="none" strike="noStrike" kern="1200" cap="none" spc="0" normalizeH="0" baseline="0" noProof="0" smtClean="0">
+                <a:ln>
+                  <a:noFill/>
+                </a:ln>
+                <a:solidFill>
+                  <a:prstClr val="black"/>
+                </a:solidFill>
+                <a:effectLst/>
+                <a:uLnTx/>
+                <a:uFillTx/>
+                <a:latin typeface="Aptos" panose="02110004020202020204"/>
+                <a:ea typeface="+mn-ea"/>
+                <a:cs typeface="+mn-cs"/>
+              </a:rPr>
+              <a:pPr marL="0" marR="0" lvl="0" indent="0" algn="r" defTabSz="914400" rtl="0" eaLnBrk="1" fontAlgn="auto" latinLnBrk="0" hangingPunct="1">
+                <a:lnSpc>
+                  <a:spcPct val="100000"/>
+                </a:lnSpc>
+                <a:spcBef>
+                  <a:spcPts val="0"/>
+                </a:spcBef>
+                <a:spcAft>
+                  <a:spcPts val="0"/>
+                </a:spcAft>
+                <a:buClrTx/>
+                <a:buSzTx/>
+                <a:buFontTx/>
+                <a:buNone/>
+                <a:tabLst/>
+                <a:defRPr/>
+              </a:pPr>
               <a:t>17</a:t>
             </a:fld>
-            <a:endParaRPr lang="en-US"/>
+            <a:endParaRPr kumimoji="0" lang="en-US" sz="1200" b="0" i="0" u="none" strike="noStrike" kern="1200" cap="none" spc="0" normalizeH="0" baseline="0" noProof="0">
+              <a:ln>
+                <a:noFill/>
+              </a:ln>
+              <a:solidFill>
+                <a:prstClr val="black"/>
+              </a:solidFill>
+              <a:effectLst/>
+              <a:uLnTx/>
+              <a:uFillTx/>
+              <a:latin typeface="Aptos" panose="02110004020202020204"/>
+              <a:ea typeface="+mn-ea"/>
+              <a:cs typeface="+mn-cs"/>
+            </a:endParaRPr>
           </a:p>
         </p:txBody>
       </p:sp>
     </p:spTree>
     <p:extLst>
       <p:ext uri="{BB962C8B-B14F-4D97-AF65-F5344CB8AC3E}">
-        <p14:creationId xmlns:p14="http://schemas.microsoft.com/office/powerpoint/2010/main" val="2513840336"/>
+        <p14:creationId xmlns:p14="http://schemas.microsoft.com/office/powerpoint/2010/main" val="1262081470"/>
       </p:ext>
     </p:extLst>
   </p:cSld>
@@ -6221,33 +6161,8 @@
             </a:r>
             <a:r>
               <a:rPr lang="en-CA" dirty="0"/>
-              <a:t> can be explained by house size!</a:t>
-            </a:r>
-          </a:p>
-          <a:p>
-            <a:endParaRPr lang="en-CA" dirty="0"/>
-          </a:p>
-          <a:p>
-            <a:r>
-              <a:rPr lang="en-CA" sz="1000" dirty="0"/>
-              <a:t>So while the model captures the overall trend quite well there’s still quite a bit of variability that house size alone can’t explain.</a:t>
-            </a:r>
-          </a:p>
-          <a:p>
-            <a:endParaRPr lang="en-CA" sz="1000" dirty="0"/>
-          </a:p>
-          <a:p>
-            <a:r>
-              <a:rPr lang="en-CA" sz="1200" dirty="0"/>
-              <a:t>In a real-world setting, we could improve our model for example by including more predictors — just like we discussed earlier when talking about extensions beyond simple linear regression.</a:t>
-            </a:r>
-            <a:endParaRPr lang="en-CA" sz="800" b="0" i="0" u="none" strike="noStrike" dirty="0">
-              <a:solidFill>
-                <a:srgbClr val="212121"/>
-              </a:solidFill>
-              <a:effectLst/>
-              <a:latin typeface="Arial" panose="020B0604020202020204" pitchFamily="34" charset="0"/>
-            </a:endParaRPr>
+              <a:t> can be explained by house size alone!</a:t>
+            </a:r>
           </a:p>
           <a:p>
             <a:endParaRPr lang="en-CA" dirty="0"/>
@@ -6852,6 +6767,228 @@
 </file>
 
 <file path=ppt/notesSlides/notesSlide31.xml><?xml version="1.0" encoding="utf-8"?>
+<p:notes xmlns:a="http://schemas.openxmlformats.org/drawingml/2006/main" xmlns:r="http://schemas.openxmlformats.org/officeDocument/2006/relationships" xmlns:p="http://schemas.openxmlformats.org/presentationml/2006/main">
+  <p:cSld>
+    <p:spTree>
+      <p:nvGrpSpPr>
+        <p:cNvPr id="1" name=""/>
+        <p:cNvGrpSpPr/>
+        <p:nvPr/>
+      </p:nvGrpSpPr>
+      <p:grpSpPr>
+        <a:xfrm>
+          <a:off x="0" y="0"/>
+          <a:ext cx="0" cy="0"/>
+          <a:chOff x="0" y="0"/>
+          <a:chExt cx="0" cy="0"/>
+        </a:xfrm>
+      </p:grpSpPr>
+      <p:sp>
+        <p:nvSpPr>
+          <p:cNvPr id="2" name="Slide Image Placeholder 1"/>
+          <p:cNvSpPr>
+            <a:spLocks noGrp="1" noRot="1" noChangeAspect="1"/>
+          </p:cNvSpPr>
+          <p:nvPr>
+            <p:ph type="sldImg"/>
+          </p:nvPr>
+        </p:nvSpPr>
+        <p:spPr/>
+      </p:sp>
+      <p:sp>
+        <p:nvSpPr>
+          <p:cNvPr id="3" name="Notes Placeholder 2"/>
+          <p:cNvSpPr>
+            <a:spLocks noGrp="1"/>
+          </p:cNvSpPr>
+          <p:nvPr>
+            <p:ph type="body" idx="1"/>
+          </p:nvPr>
+        </p:nvSpPr>
+        <p:spPr/>
+        <p:txBody>
+          <a:bodyPr/>
+          <a:lstStyle/>
+          <a:p>
+            <a:r>
+              <a:rPr lang="en-CA" dirty="0"/>
+              <a:t>Everything we’ve covered today — </a:t>
+            </a:r>
+            <a:r>
+              <a:rPr lang="en-CA" b="1" dirty="0"/>
+              <a:t>correlation</a:t>
+            </a:r>
+            <a:r>
+              <a:rPr lang="en-CA" dirty="0"/>
+              <a:t>, </a:t>
+            </a:r>
+            <a:r>
+              <a:rPr lang="en-CA" b="1" dirty="0"/>
+              <a:t>simple linear regression</a:t>
+            </a:r>
+            <a:r>
+              <a:rPr lang="en-CA" dirty="0"/>
+              <a:t>,— forms the foundation of how we understand and model relationships between numeric variables.</a:t>
+            </a:r>
+          </a:p>
+          <a:p>
+            <a:endParaRPr lang="en-CA" dirty="0"/>
+          </a:p>
+          <a:p>
+            <a:r>
+              <a:rPr lang="en-CA" dirty="0"/>
+              <a:t>It’s worth noting that there are also </a:t>
+            </a:r>
+            <a:r>
+              <a:rPr lang="en-CA" b="1" dirty="0"/>
+              <a:t>extensions</a:t>
+            </a:r>
+            <a:r>
+              <a:rPr lang="en-CA" dirty="0"/>
+              <a:t> that allow us to model more complex patterns in data.</a:t>
+            </a:r>
+            <a:br>
+              <a:rPr lang="en-CA" dirty="0"/>
+            </a:br>
+            <a:r>
+              <a:rPr lang="en-CA" dirty="0"/>
+              <a:t>These are </a:t>
+            </a:r>
+            <a:r>
+              <a:rPr lang="en-CA" b="1" dirty="0"/>
+              <a:t>beyond the scope</a:t>
+            </a:r>
+            <a:r>
+              <a:rPr lang="en-CA" dirty="0"/>
+              <a:t> of today’s session, but here’s a quick preview:</a:t>
+            </a:r>
+          </a:p>
+          <a:p>
+            <a:pPr>
+              <a:buFont typeface="Arial" panose="020B0604020202020204" pitchFamily="34" charset="0"/>
+              <a:buChar char="•"/>
+            </a:pPr>
+            <a:r>
+              <a:rPr lang="en-CA" dirty="0"/>
+              <a:t>We can </a:t>
+            </a:r>
+            <a:r>
+              <a:rPr lang="en-CA" b="1" dirty="0"/>
+              <a:t>include categorical predictors</a:t>
+            </a:r>
+            <a:r>
+              <a:rPr lang="en-CA" dirty="0"/>
+              <a:t>, such as the </a:t>
+            </a:r>
+            <a:r>
+              <a:rPr lang="en-CA" b="1" dirty="0"/>
+              <a:t>type of home</a:t>
+            </a:r>
+            <a:r>
+              <a:rPr lang="en-CA" dirty="0"/>
+              <a:t> — for instance, Residential, Multi-family, or Condo.</a:t>
+            </a:r>
+          </a:p>
+          <a:p>
+            <a:pPr>
+              <a:buFont typeface="Arial" panose="020B0604020202020204" pitchFamily="34" charset="0"/>
+              <a:buChar char="•"/>
+            </a:pPr>
+            <a:r>
+              <a:rPr lang="en-CA" dirty="0"/>
+              <a:t>We can </a:t>
+            </a:r>
+            <a:r>
+              <a:rPr lang="en-CA" b="1" dirty="0"/>
+              <a:t>add multiple predictors</a:t>
+            </a:r>
+            <a:r>
+              <a:rPr lang="en-CA" dirty="0"/>
+              <a:t>, also known as multivariable linear regression, so combining </a:t>
+            </a:r>
+            <a:r>
+              <a:rPr lang="en-CA" b="1" dirty="0"/>
+              <a:t>house size</a:t>
+            </a:r>
+            <a:r>
+              <a:rPr lang="en-CA" dirty="0"/>
+              <a:t> and maybe  </a:t>
+            </a:r>
+            <a:r>
+              <a:rPr lang="en-CA" b="1" dirty="0"/>
+              <a:t>number of bedrooms</a:t>
+            </a:r>
+            <a:r>
+              <a:rPr lang="en-CA" dirty="0"/>
+              <a:t> to improve our predictions.</a:t>
+            </a:r>
+          </a:p>
+          <a:p>
+            <a:pPr>
+              <a:buFont typeface="Arial" panose="020B0604020202020204" pitchFamily="34" charset="0"/>
+              <a:buChar char="•"/>
+            </a:pPr>
+            <a:r>
+              <a:rPr lang="en-CA" dirty="0"/>
+              <a:t>And we can </a:t>
+            </a:r>
+            <a:r>
+              <a:rPr lang="en-CA" b="1" dirty="0"/>
+              <a:t>model non-linear relationships</a:t>
+            </a:r>
+            <a:r>
+              <a:rPr lang="en-CA" dirty="0"/>
+              <a:t>, where the trend in the data curves rather than forms a straight line.</a:t>
+            </a:r>
+          </a:p>
+          <a:p>
+            <a:r>
+              <a:rPr lang="en-CA" dirty="0"/>
+              <a:t>These techniques build on the same core ideas we explored in this demonstration — just extended to capture more complex real-world relationships.</a:t>
+            </a:r>
+          </a:p>
+          <a:p>
+            <a:endParaRPr lang="en-US" dirty="0"/>
+          </a:p>
+        </p:txBody>
+      </p:sp>
+      <p:sp>
+        <p:nvSpPr>
+          <p:cNvPr id="4" name="Slide Number Placeholder 3"/>
+          <p:cNvSpPr>
+            <a:spLocks noGrp="1"/>
+          </p:cNvSpPr>
+          <p:nvPr>
+            <p:ph type="sldNum" sz="quarter" idx="5"/>
+          </p:nvPr>
+        </p:nvSpPr>
+        <p:spPr/>
+        <p:txBody>
+          <a:bodyPr/>
+          <a:lstStyle/>
+          <a:p>
+            <a:fld id="{BDEC409A-6EC9-B941-BC41-C561F1F9298C}" type="slidenum">
+              <a:rPr lang="en-US" smtClean="0"/>
+              <a:t>32</a:t>
+            </a:fld>
+            <a:endParaRPr lang="en-US"/>
+          </a:p>
+        </p:txBody>
+      </p:sp>
+    </p:spTree>
+    <p:extLst>
+      <p:ext uri="{BB962C8B-B14F-4D97-AF65-F5344CB8AC3E}">
+        <p14:creationId xmlns:p14="http://schemas.microsoft.com/office/powerpoint/2010/main" val="2513840336"/>
+      </p:ext>
+    </p:extLst>
+  </p:cSld>
+  <p:clrMapOvr>
+    <a:masterClrMapping/>
+  </p:clrMapOvr>
+</p:notes>
+</file>
+
+<file path=ppt/notesSlides/notesSlide32.xml><?xml version="1.0" encoding="utf-8"?>
 <p:notes xmlns:a="http://schemas.openxmlformats.org/drawingml/2006/main" xmlns:r="http://schemas.openxmlformats.org/officeDocument/2006/relationships" xmlns:p="http://schemas.openxmlformats.org/presentationml/2006/main">
   <p:cSld>
     <p:spTree>
@@ -7022,7 +7159,7 @@
                 <a:tabLst/>
                 <a:defRPr/>
               </a:pPr>
-              <a:t>32</a:t>
+              <a:t>33</a:t>
             </a:fld>
             <a:endParaRPr kumimoji="0" lang="en-US" sz="1200" b="0" i="0" u="none" strike="noStrike" kern="1200" cap="none" spc="0" normalizeH="0" baseline="0" noProof="0">
               <a:ln>
@@ -7054,7 +7191,7 @@
 </p:notes>
 </file>
 
-<file path=ppt/notesSlides/notesSlide32.xml><?xml version="1.0" encoding="utf-8"?>
+<file path=ppt/notesSlides/notesSlide33.xml><?xml version="1.0" encoding="utf-8"?>
 <p:notes xmlns:a="http://schemas.openxmlformats.org/drawingml/2006/main" xmlns:r="http://schemas.openxmlformats.org/officeDocument/2006/relationships" xmlns:p="http://schemas.openxmlformats.org/presentationml/2006/main">
   <p:cSld>
     <p:spTree>
@@ -7419,7 +7556,7 @@
                 <a:tabLst/>
                 <a:defRPr/>
               </a:pPr>
-              <a:t>33</a:t>
+              <a:t>34</a:t>
             </a:fld>
             <a:endParaRPr kumimoji="0" lang="en-US" sz="1200" b="0" i="0" u="none" strike="noStrike" kern="1200" cap="none" spc="0" normalizeH="0" baseline="0" noProof="0">
               <a:ln>
@@ -7451,7 +7588,7 @@
 </p:notes>
 </file>
 
-<file path=ppt/notesSlides/notesSlide33.xml><?xml version="1.0" encoding="utf-8"?>
+<file path=ppt/notesSlides/notesSlide34.xml><?xml version="1.0" encoding="utf-8"?>
 <p:notes xmlns:a="http://schemas.openxmlformats.org/drawingml/2006/main" xmlns:r="http://schemas.openxmlformats.org/officeDocument/2006/relationships" xmlns:p="http://schemas.openxmlformats.org/presentationml/2006/main">
   <p:cSld>
     <p:spTree>
@@ -7643,275 +7780,6 @@
                 <a:tabLst/>
                 <a:defRPr/>
               </a:pPr>
-              <a:t>34</a:t>
-            </a:fld>
-            <a:endParaRPr kumimoji="0" lang="en-US" sz="1200" b="0" i="0" u="none" strike="noStrike" kern="1200" cap="none" spc="0" normalizeH="0" baseline="0" noProof="0">
-              <a:ln>
-                <a:noFill/>
-              </a:ln>
-              <a:solidFill>
-                <a:prstClr val="black"/>
-              </a:solidFill>
-              <a:effectLst/>
-              <a:uLnTx/>
-              <a:uFillTx/>
-              <a:latin typeface="Aptos" panose="02110004020202020204"/>
-              <a:ea typeface="+mn-ea"/>
-              <a:cs typeface="+mn-cs"/>
-            </a:endParaRPr>
-          </a:p>
-        </p:txBody>
-      </p:sp>
-    </p:spTree>
-    <p:extLst>
-      <p:ext uri="{BB962C8B-B14F-4D97-AF65-F5344CB8AC3E}">
-        <p14:creationId xmlns:p14="http://schemas.microsoft.com/office/powerpoint/2010/main" val="2973716602"/>
-      </p:ext>
-    </p:extLst>
-  </p:cSld>
-  <p:clrMapOvr>
-    <a:masterClrMapping/>
-  </p:clrMapOvr>
-</p:notes>
-</file>
-
-<file path=ppt/notesSlides/notesSlide34.xml><?xml version="1.0" encoding="utf-8"?>
-<p:notes xmlns:a="http://schemas.openxmlformats.org/drawingml/2006/main" xmlns:r="http://schemas.openxmlformats.org/officeDocument/2006/relationships" xmlns:p="http://schemas.openxmlformats.org/presentationml/2006/main">
-  <p:cSld>
-    <p:spTree>
-      <p:nvGrpSpPr>
-        <p:cNvPr id="1" name="">
-          <a:extLst>
-            <a:ext uri="{FF2B5EF4-FFF2-40B4-BE49-F238E27FC236}">
-              <a16:creationId xmlns:a16="http://schemas.microsoft.com/office/drawing/2014/main" id="{FF5EEFE4-20B0-EBA9-0688-3277383575A0}"/>
-            </a:ext>
-          </a:extLst>
-        </p:cNvPr>
-        <p:cNvGrpSpPr/>
-        <p:nvPr/>
-      </p:nvGrpSpPr>
-      <p:grpSpPr>
-        <a:xfrm>
-          <a:off x="0" y="0"/>
-          <a:ext cx="0" cy="0"/>
-          <a:chOff x="0" y="0"/>
-          <a:chExt cx="0" cy="0"/>
-        </a:xfrm>
-      </p:grpSpPr>
-      <p:sp>
-        <p:nvSpPr>
-          <p:cNvPr id="2" name="Slide Image Placeholder 1">
-            <a:extLst>
-              <a:ext uri="{FF2B5EF4-FFF2-40B4-BE49-F238E27FC236}">
-                <a16:creationId xmlns:a16="http://schemas.microsoft.com/office/drawing/2014/main" id="{66291876-7F1D-0053-F955-10FCC8D358E7}"/>
-              </a:ext>
-            </a:extLst>
-          </p:cNvPr>
-          <p:cNvSpPr>
-            <a:spLocks noGrp="1" noRot="1" noChangeAspect="1"/>
-          </p:cNvSpPr>
-          <p:nvPr>
-            <p:ph type="sldImg"/>
-          </p:nvPr>
-        </p:nvSpPr>
-        <p:spPr/>
-      </p:sp>
-      <p:sp>
-        <p:nvSpPr>
-          <p:cNvPr id="3" name="Notes Placeholder 2">
-            <a:extLst>
-              <a:ext uri="{FF2B5EF4-FFF2-40B4-BE49-F238E27FC236}">
-                <a16:creationId xmlns:a16="http://schemas.microsoft.com/office/drawing/2014/main" id="{E12F329C-9A0C-8BC3-46FD-BC11B8EB5030}"/>
-              </a:ext>
-            </a:extLst>
-          </p:cNvPr>
-          <p:cNvSpPr>
-            <a:spLocks noGrp="1"/>
-          </p:cNvSpPr>
-          <p:nvPr>
-            <p:ph type="body" idx="1"/>
-          </p:nvPr>
-        </p:nvSpPr>
-        <p:spPr/>
-        <p:txBody>
-          <a:bodyPr/>
-          <a:lstStyle/>
-          <a:p>
-            <a:r>
-              <a:rPr lang="en-CA" sz="1200" dirty="0"/>
-              <a:t>Lastly, let’s </a:t>
-            </a:r>
-            <a:r>
-              <a:rPr lang="en-CA" sz="1200" b="1" dirty="0"/>
-              <a:t>visualize the relationship</a:t>
-            </a:r>
-            <a:r>
-              <a:rPr lang="en-CA" sz="1200" dirty="0"/>
-              <a:t> between our two variables –house size and house price— to see if we can spot any </a:t>
-            </a:r>
-            <a:r>
-              <a:rPr lang="en-CA" sz="1200" b="1" dirty="0"/>
-              <a:t>trends </a:t>
-            </a:r>
-            <a:r>
-              <a:rPr lang="en-CA" sz="1200" dirty="0"/>
-              <a:t>in the data.</a:t>
-            </a:r>
-          </a:p>
-          <a:p>
-            <a:r>
-              <a:rPr lang="en-CA" sz="1200" dirty="0"/>
-              <a:t>In this code, we’re using </a:t>
-            </a:r>
-            <a:r>
-              <a:rPr lang="en-CA" sz="1200" b="1" dirty="0" err="1"/>
-              <a:t>ggplot</a:t>
-            </a:r>
-            <a:r>
-              <a:rPr lang="en-CA" sz="1200" dirty="0"/>
-              <a:t> to create a </a:t>
-            </a:r>
-            <a:r>
-              <a:rPr lang="en-CA" sz="1200" b="1" dirty="0"/>
-              <a:t>scatter plot, which is specified by the </a:t>
-            </a:r>
-            <a:r>
-              <a:rPr lang="en-CA" sz="1200" b="1" dirty="0" err="1"/>
-              <a:t>geom_point</a:t>
-            </a:r>
-            <a:r>
-              <a:rPr lang="en-CA" sz="1200" b="1" dirty="0"/>
-              <a:t> layer.</a:t>
-            </a:r>
-            <a:endParaRPr lang="en-CA" sz="1200" dirty="0"/>
-          </a:p>
-          <a:p>
-            <a:r>
-              <a:rPr lang="en-CA" sz="1200" dirty="0"/>
-              <a:t>Here, Each point represents a house listing where </a:t>
-            </a:r>
-          </a:p>
-          <a:p>
-            <a:pPr>
-              <a:buFont typeface="Arial" panose="020B0604020202020204" pitchFamily="34" charset="0"/>
-              <a:buChar char="•"/>
-            </a:pPr>
-            <a:r>
-              <a:rPr lang="en-CA" sz="1200" dirty="0"/>
-              <a:t>The </a:t>
-            </a:r>
-            <a:r>
-              <a:rPr lang="en-CA" sz="1200" b="1" dirty="0"/>
-              <a:t>x-axis</a:t>
-            </a:r>
-            <a:r>
-              <a:rPr lang="en-CA" sz="1200" dirty="0"/>
-              <a:t> shows the </a:t>
-            </a:r>
-            <a:r>
-              <a:rPr lang="en-CA" sz="1200" i="1" dirty="0"/>
-              <a:t>house size</a:t>
-            </a:r>
-            <a:r>
-              <a:rPr lang="en-CA" sz="1200" dirty="0"/>
-              <a:t> </a:t>
-            </a:r>
-            <a:r>
-              <a:rPr lang="en-CA" dirty="0"/>
-              <a:t>and the </a:t>
-            </a:r>
-            <a:r>
-              <a:rPr lang="en-CA" b="1" dirty="0"/>
-              <a:t>y-axis</a:t>
-            </a:r>
-            <a:r>
-              <a:rPr lang="en-CA" dirty="0"/>
-              <a:t> shows the </a:t>
-            </a:r>
-            <a:r>
-              <a:rPr lang="en-CA" i="1" dirty="0"/>
-              <a:t>house price</a:t>
-            </a:r>
-            <a:endParaRPr lang="en-US" dirty="0"/>
-          </a:p>
-          <a:p>
-            <a:endParaRPr lang="en-CA" sz="1200" dirty="0"/>
-          </a:p>
-          <a:p>
-            <a:endParaRPr lang="en-US" dirty="0"/>
-          </a:p>
-        </p:txBody>
-      </p:sp>
-      <p:sp>
-        <p:nvSpPr>
-          <p:cNvPr id="4" name="Slide Number Placeholder 3">
-            <a:extLst>
-              <a:ext uri="{FF2B5EF4-FFF2-40B4-BE49-F238E27FC236}">
-                <a16:creationId xmlns:a16="http://schemas.microsoft.com/office/drawing/2014/main" id="{5B328E0F-A492-F34B-913F-704DC7AFFB1C}"/>
-              </a:ext>
-            </a:extLst>
-          </p:cNvPr>
-          <p:cNvSpPr>
-            <a:spLocks noGrp="1"/>
-          </p:cNvSpPr>
-          <p:nvPr>
-            <p:ph type="sldNum" sz="quarter" idx="5"/>
-          </p:nvPr>
-        </p:nvSpPr>
-        <p:spPr/>
-        <p:txBody>
-          <a:bodyPr/>
-          <a:lstStyle/>
-          <a:p>
-            <a:pPr marL="0" marR="0" lvl="0" indent="0" algn="r" defTabSz="914400" rtl="0" eaLnBrk="1" fontAlgn="auto" latinLnBrk="0" hangingPunct="1">
-              <a:lnSpc>
-                <a:spcPct val="100000"/>
-              </a:lnSpc>
-              <a:spcBef>
-                <a:spcPts val="0"/>
-              </a:spcBef>
-              <a:spcAft>
-                <a:spcPts val="0"/>
-              </a:spcAft>
-              <a:buClrTx/>
-              <a:buSzTx/>
-              <a:buFontTx/>
-              <a:buNone/>
-              <a:tabLst/>
-              <a:defRPr/>
-            </a:pPr>
-            <a:fld id="{BDEC409A-6EC9-B941-BC41-C561F1F9298C}" type="slidenum">
-              <a:rPr kumimoji="0" lang="en-US" sz="1200" b="0" i="0" u="none" strike="noStrike" kern="1200" cap="none" spc="0" normalizeH="0" baseline="0" noProof="0" smtClean="0">
-                <a:ln>
-                  <a:noFill/>
-                </a:ln>
-                <a:solidFill>
-                  <a:prstClr val="black"/>
-                </a:solidFill>
-                <a:effectLst/>
-                <a:uLnTx/>
-                <a:uFillTx/>
-                <a:latin typeface="Aptos" panose="02110004020202020204"/>
-                <a:ea typeface="+mn-ea"/>
-                <a:cs typeface="+mn-cs"/>
-              </a:rPr>
-              <a:pPr marL="0" marR="0" lvl="0" indent="0" algn="r" defTabSz="914400" rtl="0" eaLnBrk="1" fontAlgn="auto" latinLnBrk="0" hangingPunct="1">
-                <a:lnSpc>
-                  <a:spcPct val="100000"/>
-                </a:lnSpc>
-                <a:spcBef>
-                  <a:spcPts val="0"/>
-                </a:spcBef>
-                <a:spcAft>
-                  <a:spcPts val="0"/>
-                </a:spcAft>
-                <a:buClrTx/>
-                <a:buSzTx/>
-                <a:buFontTx/>
-                <a:buNone/>
-                <a:tabLst/>
-                <a:defRPr/>
-              </a:pPr>
               <a:t>35</a:t>
             </a:fld>
             <a:endParaRPr kumimoji="0" lang="en-US" sz="1200" b="0" i="0" u="none" strike="noStrike" kern="1200" cap="none" spc="0" normalizeH="0" baseline="0" noProof="0">
@@ -7934,7 +7802,7 @@
     </p:spTree>
     <p:extLst>
       <p:ext uri="{BB962C8B-B14F-4D97-AF65-F5344CB8AC3E}">
-        <p14:creationId xmlns:p14="http://schemas.microsoft.com/office/powerpoint/2010/main" val="2300841163"/>
+        <p14:creationId xmlns:p14="http://schemas.microsoft.com/office/powerpoint/2010/main" val="2973716602"/>
       </p:ext>
     </p:extLst>
   </p:cSld>
@@ -8091,7 +7959,7 @@
             </a:r>
             <a:r>
               <a:rPr lang="en-CA" dirty="0"/>
-              <a:t> means no linear relationship — the points are scattered with no clear pattern.</a:t>
+              <a:t> means no linear relationship — a change in one variable does not correspond to a change in the other.</a:t>
             </a:r>
           </a:p>
           <a:p>
@@ -8422,7 +8290,7 @@
             </a:r>
             <a:r>
               <a:rPr lang="en-CA" dirty="0"/>
-              <a:t> of a relationship between two variables.</a:t>
+              <a:t> of a relationship between two numeric variables.</a:t>
             </a:r>
             <a:br>
               <a:rPr lang="en-CA" dirty="0"/>
@@ -8850,7 +8718,7 @@
                 <a:effectLst/>
                 <a:latin typeface="Arial" panose="020B0604020202020204" pitchFamily="34" charset="0"/>
               </a:rPr>
-              <a:t>A regression model works by examining a dataset of past observations to identify patterns in the relationship between predictors and the response variable. Using these patterns, the model essentially 'draws' a line of best fit—we’ll talk more about what defines “best fit” in the next few slides. </a:t>
+              <a:t>A regression model works by examining a dataset of past observations to identify patterns in the relationship between predictors and the response variable, so in this case height and weight. Using these patterns, the model essentially 'draws' a line of best fit—we’ll talk more about what defines “best fit” in the next few slides. </a:t>
             </a:r>
           </a:p>
           <a:p>
@@ -8883,7 +8751,7 @@
                 <a:effectLst/>
                 <a:latin typeface="Arial" panose="020B0604020202020204" pitchFamily="34" charset="0"/>
               </a:rPr>
-              <a:t>But for now, this line of best essentially becomes the tool for making predictions. ANIMATION For any new observation, such as a person with a height we haven't seen before, the model uses the established relationship to estimate the expected weight of that person. ANIMATION</a:t>
+              <a:t>But for now, this line of best fit essentially becomes the tool for making predictions. ANIMATION For any new observation, such as a person with a height we haven't seen before, the model uses the established relationship to estimate the expected weight of that person. ANIMATION</a:t>
             </a:r>
             <a:endParaRPr lang="en-CA" b="0" dirty="0">
               <a:effectLst/>
@@ -9046,23 +8914,11 @@
             </a:r>
             <a:r>
               <a:rPr lang="en-CA" sz="2800" dirty="0"/>
-              <a:t> — the factor you use to make predictions. For example, we talked about how </a:t>
-            </a:r>
-            <a:r>
-              <a:rPr lang="en-CA" sz="4000" dirty="0"/>
-              <a:t>we might use </a:t>
+              <a:t> — the factor you use to make predictions. For example, we talked about this would be </a:t>
             </a:r>
             <a:r>
               <a:rPr lang="en-CA" sz="4000" b="1" dirty="0"/>
               <a:t>height</a:t>
-            </a:r>
-            <a:r>
-              <a:rPr lang="en-CA" sz="4000" dirty="0"/>
-              <a:t> to predict </a:t>
-            </a:r>
-            <a:r>
-              <a:rPr lang="en-CA" sz="4000" b="1" dirty="0"/>
-              <a:t>weight</a:t>
             </a:r>
             <a:r>
               <a:rPr lang="en-CA" sz="4000" dirty="0"/>
@@ -9281,7 +9137,7 @@
                 <a:effectLst/>
                 <a:latin typeface="Arial" panose="020B0604020202020204" pitchFamily="34" charset="0"/>
               </a:rPr>
-              <a:t>Let’s walk through an example to illustrate how linear regression modeling can be applied in practice.</a:t>
+              <a:t>Let’s walk through an example to illustrate how linear regression can be applied in practice.</a:t>
             </a:r>
             <a:endParaRPr lang="en-CA" b="0" dirty="0">
               <a:effectLst/>
@@ -9301,7 +9157,27 @@
                 <a:effectLst/>
                 <a:latin typeface="Arial" panose="020B0604020202020204" pitchFamily="34" charset="0"/>
               </a:rPr>
-              <a:t>Here, we’re focusing on whether the </a:t>
+              <a:t>Here, we are using housing data from </a:t>
+            </a:r>
+            <a:r>
+              <a:rPr lang="en-CA" sz="1800" b="0" i="0" u="none" strike="noStrike" dirty="0" err="1">
+                <a:solidFill>
+                  <a:srgbClr val="000000"/>
+                </a:solidFill>
+                <a:effectLst/>
+                <a:latin typeface="Arial" panose="020B0604020202020204" pitchFamily="34" charset="0"/>
+              </a:rPr>
+              <a:t>sacramento</a:t>
+            </a:r>
+            <a:r>
+              <a:rPr lang="en-CA" sz="1800" b="0" i="0" u="none" strike="noStrike" dirty="0">
+                <a:solidFill>
+                  <a:srgbClr val="000000"/>
+                </a:solidFill>
+                <a:effectLst/>
+                <a:latin typeface="Arial" panose="020B0604020202020204" pitchFamily="34" charset="0"/>
+              </a:rPr>
+              <a:t> and we are looking at whether the </a:t>
             </a:r>
             <a:r>
               <a:rPr lang="en-CA" sz="1800" b="1" i="0" u="none" strike="noStrike" dirty="0">
@@ -14243,13 +14119,13 @@
                   <a:schemeClr val="bg1"/>
                 </a:solidFill>
               </a:rPr>
-              <a:t>$285,477</a:t>
+              <a:t>$286,200</a:t>
             </a:r>
           </a:p>
         </p:txBody>
       </p:sp>
-      <mc:AlternateContent xmlns:mc="http://schemas.openxmlformats.org/markup-compatibility/2006" xmlns:a14="http://schemas.microsoft.com/office/drawing/2010/main">
-        <mc:Choice Requires="a14">
+      <mc:AlternateContent xmlns:mc="http://schemas.openxmlformats.org/markup-compatibility/2006">
+        <mc:Choice xmlns:a14="http://schemas.microsoft.com/office/drawing/2010/main" Requires="a14">
           <p:sp>
             <p:nvSpPr>
               <p:cNvPr id="13" name="TextBox 12">
@@ -14264,7 +14140,7 @@
             </p:nvSpPr>
             <p:spPr>
               <a:xfrm>
-                <a:off x="5989184" y="6380447"/>
+                <a:off x="5803653" y="6332700"/>
                 <a:ext cx="6096000" cy="369332"/>
               </a:xfrm>
               <a:prstGeom prst="rect">
@@ -14321,23 +14197,73 @@
                         </a:rPr>
                         <m:t> =</m:t>
                       </m:r>
+                      <m:d>
+                        <m:dPr>
+                          <m:ctrlPr>
+                            <a:rPr lang="en-CA" i="1" dirty="0">
+                              <a:solidFill>
+                                <a:schemeClr val="bg1"/>
+                              </a:solidFill>
+                              <a:latin typeface="Cambria Math" panose="02040503050406030204" pitchFamily="18" charset="0"/>
+                            </a:rPr>
+                          </m:ctrlPr>
+                        </m:dPr>
+                        <m:e>
+                          <m:r>
+                            <a:rPr lang="en-CA" i="1" dirty="0">
+                              <a:solidFill>
+                                <a:schemeClr val="bg1"/>
+                              </a:solidFill>
+                              <a:latin typeface="Cambria Math" panose="02040503050406030204" pitchFamily="18" charset="0"/>
+                            </a:rPr>
+                            <m:t>13</m:t>
+                          </m:r>
+                          <m:r>
+                            <a:rPr lang="en-CA" b="0" i="1" dirty="0" smtClean="0">
+                              <a:solidFill>
+                                <a:schemeClr val="bg1"/>
+                              </a:solidFill>
+                              <a:latin typeface="Cambria Math" panose="02040503050406030204" pitchFamily="18" charset="0"/>
+                            </a:rPr>
+                            <m:t>5</m:t>
+                          </m:r>
+                        </m:e>
+                      </m:d>
                       <m:r>
-                        <a:rPr lang="en-CA" i="1" dirty="0">
+                        <a:rPr lang="en-CA" b="0" i="1" dirty="0" smtClean="0">
                           <a:solidFill>
                             <a:schemeClr val="bg1"/>
                           </a:solidFill>
                           <a:latin typeface="Cambria Math" panose="02040503050406030204" pitchFamily="18" charset="0"/>
                         </a:rPr>
-                        <m:t>(134.6408)</m:t>
+                        <m:t> </m:t>
                       </m:r>
                       <m:r>
-                        <a:rPr lang="en-CA" sz="1800" b="0" i="1" dirty="0" smtClean="0">
+                        <a:rPr lang="en-CA" b="0" i="1" dirty="0" smtClean="0">
                           <a:solidFill>
                             <a:schemeClr val="bg1"/>
                           </a:solidFill>
                           <a:latin typeface="Cambria Math" panose="02040503050406030204" pitchFamily="18" charset="0"/>
                         </a:rPr>
-                        <m:t>2000</m:t>
+                        <m:t>h𝑜𝑢𝑠𝑒</m:t>
+                      </m:r>
+                      <m:r>
+                        <a:rPr lang="en-CA" b="0" i="1" dirty="0" smtClean="0">
+                          <a:solidFill>
+                            <a:schemeClr val="bg1"/>
+                          </a:solidFill>
+                          <a:latin typeface="Cambria Math" panose="02040503050406030204" pitchFamily="18" charset="0"/>
+                        </a:rPr>
+                        <m:t> </m:t>
+                      </m:r>
+                      <m:r>
+                        <a:rPr lang="en-CA" b="0" i="1" dirty="0" smtClean="0">
+                          <a:solidFill>
+                            <a:schemeClr val="bg1"/>
+                          </a:solidFill>
+                          <a:latin typeface="Cambria Math" panose="02040503050406030204" pitchFamily="18" charset="0"/>
+                        </a:rPr>
+                        <m:t>𝑠𝑖𝑧𝑒</m:t>
                       </m:r>
                       <m:r>
                         <a:rPr lang="en-CA" sz="1800" i="1" dirty="0" smtClean="0">
@@ -14356,7 +14282,17 @@
                           <a:latin typeface="Cambria Math" panose="02040503050406030204" pitchFamily="18" charset="0"/>
                           <a:ea typeface="Cambria Math" panose="02040503050406030204" pitchFamily="18" charset="0"/>
                         </a:rPr>
-                        <m:t>16195.5456</m:t>
+                        <m:t>16</m:t>
+                      </m:r>
+                      <m:r>
+                        <a:rPr lang="en-CA" b="0" i="1" dirty="0" smtClean="0">
+                          <a:solidFill>
+                            <a:schemeClr val="bg1"/>
+                          </a:solidFill>
+                          <a:latin typeface="Cambria Math" panose="02040503050406030204" pitchFamily="18" charset="0"/>
+                          <a:ea typeface="Cambria Math" panose="02040503050406030204" pitchFamily="18" charset="0"/>
+                        </a:rPr>
+                        <m:t>,200</m:t>
                       </m:r>
                       <m:r>
                         <a:rPr lang="en-CA" sz="1800" i="1" dirty="0" smtClean="0">
@@ -14379,7 +14315,7 @@
             </p:txBody>
           </p:sp>
         </mc:Choice>
-        <mc:Fallback xmlns="">
+        <mc:Fallback>
           <p:sp>
             <p:nvSpPr>
               <p:cNvPr id="13" name="TextBox 12">
@@ -14396,7 +14332,7 @@
             </p:nvSpPr>
             <p:spPr>
               <a:xfrm>
-                <a:off x="5989184" y="6380447"/>
+                <a:off x="5803653" y="6332700"/>
                 <a:ext cx="6096000" cy="369332"/>
               </a:xfrm>
               <a:prstGeom prst="rect">
@@ -15039,6 +14975,118 @@
           </a:p>
         </p:txBody>
       </p:sp>
+      <p:pic>
+        <p:nvPicPr>
+          <p:cNvPr id="4" name="Picture 3" descr="page10image54870224">
+            <a:extLst>
+              <a:ext uri="{FF2B5EF4-FFF2-40B4-BE49-F238E27FC236}">
+                <a16:creationId xmlns:a16="http://schemas.microsoft.com/office/drawing/2014/main" id="{02EA8224-0A61-C80F-FB60-C32D04181799}"/>
+              </a:ext>
+            </a:extLst>
+          </p:cNvPr>
+          <p:cNvPicPr>
+            <a:picLocks noChangeAspect="1" noChangeArrowheads="1"/>
+          </p:cNvPicPr>
+          <p:nvPr/>
+        </p:nvPicPr>
+        <p:blipFill>
+          <a:blip r:embed="rId4">
+            <a:extLst>
+              <a:ext uri="{28A0092B-C50C-407E-A947-70E740481C1C}">
+                <a14:useLocalDpi xmlns:a14="http://schemas.microsoft.com/office/drawing/2010/main" val="0"/>
+              </a:ext>
+            </a:extLst>
+          </a:blip>
+          <a:srcRect/>
+          <a:stretch>
+            <a:fillRect/>
+          </a:stretch>
+        </p:blipFill>
+        <p:spPr bwMode="auto">
+          <a:xfrm>
+            <a:off x="6692278" y="1708977"/>
+            <a:ext cx="4039633" cy="3186020"/>
+          </a:xfrm>
+          <a:prstGeom prst="rect">
+            <a:avLst/>
+          </a:prstGeom>
+          <a:noFill/>
+          <a:extLst>
+            <a:ext uri="{909E8E84-426E-40DD-AFC4-6F175D3DCCD1}">
+              <a14:hiddenFill xmlns:a14="http://schemas.microsoft.com/office/drawing/2010/main">
+                <a:solidFill>
+                  <a:srgbClr val="FFFFFF"/>
+                </a:solidFill>
+              </a14:hiddenFill>
+            </a:ext>
+          </a:extLst>
+        </p:spPr>
+      </p:pic>
+      <p:sp>
+        <p:nvSpPr>
+          <p:cNvPr id="7" name="TextBox 6">
+            <a:extLst>
+              <a:ext uri="{FF2B5EF4-FFF2-40B4-BE49-F238E27FC236}">
+                <a16:creationId xmlns:a16="http://schemas.microsoft.com/office/drawing/2014/main" id="{21765346-50EA-C4DB-1908-7F44FF9945C6}"/>
+              </a:ext>
+            </a:extLst>
+          </p:cNvPr>
+          <p:cNvSpPr txBox="1"/>
+          <p:nvPr/>
+        </p:nvSpPr>
+        <p:spPr>
+          <a:xfrm>
+            <a:off x="7366047" y="4868519"/>
+            <a:ext cx="3365864" cy="1015663"/>
+          </a:xfrm>
+          <a:prstGeom prst="rect">
+            <a:avLst/>
+          </a:prstGeom>
+          <a:noFill/>
+          <a:ln>
+            <a:solidFill>
+              <a:schemeClr val="bg1"/>
+            </a:solidFill>
+          </a:ln>
+        </p:spPr>
+        <p:txBody>
+          <a:bodyPr wrap="square">
+            <a:spAutoFit/>
+          </a:bodyPr>
+          <a:lstStyle/>
+          <a:p>
+            <a:r>
+              <a:rPr lang="en-CA" sz="2000" dirty="0">
+                <a:solidFill>
+                  <a:schemeClr val="bg1"/>
+                </a:solidFill>
+              </a:rPr>
+              <a:t>Error, or </a:t>
+            </a:r>
+            <a:r>
+              <a:rPr lang="en-CA" sz="2000" b="1" dirty="0">
+                <a:solidFill>
+                  <a:schemeClr val="bg1"/>
+                </a:solidFill>
+              </a:rPr>
+              <a:t>residuals</a:t>
+            </a:r>
+            <a:r>
+              <a:rPr lang="en-CA" sz="2000" dirty="0">
+                <a:solidFill>
+                  <a:schemeClr val="bg1"/>
+                </a:solidFill>
+              </a:rPr>
+              <a:t>, measure how far each data point is from the regression line</a:t>
+            </a:r>
+            <a:endParaRPr lang="en-US" sz="2000" dirty="0">
+              <a:solidFill>
+                <a:schemeClr val="bg1"/>
+              </a:solidFill>
+            </a:endParaRPr>
+          </a:p>
+        </p:txBody>
+      </p:sp>
     </p:spTree>
     <p:extLst>
       <p:ext uri="{BB962C8B-B14F-4D97-AF65-F5344CB8AC3E}">
@@ -15049,6 +15097,264 @@
   <p:clrMapOvr>
     <a:masterClrMapping/>
   </p:clrMapOvr>
+  <p:timing>
+    <p:tnLst>
+      <p:par>
+        <p:cTn id="1" dur="indefinite" restart="never" nodeType="tmRoot">
+          <p:childTnLst>
+            <p:seq concurrent="1" nextAc="seek">
+              <p:cTn id="2" dur="indefinite" nodeType="mainSeq">
+                <p:childTnLst>
+                  <p:par>
+                    <p:cTn id="3" fill="hold">
+                      <p:stCondLst>
+                        <p:cond delay="indefinite"/>
+                      </p:stCondLst>
+                      <p:childTnLst>
+                        <p:par>
+                          <p:cTn id="4" fill="hold">
+                            <p:stCondLst>
+                              <p:cond delay="0"/>
+                            </p:stCondLst>
+                            <p:childTnLst>
+                              <p:par>
+                                <p:cTn id="5" presetID="1" presetClass="exit" presetSubtype="0" fill="hold" nodeType="clickEffect">
+                                  <p:stCondLst>
+                                    <p:cond delay="0"/>
+                                  </p:stCondLst>
+                                  <p:childTnLst>
+                                    <p:set>
+                                      <p:cBhvr>
+                                        <p:cTn id="6" dur="1" fill="hold">
+                                          <p:stCondLst>
+                                            <p:cond delay="0"/>
+                                          </p:stCondLst>
+                                        </p:cTn>
+                                        <p:tgtEl>
+                                          <p:spTgt spid="18"/>
+                                        </p:tgtEl>
+                                        <p:attrNameLst>
+                                          <p:attrName>style.visibility</p:attrName>
+                                        </p:attrNameLst>
+                                      </p:cBhvr>
+                                      <p:to>
+                                        <p:strVal val="hidden"/>
+                                      </p:to>
+                                    </p:set>
+                                  </p:childTnLst>
+                                </p:cTn>
+                              </p:par>
+                              <p:par>
+                                <p:cTn id="7" presetID="1" presetClass="exit" presetSubtype="0" fill="hold" nodeType="withEffect">
+                                  <p:stCondLst>
+                                    <p:cond delay="0"/>
+                                  </p:stCondLst>
+                                  <p:childTnLst>
+                                    <p:set>
+                                      <p:cBhvr>
+                                        <p:cTn id="8" dur="1" fill="hold">
+                                          <p:stCondLst>
+                                            <p:cond delay="0"/>
+                                          </p:stCondLst>
+                                        </p:cTn>
+                                        <p:tgtEl>
+                                          <p:spTgt spid="5"/>
+                                        </p:tgtEl>
+                                        <p:attrNameLst>
+                                          <p:attrName>style.visibility</p:attrName>
+                                        </p:attrNameLst>
+                                      </p:cBhvr>
+                                      <p:to>
+                                        <p:strVal val="hidden"/>
+                                      </p:to>
+                                    </p:set>
+                                  </p:childTnLst>
+                                </p:cTn>
+                              </p:par>
+                              <p:par>
+                                <p:cTn id="9" presetID="1" presetClass="exit" presetSubtype="0" fill="hold" nodeType="withEffect">
+                                  <p:stCondLst>
+                                    <p:cond delay="0"/>
+                                  </p:stCondLst>
+                                  <p:childTnLst>
+                                    <p:set>
+                                      <p:cBhvr>
+                                        <p:cTn id="10" dur="1" fill="hold">
+                                          <p:stCondLst>
+                                            <p:cond delay="0"/>
+                                          </p:stCondLst>
+                                        </p:cTn>
+                                        <p:tgtEl>
+                                          <p:spTgt spid="6"/>
+                                        </p:tgtEl>
+                                        <p:attrNameLst>
+                                          <p:attrName>style.visibility</p:attrName>
+                                        </p:attrNameLst>
+                                      </p:cBhvr>
+                                      <p:to>
+                                        <p:strVal val="hidden"/>
+                                      </p:to>
+                                    </p:set>
+                                  </p:childTnLst>
+                                </p:cTn>
+                              </p:par>
+                              <p:par>
+                                <p:cTn id="11" presetID="1" presetClass="exit" presetSubtype="0" fill="hold" nodeType="withEffect">
+                                  <p:stCondLst>
+                                    <p:cond delay="0"/>
+                                  </p:stCondLst>
+                                  <p:childTnLst>
+                                    <p:set>
+                                      <p:cBhvr>
+                                        <p:cTn id="12" dur="1" fill="hold">
+                                          <p:stCondLst>
+                                            <p:cond delay="0"/>
+                                          </p:stCondLst>
+                                        </p:cTn>
+                                        <p:tgtEl>
+                                          <p:spTgt spid="8"/>
+                                        </p:tgtEl>
+                                        <p:attrNameLst>
+                                          <p:attrName>style.visibility</p:attrName>
+                                        </p:attrNameLst>
+                                      </p:cBhvr>
+                                      <p:to>
+                                        <p:strVal val="hidden"/>
+                                      </p:to>
+                                    </p:set>
+                                  </p:childTnLst>
+                                </p:cTn>
+                              </p:par>
+                              <p:par>
+                                <p:cTn id="13" presetID="1" presetClass="exit" presetSubtype="0" fill="hold" nodeType="withEffect">
+                                  <p:stCondLst>
+                                    <p:cond delay="0"/>
+                                  </p:stCondLst>
+                                  <p:childTnLst>
+                                    <p:set>
+                                      <p:cBhvr>
+                                        <p:cTn id="14" dur="1" fill="hold">
+                                          <p:stCondLst>
+                                            <p:cond delay="0"/>
+                                          </p:stCondLst>
+                                        </p:cTn>
+                                        <p:tgtEl>
+                                          <p:spTgt spid="12"/>
+                                        </p:tgtEl>
+                                        <p:attrNameLst>
+                                          <p:attrName>style.visibility</p:attrName>
+                                        </p:attrNameLst>
+                                      </p:cBhvr>
+                                      <p:to>
+                                        <p:strVal val="hidden"/>
+                                      </p:to>
+                                    </p:set>
+                                  </p:childTnLst>
+                                </p:cTn>
+                              </p:par>
+                            </p:childTnLst>
+                          </p:cTn>
+                        </p:par>
+                      </p:childTnLst>
+                    </p:cTn>
+                  </p:par>
+                  <p:par>
+                    <p:cTn id="15" fill="hold">
+                      <p:stCondLst>
+                        <p:cond delay="indefinite"/>
+                      </p:stCondLst>
+                      <p:childTnLst>
+                        <p:par>
+                          <p:cTn id="16" fill="hold">
+                            <p:stCondLst>
+                              <p:cond delay="0"/>
+                            </p:stCondLst>
+                            <p:childTnLst>
+                              <p:par>
+                                <p:cTn id="17" presetID="1" presetClass="entr" presetSubtype="0" fill="hold" nodeType="clickEffect">
+                                  <p:stCondLst>
+                                    <p:cond delay="0"/>
+                                  </p:stCondLst>
+                                  <p:childTnLst>
+                                    <p:set>
+                                      <p:cBhvr>
+                                        <p:cTn id="18" dur="1" fill="hold">
+                                          <p:stCondLst>
+                                            <p:cond delay="0"/>
+                                          </p:stCondLst>
+                                        </p:cTn>
+                                        <p:tgtEl>
+                                          <p:spTgt spid="4"/>
+                                        </p:tgtEl>
+                                        <p:attrNameLst>
+                                          <p:attrName>style.visibility</p:attrName>
+                                        </p:attrNameLst>
+                                      </p:cBhvr>
+                                      <p:to>
+                                        <p:strVal val="visible"/>
+                                      </p:to>
+                                    </p:set>
+                                  </p:childTnLst>
+                                </p:cTn>
+                              </p:par>
+                              <p:par>
+                                <p:cTn id="19" presetID="1" presetClass="entr" presetSubtype="0" fill="hold" grpId="0" nodeType="withEffect">
+                                  <p:stCondLst>
+                                    <p:cond delay="0"/>
+                                  </p:stCondLst>
+                                  <p:childTnLst>
+                                    <p:set>
+                                      <p:cBhvr>
+                                        <p:cTn id="20" dur="1" fill="hold">
+                                          <p:stCondLst>
+                                            <p:cond delay="0"/>
+                                          </p:stCondLst>
+                                        </p:cTn>
+                                        <p:tgtEl>
+                                          <p:spTgt spid="7"/>
+                                        </p:tgtEl>
+                                        <p:attrNameLst>
+                                          <p:attrName>style.visibility</p:attrName>
+                                        </p:attrNameLst>
+                                      </p:cBhvr>
+                                      <p:to>
+                                        <p:strVal val="visible"/>
+                                      </p:to>
+                                    </p:set>
+                                  </p:childTnLst>
+                                </p:cTn>
+                              </p:par>
+                            </p:childTnLst>
+                          </p:cTn>
+                        </p:par>
+                      </p:childTnLst>
+                    </p:cTn>
+                  </p:par>
+                </p:childTnLst>
+              </p:cTn>
+              <p:prevCondLst>
+                <p:cond evt="onPrev" delay="0">
+                  <p:tgtEl>
+                    <p:sldTgt/>
+                  </p:tgtEl>
+                </p:cond>
+              </p:prevCondLst>
+              <p:nextCondLst>
+                <p:cond evt="onNext" delay="0">
+                  <p:tgtEl>
+                    <p:sldTgt/>
+                  </p:tgtEl>
+                </p:cond>
+              </p:nextCondLst>
+            </p:seq>
+          </p:childTnLst>
+        </p:cTn>
+      </p:par>
+    </p:tnLst>
+    <p:bldLst>
+      <p:bldP spid="7" grpId="0" animBg="1"/>
+    </p:bldLst>
+  </p:timing>
 </p:sld>
 </file>
 
@@ -15738,7 +16044,7 @@
         <p:cNvPr id="1" name="">
           <a:extLst>
             <a:ext uri="{FF2B5EF4-FFF2-40B4-BE49-F238E27FC236}">
-              <a16:creationId xmlns:a16="http://schemas.microsoft.com/office/drawing/2014/main" id="{D2DBB69C-937A-BC42-3235-C28C956249BB}"/>
+              <a16:creationId xmlns:a16="http://schemas.microsoft.com/office/drawing/2014/main" id="{6200847C-0A60-55F2-AF8B-CC4F81FFD3F9}"/>
             </a:ext>
           </a:extLst>
         </p:cNvPr>
@@ -15758,7 +16064,7 @@
           <p:cNvPr id="11" name="Title 1">
             <a:extLst>
               <a:ext uri="{FF2B5EF4-FFF2-40B4-BE49-F238E27FC236}">
-                <a16:creationId xmlns:a16="http://schemas.microsoft.com/office/drawing/2014/main" id="{3F184E44-D79F-69AA-E6BD-3EF9C63FAED0}"/>
+                <a16:creationId xmlns:a16="http://schemas.microsoft.com/office/drawing/2014/main" id="{564B3FE2-B358-4369-9EE0-D84C13711C68}"/>
               </a:ext>
             </a:extLst>
           </p:cNvPr>
@@ -15871,762 +16177,334 @@
           </a:p>
         </p:txBody>
       </p:sp>
-      <mc:AlternateContent xmlns:mc="http://schemas.openxmlformats.org/markup-compatibility/2006">
-        <mc:Choice xmlns:a14="http://schemas.microsoft.com/office/drawing/2010/main" Requires="a14">
-          <p:sp>
-            <p:nvSpPr>
-              <p:cNvPr id="13" name="Content Placeholder 2">
-                <a:extLst>
-                  <a:ext uri="{FF2B5EF4-FFF2-40B4-BE49-F238E27FC236}">
-                    <a16:creationId xmlns:a16="http://schemas.microsoft.com/office/drawing/2014/main" id="{AD2E92D4-4936-6A67-5A79-3E2D1143889B}"/>
-                  </a:ext>
-                </a:extLst>
-              </p:cNvPr>
-              <p:cNvSpPr>
-                <a:spLocks noGrp="1"/>
-              </p:cNvSpPr>
-              <p:nvPr>
-                <p:ph idx="1"/>
-              </p:nvPr>
-            </p:nvSpPr>
-            <p:spPr>
-              <a:xfrm>
-                <a:off x="702128" y="1989137"/>
-                <a:ext cx="6837661" cy="4351338"/>
-              </a:xfrm>
-            </p:spPr>
-            <p:txBody>
-              <a:bodyPr>
-                <a:noAutofit/>
-              </a:bodyPr>
-              <a:lstStyle/>
-              <a:p>
-                <a:pPr marL="0" indent="0">
-                  <a:buNone/>
-                </a:pPr>
-                <a:r>
-                  <a:rPr lang="en-CA" sz="2400" dirty="0">
-                    <a:solidFill>
-                      <a:schemeClr val="bg1"/>
-                    </a:solidFill>
-                  </a:rPr>
-                  <a:t>1. Root Mean Squared Error (RMSE)</a:t>
-                </a:r>
-              </a:p>
-              <a:p>
-                <a:pPr lvl="1"/>
-                <a:r>
-                  <a:rPr lang="en-CA" dirty="0">
-                    <a:solidFill>
-                      <a:schemeClr val="bg1"/>
-                    </a:solidFill>
-                  </a:rPr>
-                  <a:t>Measures the </a:t>
-                </a:r>
-                <a:r>
-                  <a:rPr lang="en-CA" b="1" dirty="0">
-                    <a:solidFill>
-                      <a:schemeClr val="bg1"/>
-                    </a:solidFill>
-                  </a:rPr>
-                  <a:t>average prediction error</a:t>
-                </a:r>
-                <a:r>
-                  <a:rPr lang="en-CA" dirty="0">
-                    <a:solidFill>
-                      <a:schemeClr val="bg1"/>
-                    </a:solidFill>
-                  </a:rPr>
-                  <a:t> - how far predicted values are from actual values. </a:t>
-                </a:r>
-              </a:p>
-              <a:p>
-                <a:pPr lvl="1"/>
-                <a:r>
-                  <a:rPr lang="en-CA" dirty="0">
-                    <a:solidFill>
-                      <a:schemeClr val="bg1"/>
-                    </a:solidFill>
-                  </a:rPr>
-                  <a:t>Lower RMSE = better fit</a:t>
-                </a:r>
-                <a:endParaRPr lang="en-CA" sz="2400" b="0" i="0" dirty="0">
-                  <a:solidFill>
-                    <a:schemeClr val="bg1"/>
-                  </a:solidFill>
-                  <a:effectLst/>
-                  <a:latin typeface="Cambria Math" panose="02040503050406030204" pitchFamily="18" charset="0"/>
-                </a:endParaRPr>
-              </a:p>
-              <a:p>
-                <a:pPr marL="0" indent="0">
-                  <a:buNone/>
-                </a:pPr>
-                <a:r>
-                  <a:rPr lang="en-CA" sz="2400" b="0" dirty="0">
-                    <a:solidFill>
-                      <a:schemeClr val="bg1"/>
-                    </a:solidFill>
-                    <a:effectLst/>
-                  </a:rPr>
-                  <a:t>2. </a:t>
-                </a:r>
-                <a:r>
-                  <a:rPr lang="en-CA" sz="2400" dirty="0">
-                    <a:solidFill>
-                      <a:schemeClr val="bg1"/>
-                    </a:solidFill>
-                  </a:rPr>
-                  <a:t>C</a:t>
-                </a:r>
-                <a:r>
-                  <a:rPr lang="en-CA" sz="2400" b="0" dirty="0">
-                    <a:solidFill>
-                      <a:schemeClr val="bg1"/>
-                    </a:solidFill>
-                    <a:effectLst/>
-                  </a:rPr>
-                  <a:t>oefficient of determination (</a:t>
-                </a:r>
-                <a14:m>
-                  <m:oMath xmlns:m="http://schemas.openxmlformats.org/officeDocument/2006/math">
-                    <m:r>
-                      <m:rPr>
-                        <m:sty m:val="p"/>
-                      </m:rPr>
-                      <a:rPr lang="en-CA" sz="2400" b="0" i="0" dirty="0" smtClean="0">
-                        <a:solidFill>
-                          <a:schemeClr val="bg1"/>
-                        </a:solidFill>
-                        <a:effectLst/>
-                        <a:latin typeface="Cambria Math" panose="02040503050406030204" pitchFamily="18" charset="0"/>
-                      </a:rPr>
-                      <m:t>R</m:t>
-                    </m:r>
-                    <m:r>
-                      <a:rPr lang="en-CA" sz="2400" b="0" i="0" dirty="0" smtClean="0">
-                        <a:solidFill>
-                          <a:schemeClr val="bg1"/>
-                        </a:solidFill>
-                        <a:effectLst/>
-                        <a:latin typeface="Cambria Math" panose="02040503050406030204" pitchFamily="18" charset="0"/>
-                      </a:rPr>
-                      <m:t>²</m:t>
-                    </m:r>
-                  </m:oMath>
-                </a14:m>
-                <a:r>
-                  <a:rPr lang="en-CA" sz="2400" b="0" dirty="0">
-                    <a:solidFill>
-                      <a:schemeClr val="bg1"/>
-                    </a:solidFill>
-                    <a:effectLst/>
-                  </a:rPr>
-                  <a:t>)</a:t>
-                </a:r>
-                <a:endParaRPr lang="en-CA" sz="2400" dirty="0">
-                  <a:solidFill>
-                    <a:schemeClr val="bg1"/>
-                  </a:solidFill>
-                </a:endParaRPr>
-              </a:p>
-              <a:p>
-                <a:pPr lvl="1"/>
-                <a:r>
-                  <a:rPr lang="en-CA" b="0" dirty="0">
-                    <a:solidFill>
-                      <a:schemeClr val="bg1"/>
-                    </a:solidFill>
-                    <a:effectLst/>
-                  </a:rPr>
-                  <a:t>Measures the proportion of variation in the outcome (</a:t>
-                </a:r>
-                <a14:m>
-                  <m:oMath xmlns:m="http://schemas.openxmlformats.org/officeDocument/2006/math">
-                    <m:r>
-                      <a:rPr lang="en-CA" b="0" i="1" dirty="0" smtClean="0">
-                        <a:solidFill>
-                          <a:schemeClr val="bg1"/>
-                        </a:solidFill>
-                        <a:effectLst/>
-                        <a:latin typeface="Cambria Math" panose="02040503050406030204" pitchFamily="18" charset="0"/>
-                      </a:rPr>
-                      <m:t>𝑦</m:t>
-                    </m:r>
-                  </m:oMath>
-                </a14:m>
-                <a:r>
-                  <a:rPr lang="en-CA" b="0" dirty="0">
-                    <a:solidFill>
-                      <a:schemeClr val="bg1"/>
-                    </a:solidFill>
-                    <a:effectLst/>
-                  </a:rPr>
-                  <a:t>) explained by the predictor (</a:t>
-                </a:r>
-                <a14:m>
-                  <m:oMath xmlns:m="http://schemas.openxmlformats.org/officeDocument/2006/math">
-                    <m:r>
-                      <a:rPr lang="en-CA" b="0" i="1" dirty="0" smtClean="0">
-                        <a:solidFill>
-                          <a:schemeClr val="bg1"/>
-                        </a:solidFill>
-                        <a:effectLst/>
-                        <a:latin typeface="Cambria Math" panose="02040503050406030204" pitchFamily="18" charset="0"/>
-                      </a:rPr>
-                      <m:t>𝑥</m:t>
-                    </m:r>
-                  </m:oMath>
-                </a14:m>
-                <a:r>
-                  <a:rPr lang="en-CA" b="0" dirty="0">
-                    <a:solidFill>
-                      <a:schemeClr val="bg1"/>
-                    </a:solidFill>
-                    <a:effectLst/>
-                  </a:rPr>
-                  <a:t>).</a:t>
-                </a:r>
-                <a:endParaRPr lang="en-CA" dirty="0">
-                  <a:solidFill>
-                    <a:schemeClr val="bg1"/>
-                  </a:solidFill>
-                </a:endParaRPr>
-              </a:p>
-              <a:p>
-                <a:pPr lvl="1"/>
-                <a:r>
-                  <a:rPr lang="en-CA" b="0" dirty="0">
-                    <a:solidFill>
-                      <a:schemeClr val="bg1"/>
-                    </a:solidFill>
-                    <a:effectLst/>
-                  </a:rPr>
-                  <a:t>Always between </a:t>
-                </a:r>
-                <a14:m>
-                  <m:oMath xmlns:m="http://schemas.openxmlformats.org/officeDocument/2006/math">
-                    <m:r>
-                      <a:rPr lang="en-CA" b="0" i="1" dirty="0" smtClean="0">
-                        <a:solidFill>
-                          <a:schemeClr val="bg1"/>
-                        </a:solidFill>
-                        <a:effectLst/>
-                        <a:latin typeface="Cambria Math" panose="02040503050406030204" pitchFamily="18" charset="0"/>
-                      </a:rPr>
-                      <m:t>0 </m:t>
-                    </m:r>
-                  </m:oMath>
-                </a14:m>
-                <a:r>
-                  <a:rPr lang="en-CA" b="0" dirty="0">
-                    <a:solidFill>
-                      <a:schemeClr val="bg1"/>
-                    </a:solidFill>
-                    <a:effectLst/>
-                  </a:rPr>
-                  <a:t>and </a:t>
-                </a:r>
-                <a14:m>
-                  <m:oMath xmlns:m="http://schemas.openxmlformats.org/officeDocument/2006/math">
-                    <m:r>
-                      <a:rPr lang="en-CA" b="0" i="1" dirty="0" smtClean="0">
-                        <a:solidFill>
-                          <a:schemeClr val="bg1"/>
-                        </a:solidFill>
-                        <a:effectLst/>
-                        <a:latin typeface="Cambria Math" panose="02040503050406030204" pitchFamily="18" charset="0"/>
-                      </a:rPr>
-                      <m:t>1</m:t>
-                    </m:r>
-                  </m:oMath>
-                </a14:m>
-                <a:endParaRPr lang="en-CA" b="0" dirty="0">
-                  <a:solidFill>
-                    <a:schemeClr val="bg1"/>
-                  </a:solidFill>
-                  <a:effectLst/>
-                </a:endParaRPr>
-              </a:p>
-              <a:p>
-                <a:pPr lvl="1"/>
-                <a:r>
-                  <a:rPr lang="en-CA" dirty="0">
-                    <a:solidFill>
-                      <a:schemeClr val="bg1"/>
-                    </a:solidFill>
-                  </a:rPr>
-                  <a:t>Higher </a:t>
-                </a:r>
-                <a14:m>
-                  <m:oMath xmlns:m="http://schemas.openxmlformats.org/officeDocument/2006/math">
-                    <m:r>
-                      <a:rPr lang="en-CA" i="1" dirty="0" smtClean="0">
-                        <a:solidFill>
-                          <a:schemeClr val="bg1"/>
-                        </a:solidFill>
-                        <a:latin typeface="Cambria Math" panose="02040503050406030204" pitchFamily="18" charset="0"/>
-                      </a:rPr>
-                      <m:t>𝑅</m:t>
-                    </m:r>
-                    <m:r>
-                      <a:rPr lang="en-CA" i="1" dirty="0" smtClean="0">
-                        <a:solidFill>
-                          <a:schemeClr val="bg1"/>
-                        </a:solidFill>
-                        <a:latin typeface="Cambria Math" panose="02040503050406030204" pitchFamily="18" charset="0"/>
-                      </a:rPr>
-                      <m:t>²</m:t>
-                    </m:r>
-                  </m:oMath>
-                </a14:m>
-                <a:r>
-                  <a:rPr lang="en-CA" dirty="0">
-                    <a:solidFill>
-                      <a:schemeClr val="bg1"/>
-                    </a:solidFill>
-                  </a:rPr>
-                  <a:t> = model explains more of the variation</a:t>
-                </a:r>
-              </a:p>
-              <a:p>
-                <a:pPr lvl="1"/>
-                <a:r>
-                  <a:rPr lang="en-CA" b="1" dirty="0">
-                    <a:solidFill>
-                      <a:schemeClr val="bg1"/>
-                    </a:solidFill>
-                  </a:rPr>
-                  <a:t>In simple linear regression, </a:t>
-                </a:r>
-                <a:r>
-                  <a:rPr lang="en-CA" b="1" dirty="0">
-                    <a:solidFill>
-                      <a:schemeClr val="bg1"/>
-                    </a:solidFill>
-                    <a:effectLst/>
-                  </a:rPr>
-                  <a:t>the square of </a:t>
-                </a:r>
-                <a14:m>
-                  <m:oMath xmlns:m="http://schemas.openxmlformats.org/officeDocument/2006/math">
-                    <m:r>
-                      <a:rPr lang="en-CA" b="1" i="1" dirty="0" smtClean="0">
-                        <a:solidFill>
-                          <a:schemeClr val="bg1"/>
-                        </a:solidFill>
-                        <a:effectLst/>
-                        <a:latin typeface="Cambria Math" panose="02040503050406030204" pitchFamily="18" charset="0"/>
-                      </a:rPr>
-                      <m:t>𝒓</m:t>
-                    </m:r>
-                  </m:oMath>
-                </a14:m>
-                <a:endParaRPr lang="en-CA" sz="1200" b="1" dirty="0">
-                  <a:solidFill>
-                    <a:schemeClr val="bg1"/>
-                  </a:solidFill>
-                </a:endParaRPr>
-              </a:p>
-              <a:p>
-                <a:pPr marL="0" indent="0">
-                  <a:buNone/>
-                </a:pPr>
-                <a:endParaRPr lang="en-CA" b="1" dirty="0">
-                  <a:solidFill>
-                    <a:schemeClr val="bg1"/>
-                  </a:solidFill>
-                  <a:effectLst/>
-                </a:endParaRPr>
-              </a:p>
-              <a:p>
-                <a:pPr lvl="1"/>
-                <a:endParaRPr lang="en-CA" b="1" dirty="0">
-                  <a:solidFill>
-                    <a:schemeClr val="bg1"/>
-                  </a:solidFill>
-                </a:endParaRPr>
-              </a:p>
-              <a:p>
-                <a:pPr lvl="1"/>
-                <a:endParaRPr lang="en-CA" b="1" dirty="0">
-                  <a:solidFill>
-                    <a:schemeClr val="bg1"/>
-                  </a:solidFill>
-                </a:endParaRPr>
-              </a:p>
-            </p:txBody>
-          </p:sp>
-        </mc:Choice>
-        <mc:Fallback>
-          <p:sp>
-            <p:nvSpPr>
-              <p:cNvPr id="13" name="Content Placeholder 2">
-                <a:extLst>
-                  <a:ext uri="{FF2B5EF4-FFF2-40B4-BE49-F238E27FC236}">
-                    <a16:creationId xmlns:a16="http://schemas.microsoft.com/office/drawing/2014/main" id="{AD2E92D4-4936-6A67-5A79-3E2D1143889B}"/>
-                  </a:ext>
-                </a:extLst>
-              </p:cNvPr>
-              <p:cNvSpPr>
-                <a:spLocks noGrp="1" noRot="1" noChangeAspect="1" noMove="1" noResize="1" noEditPoints="1" noAdjustHandles="1" noChangeArrowheads="1" noChangeShapeType="1" noTextEdit="1"/>
-              </p:cNvSpPr>
-              <p:nvPr>
-                <p:ph idx="1"/>
-              </p:nvPr>
-            </p:nvSpPr>
-            <p:spPr>
-              <a:xfrm>
-                <a:off x="702128" y="1989137"/>
-                <a:ext cx="6837661" cy="4351338"/>
-              </a:xfrm>
-              <a:blipFill>
-                <a:blip r:embed="rId3"/>
-                <a:stretch>
-                  <a:fillRect l="-1484" t="-2035" r="-1670" b="-581"/>
-                </a:stretch>
-              </a:blipFill>
-            </p:spPr>
-            <p:txBody>
-              <a:bodyPr/>
-              <a:lstStyle/>
-              <a:p>
-                <a:r>
-                  <a:rPr lang="en-US">
-                    <a:noFill/>
-                  </a:rPr>
-                  <a:t> </a:t>
-                </a:r>
-              </a:p>
-            </p:txBody>
-          </p:sp>
-        </mc:Fallback>
-      </mc:AlternateContent>
-      <p:pic>
-        <p:nvPicPr>
-          <p:cNvPr id="2" name="Picture 1" descr="page10image54870224">
+      <p:graphicFrame>
+        <p:nvGraphicFramePr>
+          <p:cNvPr id="4" name="Content Placeholder 7">
             <a:extLst>
               <a:ext uri="{FF2B5EF4-FFF2-40B4-BE49-F238E27FC236}">
-                <a16:creationId xmlns:a16="http://schemas.microsoft.com/office/drawing/2014/main" id="{0F0EFA88-5401-3E92-44C1-911377820672}"/>
+                <a16:creationId xmlns:a16="http://schemas.microsoft.com/office/drawing/2014/main" id="{A37EBA58-FDEA-703B-4F8C-1330234E30C6}"/>
               </a:ext>
             </a:extLst>
           </p:cNvPr>
-          <p:cNvPicPr>
-            <a:picLocks noChangeAspect="1" noChangeArrowheads="1"/>
-          </p:cNvPicPr>
-          <p:nvPr/>
-        </p:nvPicPr>
-        <p:blipFill>
-          <a:blip r:embed="rId4">
-            <a:extLst>
-              <a:ext uri="{28A0092B-C50C-407E-A947-70E740481C1C}">
-                <a14:useLocalDpi xmlns:a14="http://schemas.microsoft.com/office/drawing/2010/main" val="0"/>
-              </a:ext>
-            </a:extLst>
-          </a:blip>
-          <a:srcRect/>
-          <a:stretch>
-            <a:fillRect/>
-          </a:stretch>
-        </p:blipFill>
-        <p:spPr bwMode="auto">
-          <a:xfrm>
-            <a:off x="7539789" y="1667965"/>
-            <a:ext cx="4039633" cy="3186020"/>
-          </a:xfrm>
-          <a:prstGeom prst="rect">
-            <a:avLst/>
-          </a:prstGeom>
-          <a:noFill/>
-          <a:extLst>
-            <a:ext uri="{909E8E84-426E-40DD-AFC4-6F175D3DCCD1}">
-              <a14:hiddenFill xmlns:a14="http://schemas.microsoft.com/office/drawing/2010/main">
-                <a:solidFill>
-                  <a:srgbClr val="FFFFFF"/>
-                </a:solidFill>
-              </a14:hiddenFill>
-            </a:ext>
-          </a:extLst>
-        </p:spPr>
-      </p:pic>
-      <p:sp>
-        <p:nvSpPr>
-          <p:cNvPr id="3" name="TextBox 2">
-            <a:extLst>
-              <a:ext uri="{FF2B5EF4-FFF2-40B4-BE49-F238E27FC236}">
-                <a16:creationId xmlns:a16="http://schemas.microsoft.com/office/drawing/2014/main" id="{C6BC307F-D925-C801-2BBB-F54EC09FF56F}"/>
-              </a:ext>
-            </a:extLst>
-          </p:cNvPr>
-          <p:cNvSpPr txBox="1"/>
-          <p:nvPr/>
-        </p:nvSpPr>
-        <p:spPr>
-          <a:xfrm>
-            <a:off x="8213558" y="4827507"/>
-            <a:ext cx="3365864" cy="1015663"/>
-          </a:xfrm>
-          <a:prstGeom prst="rect">
-            <a:avLst/>
-          </a:prstGeom>
-          <a:noFill/>
-          <a:ln>
-            <a:solidFill>
-              <a:schemeClr val="bg1"/>
-            </a:solidFill>
-          </a:ln>
-        </p:spPr>
-        <p:txBody>
-          <a:bodyPr wrap="square">
-            <a:spAutoFit/>
-          </a:bodyPr>
-          <a:lstStyle/>
-          <a:p>
-            <a:r>
-              <a:rPr lang="en-CA" sz="2000" dirty="0">
-                <a:solidFill>
-                  <a:schemeClr val="bg1"/>
-                </a:solidFill>
-              </a:rPr>
-              <a:t>Error, or </a:t>
-            </a:r>
-            <a:r>
-              <a:rPr lang="en-CA" sz="2000" b="1" dirty="0">
-                <a:solidFill>
-                  <a:schemeClr val="bg1"/>
-                </a:solidFill>
-              </a:rPr>
-              <a:t>residuals</a:t>
-            </a:r>
-            <a:r>
-              <a:rPr lang="en-CA" sz="2000" dirty="0">
-                <a:solidFill>
-                  <a:schemeClr val="bg1"/>
-                </a:solidFill>
-              </a:rPr>
-              <a:t>, measure how far each data point is from the regression line</a:t>
-            </a:r>
-            <a:endParaRPr lang="en-US" sz="2000" dirty="0">
-              <a:solidFill>
-                <a:schemeClr val="bg1"/>
-              </a:solidFill>
-            </a:endParaRPr>
-          </a:p>
-        </p:txBody>
-      </p:sp>
+          <p:cNvGraphicFramePr>
+            <a:graphicFrameLocks noGrp="1"/>
+          </p:cNvGraphicFramePr>
+          <p:nvPr>
+            <p:ph idx="1"/>
+            <p:extLst>
+              <p:ext uri="{D42A27DB-BD31-4B8C-83A1-F6EECF244321}">
+                <p14:modId xmlns:p14="http://schemas.microsoft.com/office/powerpoint/2010/main" val="3212386797"/>
+              </p:ext>
+            </p:extLst>
+          </p:nvPr>
+        </p:nvGraphicFramePr>
+        <p:xfrm>
+          <a:off x="827909" y="2173099"/>
+          <a:ext cx="10536182" cy="3221860"/>
+        </p:xfrm>
+        <a:graphic>
+          <a:graphicData uri="http://schemas.openxmlformats.org/drawingml/2006/table">
+            <a:tbl>
+              <a:tblPr firstRow="1" bandRow="1">
+                <a:tableStyleId>{C083E6E3-FA7D-4D7B-A595-EF9225AFEA82}</a:tableStyleId>
+              </a:tblPr>
+              <a:tblGrid>
+                <a:gridCol w="5109851">
+                  <a:extLst>
+                    <a:ext uri="{9D8B030D-6E8A-4147-A177-3AD203B41FA5}">
+                      <a16:colId xmlns:a16="http://schemas.microsoft.com/office/drawing/2014/main" val="23861919"/>
+                    </a:ext>
+                  </a:extLst>
+                </a:gridCol>
+                <a:gridCol w="5426331">
+                  <a:extLst>
+                    <a:ext uri="{9D8B030D-6E8A-4147-A177-3AD203B41FA5}">
+                      <a16:colId xmlns:a16="http://schemas.microsoft.com/office/drawing/2014/main" val="3731617711"/>
+                    </a:ext>
+                  </a:extLst>
+                </a:gridCol>
+              </a:tblGrid>
+              <a:tr h="570100">
+                <a:tc>
+                  <a:txBody>
+                    <a:bodyPr/>
+                    <a:lstStyle/>
+                    <a:p>
+                      <a:pPr marL="0" marR="0" lvl="0" indent="0" algn="l" defTabSz="914400" rtl="0" eaLnBrk="1" fontAlgn="auto" latinLnBrk="0" hangingPunct="1">
+                        <a:lnSpc>
+                          <a:spcPct val="100000"/>
+                        </a:lnSpc>
+                        <a:spcBef>
+                          <a:spcPts val="0"/>
+                        </a:spcBef>
+                        <a:spcAft>
+                          <a:spcPts val="0"/>
+                        </a:spcAft>
+                        <a:buClrTx/>
+                        <a:buSzTx/>
+                        <a:buFontTx/>
+                        <a:buNone/>
+                        <a:tabLst/>
+                        <a:defRPr/>
+                      </a:pPr>
+                      <a:r>
+                        <a:rPr lang="en-US" sz="2400" b="1" dirty="0">
+                          <a:solidFill>
+                            <a:schemeClr val="bg1"/>
+                          </a:solidFill>
+                        </a:rPr>
+                        <a:t>Root Mean Square Error (RMSE)</a:t>
+                      </a:r>
+                    </a:p>
+                  </a:txBody>
+                  <a:tcPr>
+                    <a:lnR w="12700" cap="flat" cmpd="sng" algn="ctr">
+                      <a:solidFill>
+                        <a:schemeClr val="tx1"/>
+                      </a:solidFill>
+                      <a:prstDash val="solid"/>
+                      <a:round/>
+                      <a:headEnd type="none" w="med" len="med"/>
+                      <a:tailEnd type="none" w="med" len="med"/>
+                    </a:lnR>
+                  </a:tcPr>
+                </a:tc>
+                <a:tc>
+                  <a:txBody>
+                    <a:bodyPr/>
+                    <a:lstStyle/>
+                    <a:p>
+                      <a:pPr marL="0" marR="0" indent="0" algn="l" defTabSz="914400" rtl="0" eaLnBrk="1" fontAlgn="auto" latinLnBrk="0" hangingPunct="1">
+                        <a:lnSpc>
+                          <a:spcPct val="100000"/>
+                        </a:lnSpc>
+                        <a:spcBef>
+                          <a:spcPts val="0"/>
+                        </a:spcBef>
+                        <a:spcAft>
+                          <a:spcPts val="0"/>
+                        </a:spcAft>
+                        <a:buClrTx/>
+                        <a:buSzTx/>
+                        <a:buFontTx/>
+                        <a:buNone/>
+                        <a:tabLst/>
+                        <a:defRPr/>
+                      </a:pPr>
+                      <a:r>
+                        <a:rPr lang="en-US" sz="2400" b="1" dirty="0">
+                          <a:solidFill>
+                            <a:schemeClr val="tx2">
+                              <a:lumMod val="75000"/>
+                            </a:schemeClr>
+                          </a:solidFill>
+                        </a:rPr>
+                        <a:t>Coefficient of Determination (R²)</a:t>
+                      </a:r>
+                    </a:p>
+                  </a:txBody>
+                  <a:tcPr>
+                    <a:lnL w="12700" cap="flat" cmpd="sng" algn="ctr">
+                      <a:solidFill>
+                        <a:schemeClr val="tx1"/>
+                      </a:solidFill>
+                      <a:prstDash val="solid"/>
+                      <a:round/>
+                      <a:headEnd type="none" w="med" len="med"/>
+                      <a:tailEnd type="none" w="med" len="med"/>
+                    </a:lnL>
+                  </a:tcPr>
+                </a:tc>
+                <a:extLst>
+                  <a:ext uri="{0D108BD9-81ED-4DB2-BD59-A6C34878D82A}">
+                    <a16:rowId xmlns:a16="http://schemas.microsoft.com/office/drawing/2014/main" val="2169096809"/>
+                  </a:ext>
+                </a:extLst>
+              </a:tr>
+              <a:tr h="2596885">
+                <a:tc>
+                  <a:txBody>
+                    <a:bodyPr/>
+                    <a:lstStyle/>
+                    <a:p>
+                      <a:pPr marL="342900" indent="-342900">
+                        <a:buFont typeface="Arial" panose="020B0604020202020204" pitchFamily="34" charset="0"/>
+                        <a:buChar char="•"/>
+                      </a:pPr>
+                      <a:r>
+                        <a:rPr lang="en-US" sz="2400" dirty="0">
+                          <a:solidFill>
+                            <a:schemeClr val="bg1"/>
+                          </a:solidFill>
+                        </a:rPr>
+                        <a:t>Shows how far, on average, the predicted values are from the actual values.</a:t>
+                      </a:r>
+                    </a:p>
+                    <a:p>
+                      <a:pPr marL="342900" indent="-342900">
+                        <a:buFont typeface="Arial" panose="020B0604020202020204" pitchFamily="34" charset="0"/>
+                        <a:buChar char="•"/>
+                      </a:pPr>
+                      <a:r>
+                        <a:rPr lang="en-US" sz="2400" b="1" dirty="0">
+                          <a:solidFill>
+                            <a:schemeClr val="bg1"/>
+                          </a:solidFill>
+                        </a:rPr>
+                        <a:t>Lower RMSE → better model fit </a:t>
+                      </a:r>
+                      <a:r>
+                        <a:rPr lang="en-US" sz="2400" dirty="0">
+                          <a:solidFill>
+                            <a:schemeClr val="bg1"/>
+                          </a:solidFill>
+                        </a:rPr>
+                        <a:t>(smaller prediction errors).</a:t>
+                      </a:r>
+                    </a:p>
+                  </a:txBody>
+                  <a:tcPr>
+                    <a:lnR w="12700" cap="flat" cmpd="sng" algn="ctr">
+                      <a:solidFill>
+                        <a:schemeClr val="tx1"/>
+                      </a:solidFill>
+                      <a:prstDash val="solid"/>
+                      <a:round/>
+                      <a:headEnd type="none" w="med" len="med"/>
+                      <a:tailEnd type="none" w="med" len="med"/>
+                    </a:lnR>
+                    <a:solidFill>
+                      <a:schemeClr val="accent4">
+                        <a:lumMod val="60000"/>
+                        <a:lumOff val="40000"/>
+                        <a:alpha val="20000"/>
+                      </a:schemeClr>
+                    </a:solidFill>
+                  </a:tcPr>
+                </a:tc>
+                <a:tc>
+                  <a:txBody>
+                    <a:bodyPr/>
+                    <a:lstStyle/>
+                    <a:p>
+                      <a:pPr marL="342900" indent="-342900">
+                        <a:buFont typeface="Arial" panose="020B0604020202020204" pitchFamily="34" charset="0"/>
+                        <a:buChar char="•"/>
+                      </a:pPr>
+                      <a:r>
+                        <a:rPr lang="en-US" sz="2400" dirty="0">
+                          <a:solidFill>
+                            <a:schemeClr val="tx2">
+                              <a:lumMod val="75000"/>
+                            </a:schemeClr>
+                          </a:solidFill>
+                        </a:rPr>
+                        <a:t>Tells us how much of the variation in the outcome (𝑦) is explained by the predictor (𝑥).</a:t>
+                      </a:r>
+                    </a:p>
+                    <a:p>
+                      <a:pPr marL="342900" indent="-342900">
+                        <a:buFont typeface="Arial" panose="020B0604020202020204" pitchFamily="34" charset="0"/>
+                        <a:buChar char="•"/>
+                      </a:pPr>
+                      <a:r>
+                        <a:rPr lang="en-US" sz="2400" dirty="0">
+                          <a:solidFill>
+                            <a:schemeClr val="tx2">
+                              <a:lumMod val="75000"/>
+                            </a:schemeClr>
+                          </a:solidFill>
+                        </a:rPr>
+                        <a:t>Ranges from 0 to 1: </a:t>
+                      </a:r>
+                      <a:r>
+                        <a:rPr lang="en-US" sz="2400" b="1" dirty="0">
+                          <a:solidFill>
+                            <a:schemeClr val="tx2">
+                              <a:lumMod val="75000"/>
+                            </a:schemeClr>
+                          </a:solidFill>
+                        </a:rPr>
+                        <a:t>higher values </a:t>
+                      </a:r>
+                      <a:r>
+                        <a:rPr lang="en-US" sz="2400" b="1" dirty="0">
+                          <a:solidFill>
+                            <a:schemeClr val="tx2">
+                              <a:lumMod val="75000"/>
+                            </a:schemeClr>
+                          </a:solidFill>
+                          <a:sym typeface="Wingdings" pitchFamily="2" charset="2"/>
+                        </a:rPr>
+                        <a:t></a:t>
+                      </a:r>
+                      <a:r>
+                        <a:rPr lang="en-US" sz="2400" b="1" dirty="0">
+                          <a:solidFill>
+                            <a:schemeClr val="tx2">
+                              <a:lumMod val="75000"/>
+                            </a:schemeClr>
+                          </a:solidFill>
+                        </a:rPr>
+                        <a:t> model explains more variation.</a:t>
+                      </a:r>
+                    </a:p>
+                    <a:p>
+                      <a:pPr marL="342900" indent="-342900">
+                        <a:buFont typeface="Arial" panose="020B0604020202020204" pitchFamily="34" charset="0"/>
+                        <a:buChar char="•"/>
+                      </a:pPr>
+                      <a:r>
+                        <a:rPr lang="en-US" sz="2400" dirty="0">
+                          <a:solidFill>
+                            <a:schemeClr val="tx2">
+                              <a:lumMod val="75000"/>
+                            </a:schemeClr>
+                          </a:solidFill>
+                        </a:rPr>
+                        <a:t>In simple linear regression, R² = r² (the square of the correlation).</a:t>
+                      </a:r>
+                    </a:p>
+                  </a:txBody>
+                  <a:tcPr>
+                    <a:lnL w="12700" cap="flat" cmpd="sng" algn="ctr">
+                      <a:solidFill>
+                        <a:schemeClr val="tx1"/>
+                      </a:solidFill>
+                      <a:prstDash val="solid"/>
+                      <a:round/>
+                      <a:headEnd type="none" w="med" len="med"/>
+                      <a:tailEnd type="none" w="med" len="med"/>
+                    </a:lnL>
+                    <a:solidFill>
+                      <a:schemeClr val="accent4">
+                        <a:lumMod val="60000"/>
+                        <a:lumOff val="40000"/>
+                        <a:alpha val="20000"/>
+                      </a:schemeClr>
+                    </a:solidFill>
+                  </a:tcPr>
+                </a:tc>
+                <a:extLst>
+                  <a:ext uri="{0D108BD9-81ED-4DB2-BD59-A6C34878D82A}">
+                    <a16:rowId xmlns:a16="http://schemas.microsoft.com/office/drawing/2014/main" val="3547854081"/>
+                  </a:ext>
+                </a:extLst>
+              </a:tr>
+            </a:tbl>
+          </a:graphicData>
+        </a:graphic>
+      </p:graphicFrame>
     </p:spTree>
     <p:extLst>
       <p:ext uri="{BB962C8B-B14F-4D97-AF65-F5344CB8AC3E}">
-        <p14:creationId xmlns:p14="http://schemas.microsoft.com/office/powerpoint/2010/main" val="1339528198"/>
+        <p14:creationId xmlns:p14="http://schemas.microsoft.com/office/powerpoint/2010/main" val="454129635"/>
       </p:ext>
     </p:extLst>
   </p:cSld>
   <p:clrMapOvr>
     <a:masterClrMapping/>
   </p:clrMapOvr>
-  <p:timing>
-    <p:tnLst>
-      <p:par>
-        <p:cTn id="1" dur="indefinite" restart="never" nodeType="tmRoot">
-          <p:childTnLst>
-            <p:seq concurrent="1" nextAc="seek">
-              <p:cTn id="2" dur="indefinite" nodeType="mainSeq">
-                <p:childTnLst>
-                  <p:par>
-                    <p:cTn id="3" fill="hold">
-                      <p:stCondLst>
-                        <p:cond delay="indefinite"/>
-                      </p:stCondLst>
-                      <p:childTnLst>
-                        <p:par>
-                          <p:cTn id="4" fill="hold">
-                            <p:stCondLst>
-                              <p:cond delay="0"/>
-                            </p:stCondLst>
-                            <p:childTnLst>
-                              <p:par>
-                                <p:cTn id="5" presetID="1" presetClass="entr" presetSubtype="0" fill="hold" nodeType="clickEffect">
-                                  <p:stCondLst>
-                                    <p:cond delay="0"/>
-                                  </p:stCondLst>
-                                  <p:childTnLst>
-                                    <p:set>
-                                      <p:cBhvr>
-                                        <p:cTn id="6" dur="1" fill="hold">
-                                          <p:stCondLst>
-                                            <p:cond delay="0"/>
-                                          </p:stCondLst>
-                                        </p:cTn>
-                                        <p:tgtEl>
-                                          <p:spTgt spid="13">
-                                            <p:txEl>
-                                              <p:pRg st="3" end="3"/>
-                                            </p:txEl>
-                                          </p:spTgt>
-                                        </p:tgtEl>
-                                        <p:attrNameLst>
-                                          <p:attrName>style.visibility</p:attrName>
-                                        </p:attrNameLst>
-                                      </p:cBhvr>
-                                      <p:to>
-                                        <p:strVal val="visible"/>
-                                      </p:to>
-                                    </p:set>
-                                  </p:childTnLst>
-                                </p:cTn>
-                              </p:par>
-                              <p:par>
-                                <p:cTn id="7" presetID="1" presetClass="entr" presetSubtype="0" fill="hold" nodeType="withEffect">
-                                  <p:stCondLst>
-                                    <p:cond delay="0"/>
-                                  </p:stCondLst>
-                                  <p:childTnLst>
-                                    <p:set>
-                                      <p:cBhvr>
-                                        <p:cTn id="8" dur="1" fill="hold">
-                                          <p:stCondLst>
-                                            <p:cond delay="0"/>
-                                          </p:stCondLst>
-                                        </p:cTn>
-                                        <p:tgtEl>
-                                          <p:spTgt spid="13">
-                                            <p:txEl>
-                                              <p:pRg st="4" end="4"/>
-                                            </p:txEl>
-                                          </p:spTgt>
-                                        </p:tgtEl>
-                                        <p:attrNameLst>
-                                          <p:attrName>style.visibility</p:attrName>
-                                        </p:attrNameLst>
-                                      </p:cBhvr>
-                                      <p:to>
-                                        <p:strVal val="visible"/>
-                                      </p:to>
-                                    </p:set>
-                                  </p:childTnLst>
-                                </p:cTn>
-                              </p:par>
-                              <p:par>
-                                <p:cTn id="9" presetID="1" presetClass="entr" presetSubtype="0" fill="hold" nodeType="withEffect">
-                                  <p:stCondLst>
-                                    <p:cond delay="0"/>
-                                  </p:stCondLst>
-                                  <p:childTnLst>
-                                    <p:set>
-                                      <p:cBhvr>
-                                        <p:cTn id="10" dur="1" fill="hold">
-                                          <p:stCondLst>
-                                            <p:cond delay="0"/>
-                                          </p:stCondLst>
-                                        </p:cTn>
-                                        <p:tgtEl>
-                                          <p:spTgt spid="13">
-                                            <p:txEl>
-                                              <p:pRg st="5" end="5"/>
-                                            </p:txEl>
-                                          </p:spTgt>
-                                        </p:tgtEl>
-                                        <p:attrNameLst>
-                                          <p:attrName>style.visibility</p:attrName>
-                                        </p:attrNameLst>
-                                      </p:cBhvr>
-                                      <p:to>
-                                        <p:strVal val="visible"/>
-                                      </p:to>
-                                    </p:set>
-                                  </p:childTnLst>
-                                </p:cTn>
-                              </p:par>
-                              <p:par>
-                                <p:cTn id="11" presetID="1" presetClass="entr" presetSubtype="0" fill="hold" nodeType="withEffect">
-                                  <p:stCondLst>
-                                    <p:cond delay="0"/>
-                                  </p:stCondLst>
-                                  <p:childTnLst>
-                                    <p:set>
-                                      <p:cBhvr>
-                                        <p:cTn id="12" dur="1" fill="hold">
-                                          <p:stCondLst>
-                                            <p:cond delay="0"/>
-                                          </p:stCondLst>
-                                        </p:cTn>
-                                        <p:tgtEl>
-                                          <p:spTgt spid="13">
-                                            <p:txEl>
-                                              <p:pRg st="6" end="6"/>
-                                            </p:txEl>
-                                          </p:spTgt>
-                                        </p:tgtEl>
-                                        <p:attrNameLst>
-                                          <p:attrName>style.visibility</p:attrName>
-                                        </p:attrNameLst>
-                                      </p:cBhvr>
-                                      <p:to>
-                                        <p:strVal val="visible"/>
-                                      </p:to>
-                                    </p:set>
-                                  </p:childTnLst>
-                                </p:cTn>
-                              </p:par>
-                              <p:par>
-                                <p:cTn id="13" presetID="1" presetClass="entr" presetSubtype="0" fill="hold" nodeType="withEffect">
-                                  <p:stCondLst>
-                                    <p:cond delay="0"/>
-                                  </p:stCondLst>
-                                  <p:childTnLst>
-                                    <p:set>
-                                      <p:cBhvr>
-                                        <p:cTn id="14" dur="1" fill="hold">
-                                          <p:stCondLst>
-                                            <p:cond delay="0"/>
-                                          </p:stCondLst>
-                                        </p:cTn>
-                                        <p:tgtEl>
-                                          <p:spTgt spid="13">
-                                            <p:txEl>
-                                              <p:pRg st="7" end="7"/>
-                                            </p:txEl>
-                                          </p:spTgt>
-                                        </p:tgtEl>
-                                        <p:attrNameLst>
-                                          <p:attrName>style.visibility</p:attrName>
-                                        </p:attrNameLst>
-                                      </p:cBhvr>
-                                      <p:to>
-                                        <p:strVal val="visible"/>
-                                      </p:to>
-                                    </p:set>
-                                  </p:childTnLst>
-                                </p:cTn>
-                              </p:par>
-                            </p:childTnLst>
-                          </p:cTn>
-                        </p:par>
-                      </p:childTnLst>
-                    </p:cTn>
-                  </p:par>
-                </p:childTnLst>
-              </p:cTn>
-              <p:prevCondLst>
-                <p:cond evt="onPrev" delay="0">
-                  <p:tgtEl>
-                    <p:sldTgt/>
-                  </p:tgtEl>
-                </p:cond>
-              </p:prevCondLst>
-              <p:nextCondLst>
-                <p:cond evt="onNext" delay="0">
-                  <p:tgtEl>
-                    <p:sldTgt/>
-                  </p:tgtEl>
-                </p:cond>
-              </p:nextCondLst>
-            </p:seq>
-          </p:childTnLst>
-        </p:cTn>
-      </p:par>
-    </p:tnLst>
-  </p:timing>
 </p:sld>
 </file>
 
@@ -16648,7 +16526,7 @@
         <p:cNvPr id="1" name="">
           <a:extLst>
             <a:ext uri="{FF2B5EF4-FFF2-40B4-BE49-F238E27FC236}">
-              <a16:creationId xmlns:a16="http://schemas.microsoft.com/office/drawing/2014/main" id="{7B788942-A90B-4191-DB4E-8635EB19F75D}"/>
+              <a16:creationId xmlns:a16="http://schemas.microsoft.com/office/drawing/2014/main" id="{F85095F5-401A-319F-B7BA-9F230A0715B1}"/>
             </a:ext>
           </a:extLst>
         </p:cNvPr>
@@ -16668,7 +16546,7 @@
           <p:cNvPr id="11" name="Title 1">
             <a:extLst>
               <a:ext uri="{FF2B5EF4-FFF2-40B4-BE49-F238E27FC236}">
-                <a16:creationId xmlns:a16="http://schemas.microsoft.com/office/drawing/2014/main" id="{7A56C48D-8330-5AF8-665F-30FA3638CC73}"/>
+                <a16:creationId xmlns:a16="http://schemas.microsoft.com/office/drawing/2014/main" id="{F1C0FC37-C211-4951-00A1-E1C626E1EB49}"/>
               </a:ext>
             </a:extLst>
           </p:cNvPr>
@@ -16742,282 +16620,361 @@
                 <a:ea typeface="+mj-ea"/>
                 <a:cs typeface="+mj-cs"/>
               </a:rPr>
-              <a:t>Simple</a:t>
-            </a:r>
-            <a:r>
-              <a:rPr lang="en-US" dirty="0">
+              <a:t>Evaluating model fit: RMSE and R</a:t>
+            </a:r>
+            <a:r>
+              <a:rPr kumimoji="0" lang="en-US" sz="4400" b="0" i="0" u="none" strike="noStrike" kern="1200" cap="none" spc="0" normalizeH="0" baseline="30000" noProof="0" dirty="0">
+                <a:ln>
+                  <a:noFill/>
+                </a:ln>
                 <a:solidFill>
                   <a:prstClr val="black"/>
                 </a:solidFill>
+                <a:effectLst/>
+                <a:uLnTx/>
+                <a:uFillTx/>
                 <a:latin typeface="Aptos Display" panose="02110004020202020204"/>
-              </a:rPr>
-              <a:t> linear regression is just the start!</a:t>
-            </a:r>
-            <a:endParaRPr kumimoji="0" lang="en-US" sz="4400" b="0" i="0" u="none" strike="noStrike" kern="1200" cap="none" spc="0" normalizeH="0" baseline="0" noProof="0" dirty="0">
-              <a:ln>
-                <a:noFill/>
-              </a:ln>
-              <a:solidFill>
-                <a:prstClr val="black"/>
-              </a:solidFill>
-              <a:effectLst/>
-              <a:uLnTx/>
-              <a:uFillTx/>
-              <a:latin typeface="Aptos Display" panose="02110004020202020204"/>
-              <a:ea typeface="+mj-ea"/>
-              <a:cs typeface="+mj-cs"/>
-            </a:endParaRPr>
+                <a:ea typeface="+mj-ea"/>
+                <a:cs typeface="+mj-cs"/>
+              </a:rPr>
+              <a:t>2</a:t>
+            </a:r>
+            <a:r>
+              <a:rPr kumimoji="0" lang="en-US" sz="4400" b="0" i="0" u="none" strike="noStrike" kern="1200" cap="none" spc="0" normalizeH="0" baseline="0" noProof="0" dirty="0">
+                <a:ln>
+                  <a:noFill/>
+                </a:ln>
+                <a:solidFill>
+                  <a:prstClr val="black"/>
+                </a:solidFill>
+                <a:effectLst/>
+                <a:uLnTx/>
+                <a:uFillTx/>
+                <a:latin typeface="Aptos Display" panose="02110004020202020204"/>
+                <a:ea typeface="+mj-ea"/>
+                <a:cs typeface="+mj-cs"/>
+              </a:rPr>
+              <a:t> </a:t>
+            </a:r>
           </a:p>
         </p:txBody>
       </p:sp>
-      <p:sp>
-        <p:nvSpPr>
-          <p:cNvPr id="13" name="Content Placeholder 2">
+      <p:graphicFrame>
+        <p:nvGraphicFramePr>
+          <p:cNvPr id="4" name="Content Placeholder 7">
             <a:extLst>
               <a:ext uri="{FF2B5EF4-FFF2-40B4-BE49-F238E27FC236}">
-                <a16:creationId xmlns:a16="http://schemas.microsoft.com/office/drawing/2014/main" id="{CF6F61C7-2976-C825-55A8-0E08054B5A97}"/>
+                <a16:creationId xmlns:a16="http://schemas.microsoft.com/office/drawing/2014/main" id="{20CE55A8-4286-E4C8-E5F8-57F0ED8842EF}"/>
               </a:ext>
             </a:extLst>
           </p:cNvPr>
-          <p:cNvSpPr>
-            <a:spLocks noGrp="1"/>
-          </p:cNvSpPr>
+          <p:cNvGraphicFramePr>
+            <a:graphicFrameLocks noGrp="1"/>
+          </p:cNvGraphicFramePr>
           <p:nvPr>
             <p:ph idx="1"/>
+            <p:extLst>
+              <p:ext uri="{D42A27DB-BD31-4B8C-83A1-F6EECF244321}">
+                <p14:modId xmlns:p14="http://schemas.microsoft.com/office/powerpoint/2010/main" val="2612525679"/>
+              </p:ext>
+            </p:extLst>
           </p:nvPr>
-        </p:nvSpPr>
-        <p:spPr>
-          <a:xfrm>
-            <a:off x="702128" y="1989137"/>
-            <a:ext cx="10511972" cy="4351338"/>
-          </a:xfrm>
-        </p:spPr>
-        <p:txBody>
-          <a:bodyPr>
-            <a:noAutofit/>
-          </a:bodyPr>
-          <a:lstStyle/>
-          <a:p>
-            <a:r>
-              <a:rPr lang="en-CA" sz="2400" dirty="0">
-                <a:solidFill>
-                  <a:schemeClr val="bg1"/>
-                </a:solidFill>
-              </a:rPr>
-              <a:t>Some extensions allow us to model </a:t>
-            </a:r>
-            <a:r>
-              <a:rPr lang="en-CA" sz="2400" b="1" dirty="0">
-                <a:solidFill>
-                  <a:schemeClr val="bg1"/>
-                </a:solidFill>
-              </a:rPr>
-              <a:t>more complex patterns</a:t>
-            </a:r>
-            <a:r>
-              <a:rPr lang="en-CA" sz="2400" dirty="0">
-                <a:solidFill>
-                  <a:schemeClr val="bg1"/>
-                </a:solidFill>
-              </a:rPr>
-              <a:t> in our data:</a:t>
-            </a:r>
-          </a:p>
-          <a:p>
-            <a:pPr lvl="1">
-              <a:buFont typeface="Courier New" panose="02070309020205020404" pitchFamily="49" charset="0"/>
-              <a:buChar char="o"/>
-            </a:pPr>
-            <a:endParaRPr lang="en-CA" i="1" dirty="0">
-              <a:solidFill>
-                <a:schemeClr val="bg1"/>
-              </a:solidFill>
-            </a:endParaRPr>
-          </a:p>
-          <a:p>
-            <a:pPr>
-              <a:buFont typeface="Courier New" panose="02070309020205020404" pitchFamily="49" charset="0"/>
-              <a:buChar char="o"/>
-            </a:pPr>
-            <a:endParaRPr lang="en-CA" i="1" dirty="0">
-              <a:solidFill>
-                <a:schemeClr val="bg1"/>
-              </a:solidFill>
-            </a:endParaRPr>
-          </a:p>
-        </p:txBody>
-      </p:sp>
-      <p:pic>
-        <p:nvPicPr>
-          <p:cNvPr id="2" name="Picture 1">
-            <a:extLst>
-              <a:ext uri="{FF2B5EF4-FFF2-40B4-BE49-F238E27FC236}">
-                <a16:creationId xmlns:a16="http://schemas.microsoft.com/office/drawing/2014/main" id="{F70DAE5B-3B80-7834-CEF0-9ADAAA711876}"/>
-              </a:ext>
-            </a:extLst>
-          </p:cNvPr>
-          <p:cNvPicPr>
-            <a:picLocks noChangeAspect="1"/>
-          </p:cNvPicPr>
-          <p:nvPr/>
-        </p:nvPicPr>
-        <p:blipFill>
-          <a:blip r:embed="rId3"/>
-          <a:srcRect t="13842"/>
-          <a:stretch/>
-        </p:blipFill>
-        <p:spPr>
-          <a:xfrm>
-            <a:off x="6210432" y="2732970"/>
-            <a:ext cx="5642923" cy="3757974"/>
-          </a:xfrm>
-          <a:prstGeom prst="rect">
-            <a:avLst/>
-          </a:prstGeom>
-        </p:spPr>
-      </p:pic>
-      <p:sp>
-        <p:nvSpPr>
-          <p:cNvPr id="4" name="TextBox 3">
-            <a:extLst>
-              <a:ext uri="{FF2B5EF4-FFF2-40B4-BE49-F238E27FC236}">
-                <a16:creationId xmlns:a16="http://schemas.microsoft.com/office/drawing/2014/main" id="{7B3B274B-26E0-0576-031C-01749FFB7832}"/>
-              </a:ext>
-            </a:extLst>
-          </p:cNvPr>
-          <p:cNvSpPr txBox="1"/>
-          <p:nvPr/>
-        </p:nvSpPr>
-        <p:spPr>
-          <a:xfrm>
-            <a:off x="702128" y="2486429"/>
-            <a:ext cx="6147559" cy="4154984"/>
-          </a:xfrm>
-          <a:prstGeom prst="rect">
-            <a:avLst/>
-          </a:prstGeom>
-          <a:noFill/>
-        </p:spPr>
-        <p:txBody>
-          <a:bodyPr wrap="square">
-            <a:spAutoFit/>
-          </a:bodyPr>
-          <a:lstStyle/>
-          <a:p>
-            <a:pPr marL="800100" lvl="1" indent="-342900">
-              <a:buFont typeface="Courier New" panose="02070309020205020404" pitchFamily="49" charset="0"/>
-              <a:buChar char="o"/>
-            </a:pPr>
-            <a:r>
-              <a:rPr lang="en-CA" sz="2400" b="1" dirty="0">
-                <a:solidFill>
-                  <a:schemeClr val="bg1"/>
-                </a:solidFill>
-              </a:rPr>
-              <a:t>Include categorical predictors</a:t>
-            </a:r>
-            <a:br>
-              <a:rPr lang="en-CA" sz="2400" dirty="0">
-                <a:solidFill>
-                  <a:schemeClr val="bg1"/>
-                </a:solidFill>
-              </a:rPr>
-            </a:br>
-            <a:r>
-              <a:rPr lang="en-CA" sz="2400" i="1" dirty="0">
-                <a:solidFill>
-                  <a:schemeClr val="bg1"/>
-                </a:solidFill>
-              </a:rPr>
-              <a:t>(e.g., type of home — Residential, Multi-family, Condo)</a:t>
-            </a:r>
-          </a:p>
-          <a:p>
-            <a:pPr marL="800100" lvl="1" indent="-342900">
-              <a:buFont typeface="Courier New" panose="02070309020205020404" pitchFamily="49" charset="0"/>
-              <a:buChar char="o"/>
-            </a:pPr>
-            <a:endParaRPr lang="en-CA" sz="2400" dirty="0">
-              <a:solidFill>
-                <a:schemeClr val="bg1"/>
-              </a:solidFill>
-            </a:endParaRPr>
-          </a:p>
-          <a:p>
-            <a:pPr marL="800100" lvl="1" indent="-342900">
-              <a:buFont typeface="Courier New" panose="02070309020205020404" pitchFamily="49" charset="0"/>
-              <a:buChar char="o"/>
-            </a:pPr>
-            <a:r>
-              <a:rPr lang="en-CA" sz="2400" b="1" dirty="0">
-                <a:solidFill>
-                  <a:schemeClr val="bg1"/>
-                </a:solidFill>
-              </a:rPr>
-              <a:t>Add multiple predictors</a:t>
-            </a:r>
-            <a:br>
-              <a:rPr lang="en-CA" sz="2400" dirty="0">
-                <a:solidFill>
-                  <a:schemeClr val="bg1"/>
-                </a:solidFill>
-              </a:rPr>
-            </a:br>
-            <a:r>
-              <a:rPr lang="en-CA" sz="2400" i="1" dirty="0">
-                <a:solidFill>
-                  <a:schemeClr val="bg1"/>
-                </a:solidFill>
-              </a:rPr>
-              <a:t>(e.g., house size + number of bedrooms)</a:t>
-            </a:r>
-          </a:p>
-          <a:p>
-            <a:pPr marL="800100" lvl="1" indent="-342900">
-              <a:buFont typeface="Courier New" panose="02070309020205020404" pitchFamily="49" charset="0"/>
-              <a:buChar char="o"/>
-            </a:pPr>
-            <a:endParaRPr lang="en-CA" sz="2400" dirty="0">
-              <a:solidFill>
-                <a:schemeClr val="bg1"/>
-              </a:solidFill>
-            </a:endParaRPr>
-          </a:p>
-          <a:p>
-            <a:pPr marL="800100" lvl="1" indent="-342900">
-              <a:buFont typeface="Courier New" panose="02070309020205020404" pitchFamily="49" charset="0"/>
-              <a:buChar char="o"/>
-            </a:pPr>
-            <a:r>
-              <a:rPr lang="en-CA" sz="2400" b="1" dirty="0">
-                <a:solidFill>
-                  <a:schemeClr val="bg1"/>
-                </a:solidFill>
-              </a:rPr>
-              <a:t>Model non-linear relationships</a:t>
-            </a:r>
-            <a:br>
-              <a:rPr lang="en-CA" sz="2400" dirty="0">
-                <a:solidFill>
-                  <a:schemeClr val="bg1"/>
-                </a:solidFill>
-              </a:rPr>
-            </a:br>
-            <a:r>
-              <a:rPr lang="en-CA" sz="2400" i="1" dirty="0">
-                <a:solidFill>
-                  <a:schemeClr val="bg1"/>
-                </a:solidFill>
-              </a:rPr>
-              <a:t>(e.g., curved trends captured using polynomial terms)</a:t>
-            </a:r>
-          </a:p>
-        </p:txBody>
-      </p:sp>
+        </p:nvGraphicFramePr>
+        <p:xfrm>
+          <a:off x="827909" y="2173099"/>
+          <a:ext cx="10536182" cy="3221860"/>
+        </p:xfrm>
+        <a:graphic>
+          <a:graphicData uri="http://schemas.openxmlformats.org/drawingml/2006/table">
+            <a:tbl>
+              <a:tblPr firstRow="1" bandRow="1">
+                <a:tableStyleId>{C083E6E3-FA7D-4D7B-A595-EF9225AFEA82}</a:tableStyleId>
+              </a:tblPr>
+              <a:tblGrid>
+                <a:gridCol w="5109851">
+                  <a:extLst>
+                    <a:ext uri="{9D8B030D-6E8A-4147-A177-3AD203B41FA5}">
+                      <a16:colId xmlns:a16="http://schemas.microsoft.com/office/drawing/2014/main" val="23861919"/>
+                    </a:ext>
+                  </a:extLst>
+                </a:gridCol>
+                <a:gridCol w="5426331">
+                  <a:extLst>
+                    <a:ext uri="{9D8B030D-6E8A-4147-A177-3AD203B41FA5}">
+                      <a16:colId xmlns:a16="http://schemas.microsoft.com/office/drawing/2014/main" val="3731617711"/>
+                    </a:ext>
+                  </a:extLst>
+                </a:gridCol>
+              </a:tblGrid>
+              <a:tr h="570100">
+                <a:tc>
+                  <a:txBody>
+                    <a:bodyPr/>
+                    <a:lstStyle/>
+                    <a:p>
+                      <a:pPr marL="0" marR="0" lvl="0" indent="0" algn="l" defTabSz="914400" rtl="0" eaLnBrk="1" fontAlgn="auto" latinLnBrk="0" hangingPunct="1">
+                        <a:lnSpc>
+                          <a:spcPct val="100000"/>
+                        </a:lnSpc>
+                        <a:spcBef>
+                          <a:spcPts val="0"/>
+                        </a:spcBef>
+                        <a:spcAft>
+                          <a:spcPts val="0"/>
+                        </a:spcAft>
+                        <a:buClrTx/>
+                        <a:buSzTx/>
+                        <a:buFontTx/>
+                        <a:buNone/>
+                        <a:tabLst/>
+                        <a:defRPr/>
+                      </a:pPr>
+                      <a:r>
+                        <a:rPr lang="en-US" sz="2400" b="1" dirty="0">
+                          <a:solidFill>
+                            <a:schemeClr val="tx2">
+                              <a:lumMod val="90000"/>
+                            </a:schemeClr>
+                          </a:solidFill>
+                        </a:rPr>
+                        <a:t>Root Mean Square Error (RMSE)</a:t>
+                      </a:r>
+                    </a:p>
+                  </a:txBody>
+                  <a:tcPr>
+                    <a:lnR w="12700" cap="flat" cmpd="sng" algn="ctr">
+                      <a:solidFill>
+                        <a:schemeClr val="tx1"/>
+                      </a:solidFill>
+                      <a:prstDash val="solid"/>
+                      <a:round/>
+                      <a:headEnd type="none" w="med" len="med"/>
+                      <a:tailEnd type="none" w="med" len="med"/>
+                    </a:lnR>
+                  </a:tcPr>
+                </a:tc>
+                <a:tc>
+                  <a:txBody>
+                    <a:bodyPr/>
+                    <a:lstStyle/>
+                    <a:p>
+                      <a:pPr marL="0" marR="0" indent="0" algn="l" defTabSz="914400" rtl="0" eaLnBrk="1" fontAlgn="auto" latinLnBrk="0" hangingPunct="1">
+                        <a:lnSpc>
+                          <a:spcPct val="100000"/>
+                        </a:lnSpc>
+                        <a:spcBef>
+                          <a:spcPts val="0"/>
+                        </a:spcBef>
+                        <a:spcAft>
+                          <a:spcPts val="0"/>
+                        </a:spcAft>
+                        <a:buClrTx/>
+                        <a:buSzTx/>
+                        <a:buFontTx/>
+                        <a:buNone/>
+                        <a:tabLst/>
+                        <a:defRPr/>
+                      </a:pPr>
+                      <a:r>
+                        <a:rPr lang="en-US" sz="2400" b="1" dirty="0">
+                          <a:solidFill>
+                            <a:schemeClr val="bg1"/>
+                          </a:solidFill>
+                        </a:rPr>
+                        <a:t>Coefficient of Determination (R²)</a:t>
+                      </a:r>
+                    </a:p>
+                  </a:txBody>
+                  <a:tcPr>
+                    <a:lnL w="12700" cap="flat" cmpd="sng" algn="ctr">
+                      <a:solidFill>
+                        <a:schemeClr val="tx1"/>
+                      </a:solidFill>
+                      <a:prstDash val="solid"/>
+                      <a:round/>
+                      <a:headEnd type="none" w="med" len="med"/>
+                      <a:tailEnd type="none" w="med" len="med"/>
+                    </a:lnL>
+                  </a:tcPr>
+                </a:tc>
+                <a:extLst>
+                  <a:ext uri="{0D108BD9-81ED-4DB2-BD59-A6C34878D82A}">
+                    <a16:rowId xmlns:a16="http://schemas.microsoft.com/office/drawing/2014/main" val="2169096809"/>
+                  </a:ext>
+                </a:extLst>
+              </a:tr>
+              <a:tr h="2596885">
+                <a:tc>
+                  <a:txBody>
+                    <a:bodyPr/>
+                    <a:lstStyle/>
+                    <a:p>
+                      <a:pPr marL="342900" indent="-342900">
+                        <a:buFont typeface="Arial" panose="020B0604020202020204" pitchFamily="34" charset="0"/>
+                        <a:buChar char="•"/>
+                      </a:pPr>
+                      <a:r>
+                        <a:rPr lang="en-US" sz="2400" dirty="0">
+                          <a:solidFill>
+                            <a:schemeClr val="tx2">
+                              <a:lumMod val="90000"/>
+                            </a:schemeClr>
+                          </a:solidFill>
+                        </a:rPr>
+                        <a:t>Shows how far, on average, the predicted values are from the actual values.</a:t>
+                      </a:r>
+                    </a:p>
+                    <a:p>
+                      <a:pPr marL="342900" indent="-342900">
+                        <a:buFont typeface="Arial" panose="020B0604020202020204" pitchFamily="34" charset="0"/>
+                        <a:buChar char="•"/>
+                      </a:pPr>
+                      <a:r>
+                        <a:rPr lang="en-US" sz="2400" b="1" dirty="0">
+                          <a:solidFill>
+                            <a:schemeClr val="tx2">
+                              <a:lumMod val="90000"/>
+                            </a:schemeClr>
+                          </a:solidFill>
+                        </a:rPr>
+                        <a:t>Lower RMSE → better model fit </a:t>
+                      </a:r>
+                      <a:r>
+                        <a:rPr lang="en-US" sz="2400" dirty="0">
+                          <a:solidFill>
+                            <a:schemeClr val="tx2">
+                              <a:lumMod val="90000"/>
+                            </a:schemeClr>
+                          </a:solidFill>
+                        </a:rPr>
+                        <a:t>(smaller prediction errors).</a:t>
+                      </a:r>
+                    </a:p>
+                  </a:txBody>
+                  <a:tcPr>
+                    <a:lnR w="12700" cap="flat" cmpd="sng" algn="ctr">
+                      <a:solidFill>
+                        <a:schemeClr val="tx1"/>
+                      </a:solidFill>
+                      <a:prstDash val="solid"/>
+                      <a:round/>
+                      <a:headEnd type="none" w="med" len="med"/>
+                      <a:tailEnd type="none" w="med" len="med"/>
+                    </a:lnR>
+                    <a:solidFill>
+                      <a:schemeClr val="accent4">
+                        <a:lumMod val="60000"/>
+                        <a:lumOff val="40000"/>
+                        <a:alpha val="20000"/>
+                      </a:schemeClr>
+                    </a:solidFill>
+                  </a:tcPr>
+                </a:tc>
+                <a:tc>
+                  <a:txBody>
+                    <a:bodyPr/>
+                    <a:lstStyle/>
+                    <a:p>
+                      <a:pPr marL="342900" indent="-342900">
+                        <a:buFont typeface="Arial" panose="020B0604020202020204" pitchFamily="34" charset="0"/>
+                        <a:buChar char="•"/>
+                      </a:pPr>
+                      <a:r>
+                        <a:rPr lang="en-US" sz="2400" dirty="0">
+                          <a:solidFill>
+                            <a:schemeClr val="bg1"/>
+                          </a:solidFill>
+                        </a:rPr>
+                        <a:t>Tells us how much of the variation in the outcome (𝑦) is explained by the predictor (𝑥).</a:t>
+                      </a:r>
+                    </a:p>
+                    <a:p>
+                      <a:pPr marL="342900" indent="-342900">
+                        <a:buFont typeface="Arial" panose="020B0604020202020204" pitchFamily="34" charset="0"/>
+                        <a:buChar char="•"/>
+                      </a:pPr>
+                      <a:r>
+                        <a:rPr lang="en-US" sz="2400" dirty="0">
+                          <a:solidFill>
+                            <a:schemeClr val="bg1"/>
+                          </a:solidFill>
+                        </a:rPr>
+                        <a:t>Ranges from 0 to 1: </a:t>
+                      </a:r>
+                      <a:r>
+                        <a:rPr lang="en-US" sz="2400" b="1" dirty="0">
+                          <a:solidFill>
+                            <a:schemeClr val="bg1"/>
+                          </a:solidFill>
+                        </a:rPr>
+                        <a:t>higher values </a:t>
+                      </a:r>
+                      <a:r>
+                        <a:rPr lang="en-US" sz="2400" b="1" dirty="0">
+                          <a:solidFill>
+                            <a:schemeClr val="bg1"/>
+                          </a:solidFill>
+                          <a:sym typeface="Wingdings" pitchFamily="2" charset="2"/>
+                        </a:rPr>
+                        <a:t></a:t>
+                      </a:r>
+                      <a:r>
+                        <a:rPr lang="en-US" sz="2400" b="1" dirty="0">
+                          <a:solidFill>
+                            <a:schemeClr val="bg1"/>
+                          </a:solidFill>
+                        </a:rPr>
+                        <a:t> model explains more variation.</a:t>
+                      </a:r>
+                    </a:p>
+                    <a:p>
+                      <a:pPr marL="342900" indent="-342900">
+                        <a:buFont typeface="Arial" panose="020B0604020202020204" pitchFamily="34" charset="0"/>
+                        <a:buChar char="•"/>
+                      </a:pPr>
+                      <a:r>
+                        <a:rPr lang="en-US" sz="2400" dirty="0">
+                          <a:solidFill>
+                            <a:schemeClr val="bg1"/>
+                          </a:solidFill>
+                        </a:rPr>
+                        <a:t>In simple linear regression, R² = r² (the square of the correlation).</a:t>
+                      </a:r>
+                    </a:p>
+                  </a:txBody>
+                  <a:tcPr>
+                    <a:lnL w="12700" cap="flat" cmpd="sng" algn="ctr">
+                      <a:solidFill>
+                        <a:schemeClr val="tx1"/>
+                      </a:solidFill>
+                      <a:prstDash val="solid"/>
+                      <a:round/>
+                      <a:headEnd type="none" w="med" len="med"/>
+                      <a:tailEnd type="none" w="med" len="med"/>
+                    </a:lnL>
+                    <a:solidFill>
+                      <a:schemeClr val="accent4">
+                        <a:lumMod val="60000"/>
+                        <a:lumOff val="40000"/>
+                        <a:alpha val="20000"/>
+                      </a:schemeClr>
+                    </a:solidFill>
+                  </a:tcPr>
+                </a:tc>
+                <a:extLst>
+                  <a:ext uri="{0D108BD9-81ED-4DB2-BD59-A6C34878D82A}">
+                    <a16:rowId xmlns:a16="http://schemas.microsoft.com/office/drawing/2014/main" val="3547854081"/>
+                  </a:ext>
+                </a:extLst>
+              </a:tr>
+            </a:tbl>
+          </a:graphicData>
+        </a:graphic>
+      </p:graphicFrame>
     </p:spTree>
     <p:extLst>
       <p:ext uri="{BB962C8B-B14F-4D97-AF65-F5344CB8AC3E}">
-        <p14:creationId xmlns:p14="http://schemas.microsoft.com/office/powerpoint/2010/main" val="2139612907"/>
+        <p14:creationId xmlns:p14="http://schemas.microsoft.com/office/powerpoint/2010/main" val="568027824"/>
       </p:ext>
     </p:extLst>
   </p:cSld>
@@ -23034,7 +22991,16 @@
               <a:rPr lang="en-CA" sz="2400" dirty="0">
                 <a:latin typeface="Menlo" panose="020B0609030804020204" pitchFamily="49" charset="0"/>
               </a:rPr>
-              <a:t>, 1)</a:t>
+              <a:t>, 1) </a:t>
+            </a:r>
+            <a:r>
+              <a:rPr lang="en-CA" sz="2400" dirty="0">
+                <a:solidFill>
+                  <a:srgbClr val="7CA667"/>
+                </a:solidFill>
+                <a:latin typeface="Menlo" panose="020B0609030804020204" pitchFamily="49" charset="0"/>
+              </a:rPr>
+              <a:t># Constant variance of errors</a:t>
             </a:r>
           </a:p>
         </p:txBody>
@@ -23301,6 +23267,18 @@
               </a:rPr>
               <a:t>, 2)</a:t>
             </a:r>
+            <a:r>
+              <a:rPr lang="en-CA" sz="2400" dirty="0">
+                <a:solidFill>
+                  <a:srgbClr val="7CA667"/>
+                </a:solidFill>
+                <a:latin typeface="Menlo" panose="020B0609030804020204" pitchFamily="49" charset="0"/>
+              </a:rPr>
+              <a:t> # Normality of errors</a:t>
+            </a:r>
+            <a:endParaRPr lang="en-CA" sz="2400" dirty="0">
+              <a:latin typeface="Menlo" panose="020B0609030804020204" pitchFamily="49" charset="0"/>
+            </a:endParaRPr>
           </a:p>
         </p:txBody>
       </p:sp>
@@ -23474,7 +23452,16 @@
                 <a:effectLst/>
                 <a:latin typeface="Menlo" panose="020B0609030804020204" pitchFamily="49" charset="0"/>
               </a:rPr>
-              <a:t># Step 1. Get the residuals</a:t>
+              <a:t># Step 1. </a:t>
+            </a:r>
+            <a:r>
+              <a:rPr lang="en-CA" sz="3400" dirty="0">
+                <a:solidFill>
+                  <a:srgbClr val="7CA668"/>
+                </a:solidFill>
+                <a:latin typeface="Menlo" panose="020B0609030804020204" pitchFamily="49" charset="0"/>
+              </a:rPr>
+              <a:t>Get the residuals (errors)</a:t>
             </a:r>
           </a:p>
           <a:p>
@@ -23574,7 +23561,7 @@
                 <a:effectLst/>
                 <a:latin typeface="Menlo" panose="020B0609030804020204" pitchFamily="49" charset="0"/>
               </a:rPr>
-              <a:t># Step 2. Square the residuals</a:t>
+              <a:t># Step 2. Square the residuals </a:t>
             </a:r>
           </a:p>
           <a:p>
@@ -23657,45 +23644,30 @@
                 <a:effectLst/>
                 <a:latin typeface="Menlo" panose="020B0609030804020204" pitchFamily="49" charset="0"/>
               </a:rPr>
-              <a:t># Step 3. Find the average</a:t>
-            </a:r>
-            <a:endParaRPr lang="en-CA" sz="3400" b="0" dirty="0">
-              <a:effectLst/>
-              <a:latin typeface="Menlo" panose="020B0609030804020204" pitchFamily="49" charset="0"/>
-            </a:endParaRPr>
+              <a:t># Step 3. </a:t>
+            </a:r>
+            <a:r>
+              <a:rPr lang="en-CA" sz="3400" dirty="0">
+                <a:solidFill>
+                  <a:srgbClr val="7CA668"/>
+                </a:solidFill>
+                <a:latin typeface="Menlo" panose="020B0609030804020204" pitchFamily="49" charset="0"/>
+              </a:rPr>
+              <a:t>Find the mean of the squared residuals (MSE)</a:t>
+            </a:r>
           </a:p>
           <a:p>
             <a:pPr marL="0" indent="0">
               <a:buNone/>
             </a:pPr>
             <a:r>
-              <a:rPr lang="en-CA" sz="3400" dirty="0" err="1">
+              <a:rPr lang="en-CA" sz="3400" dirty="0">
                 <a:solidFill>
                   <a:srgbClr val="9CDCFE"/>
                 </a:solidFill>
                 <a:latin typeface="Menlo" panose="020B0609030804020204" pitchFamily="49" charset="0"/>
               </a:rPr>
-              <a:t>avg_r</a:t>
-            </a:r>
-            <a:r>
-              <a:rPr lang="en-CA" sz="3400" b="0" dirty="0" err="1">
-                <a:solidFill>
-                  <a:srgbClr val="9CDCFE"/>
-                </a:solidFill>
-                <a:effectLst/>
-                <a:latin typeface="Menlo" panose="020B0609030804020204" pitchFamily="49" charset="0"/>
-              </a:rPr>
-              <a:t>esiduals_squared</a:t>
-            </a:r>
-            <a:r>
-              <a:rPr lang="en-CA" sz="3400" b="0" dirty="0">
-                <a:solidFill>
-                  <a:srgbClr val="9CDCFE"/>
-                </a:solidFill>
-                <a:effectLst/>
-                <a:latin typeface="Menlo" panose="020B0609030804020204" pitchFamily="49" charset="0"/>
-              </a:rPr>
-              <a:t> </a:t>
+              <a:t>MSE </a:t>
             </a:r>
             <a:r>
               <a:rPr kumimoji="0" lang="en-CA" sz="3400" b="0" i="0" u="none" strike="noStrike" kern="1200" cap="none" spc="0" normalizeH="0" baseline="0" noProof="0" dirty="0">
@@ -23777,6 +23749,52 @@
               </a:rPr>
               <a:t>)</a:t>
             </a:r>
+          </a:p>
+          <a:p>
+            <a:pPr marL="0" lvl="0" indent="0">
+              <a:buNone/>
+              <a:defRPr/>
+            </a:pPr>
+            <a:r>
+              <a:rPr kumimoji="0" lang="en-CA" sz="3400" b="0" i="0" u="none" strike="noStrike" kern="1200" cap="none" spc="0" normalizeH="0" baseline="0" noProof="0" dirty="0">
+                <a:ln>
+                  <a:noFill/>
+                </a:ln>
+                <a:solidFill>
+                  <a:srgbClr val="7CA668"/>
+                </a:solidFill>
+                <a:effectLst/>
+                <a:uLnTx/>
+                <a:uFillTx/>
+                <a:latin typeface="Menlo" panose="020B0609030804020204" pitchFamily="49" charset="0"/>
+                <a:ea typeface="+mn-ea"/>
+                <a:cs typeface="+mn-cs"/>
+              </a:rPr>
+              <a:t># Step 4. </a:t>
+            </a:r>
+            <a:r>
+              <a:rPr lang="en-CA" sz="3400" dirty="0">
+                <a:solidFill>
+                  <a:srgbClr val="7CA668"/>
+                </a:solidFill>
+                <a:latin typeface="Menlo" panose="020B0609030804020204" pitchFamily="49" charset="0"/>
+              </a:rPr>
+              <a:t>Take the square root to get RMSE</a:t>
+            </a:r>
+            <a:endParaRPr kumimoji="0" lang="en-CA" sz="3400" b="0" i="0" u="none" strike="noStrike" kern="1200" cap="none" spc="0" normalizeH="0" baseline="0" noProof="0" dirty="0">
+              <a:ln>
+                <a:noFill/>
+              </a:ln>
+              <a:solidFill>
+                <a:prstClr val="white"/>
+              </a:solidFill>
+              <a:effectLst/>
+              <a:uLnTx/>
+              <a:uFillTx/>
+              <a:latin typeface="Menlo" panose="020B0609030804020204" pitchFamily="49" charset="0"/>
+              <a:ea typeface="+mn-ea"/>
+              <a:cs typeface="+mn-cs"/>
+            </a:endParaRPr>
           </a:p>
           <a:p>
             <a:pPr marL="0" marR="0" lvl="0" indent="0" algn="l" defTabSz="914400" rtl="0" eaLnBrk="1" fontAlgn="auto" latinLnBrk="0" hangingPunct="1">
@@ -23802,7 +23820,7 @@
                   <a:noFill/>
                 </a:ln>
                 <a:solidFill>
-                  <a:srgbClr val="7CA668"/>
+                  <a:srgbClr val="9CDCFE"/>
                 </a:solidFill>
                 <a:effectLst/>
                 <a:uLnTx/>
@@ -23811,31 +23829,94 @@
                 <a:ea typeface="+mn-ea"/>
                 <a:cs typeface="+mn-cs"/>
               </a:rPr>
-              <a:t># Step 4. </a:t>
+              <a:t>RMSE </a:t>
+            </a:r>
+            <a:r>
+              <a:rPr kumimoji="0" lang="en-CA" sz="3400" b="0" i="0" u="none" strike="noStrike" kern="1200" cap="none" spc="0" normalizeH="0" baseline="0" noProof="0" dirty="0">
+                <a:ln>
+                  <a:noFill/>
+                </a:ln>
+                <a:solidFill>
+                  <a:prstClr val="white"/>
+                </a:solidFill>
+                <a:effectLst/>
+                <a:uLnTx/>
+                <a:uFillTx/>
+                <a:latin typeface="Menlo" panose="020B0609030804020204" pitchFamily="49" charset="0"/>
+                <a:ea typeface="+mn-ea"/>
+                <a:cs typeface="+mn-cs"/>
+              </a:rPr>
+              <a:t>&lt;-</a:t>
+            </a:r>
+            <a:r>
+              <a:rPr kumimoji="0" lang="en-CA" sz="3400" b="0" i="0" u="none" strike="noStrike" kern="1200" cap="none" spc="0" normalizeH="0" baseline="0" noProof="0" dirty="0">
+                <a:ln>
+                  <a:noFill/>
+                </a:ln>
+                <a:solidFill>
+                  <a:srgbClr val="7CA668"/>
+                </a:solidFill>
+                <a:effectLst/>
+                <a:uLnTx/>
+                <a:uFillTx/>
+                <a:latin typeface="Menlo" panose="020B0609030804020204" pitchFamily="49" charset="0"/>
+                <a:ea typeface="+mn-ea"/>
+                <a:cs typeface="+mn-cs"/>
+              </a:rPr>
+              <a:t> </a:t>
             </a:r>
             <a:r>
               <a:rPr lang="en-CA" sz="3400" dirty="0">
                 <a:solidFill>
-                  <a:srgbClr val="7CA668"/>
+                  <a:srgbClr val="4EC9B0"/>
                 </a:solidFill>
                 <a:latin typeface="Menlo" panose="020B0609030804020204" pitchFamily="49" charset="0"/>
               </a:rPr>
-              <a:t>Take the square root</a:t>
-            </a:r>
-            <a:endParaRPr kumimoji="0" lang="en-CA" sz="3400" b="0" i="0" u="none" strike="noStrike" kern="1200" cap="none" spc="0" normalizeH="0" baseline="0" noProof="0" dirty="0">
-              <a:ln>
-                <a:noFill/>
-              </a:ln>
-              <a:solidFill>
-                <a:prstClr val="white"/>
-              </a:solidFill>
-              <a:effectLst/>
-              <a:uLnTx/>
-              <a:uFillTx/>
-              <a:latin typeface="Menlo" panose="020B0609030804020204" pitchFamily="49" charset="0"/>
-              <a:ea typeface="+mn-ea"/>
-              <a:cs typeface="+mn-cs"/>
-            </a:endParaRPr>
+              <a:t>sqrt</a:t>
+            </a:r>
+            <a:r>
+              <a:rPr kumimoji="0" lang="en-CA" sz="3400" b="0" i="0" u="none" strike="noStrike" kern="1200" cap="none" spc="0" normalizeH="0" baseline="0" noProof="0" dirty="0">
+                <a:ln>
+                  <a:noFill/>
+                </a:ln>
+                <a:solidFill>
+                  <a:srgbClr val="D4D4D4"/>
+                </a:solidFill>
+                <a:effectLst/>
+                <a:uLnTx/>
+                <a:uFillTx/>
+                <a:latin typeface="Menlo" panose="020B0609030804020204" pitchFamily="49" charset="0"/>
+                <a:ea typeface="+mn-ea"/>
+                <a:cs typeface="+mn-cs"/>
+              </a:rPr>
+              <a:t>(</a:t>
+            </a:r>
+            <a:r>
+              <a:rPr lang="en-CA" sz="3400" dirty="0">
+                <a:solidFill>
+                  <a:srgbClr val="9CDCFE"/>
+                </a:solidFill>
+                <a:latin typeface="Menlo" panose="020B0609030804020204" pitchFamily="49" charset="0"/>
+              </a:rPr>
+              <a:t>MSE</a:t>
+            </a:r>
+            <a:r>
+              <a:rPr kumimoji="0" lang="en-CA" sz="3400" b="0" i="0" u="none" strike="noStrike" kern="1200" cap="none" spc="0" normalizeH="0" baseline="0" noProof="0" dirty="0">
+                <a:ln>
+                  <a:noFill/>
+                </a:ln>
+                <a:solidFill>
+                  <a:prstClr val="white"/>
+                </a:solidFill>
+                <a:effectLst/>
+                <a:uLnTx/>
+                <a:uFillTx/>
+                <a:latin typeface="Menlo" panose="020B0609030804020204" pitchFamily="49" charset="0"/>
+                <a:ea typeface="+mn-ea"/>
+                <a:cs typeface="+mn-cs"/>
+              </a:rPr>
+              <a:t>)</a:t>
+            </a:r>
           </a:p>
           <a:p>
             <a:pPr marL="0" marR="0" lvl="0" indent="0" algn="l" defTabSz="914400" rtl="0" eaLnBrk="1" fontAlgn="auto" latinLnBrk="0" hangingPunct="1">
@@ -23870,104 +23951,14 @@
                 <a:ea typeface="+mn-ea"/>
                 <a:cs typeface="+mn-cs"/>
               </a:rPr>
-              <a:t>RMSE </a:t>
-            </a:r>
-            <a:r>
-              <a:rPr kumimoji="0" lang="en-CA" sz="3400" b="0" i="0" u="none" strike="noStrike" kern="1200" cap="none" spc="0" normalizeH="0" baseline="0" noProof="0" dirty="0">
-                <a:ln>
-                  <a:noFill/>
-                </a:ln>
-                <a:solidFill>
-                  <a:prstClr val="white"/>
-                </a:solidFill>
-                <a:effectLst/>
-                <a:uLnTx/>
-                <a:uFillTx/>
-                <a:latin typeface="Menlo" panose="020B0609030804020204" pitchFamily="49" charset="0"/>
-                <a:ea typeface="+mn-ea"/>
-                <a:cs typeface="+mn-cs"/>
-              </a:rPr>
-              <a:t>&lt;-</a:t>
-            </a:r>
-            <a:r>
-              <a:rPr kumimoji="0" lang="en-CA" sz="3400" b="0" i="0" u="none" strike="noStrike" kern="1200" cap="none" spc="0" normalizeH="0" baseline="0" noProof="0" dirty="0">
-                <a:ln>
-                  <a:noFill/>
-                </a:ln>
-                <a:solidFill>
-                  <a:srgbClr val="7CA668"/>
-                </a:solidFill>
-                <a:effectLst/>
-                <a:uLnTx/>
-                <a:uFillTx/>
-                <a:latin typeface="Menlo" panose="020B0609030804020204" pitchFamily="49" charset="0"/>
-                <a:ea typeface="+mn-ea"/>
-                <a:cs typeface="+mn-cs"/>
-              </a:rPr>
-              <a:t> </a:t>
-            </a:r>
-            <a:r>
-              <a:rPr lang="en-CA" sz="3400" dirty="0">
-                <a:solidFill>
-                  <a:srgbClr val="4EC9B0"/>
-                </a:solidFill>
-                <a:latin typeface="Menlo" panose="020B0609030804020204" pitchFamily="49" charset="0"/>
-              </a:rPr>
-              <a:t>sqrt</a:t>
-            </a:r>
-            <a:r>
-              <a:rPr kumimoji="0" lang="en-CA" sz="3400" b="0" i="0" u="none" strike="noStrike" kern="1200" cap="none" spc="0" normalizeH="0" baseline="0" noProof="0" dirty="0">
-                <a:ln>
-                  <a:noFill/>
-                </a:ln>
-                <a:solidFill>
-                  <a:srgbClr val="D4D4D4"/>
-                </a:solidFill>
-                <a:effectLst/>
-                <a:uLnTx/>
-                <a:uFillTx/>
-                <a:latin typeface="Menlo" panose="020B0609030804020204" pitchFamily="49" charset="0"/>
-                <a:ea typeface="+mn-ea"/>
-                <a:cs typeface="+mn-cs"/>
-              </a:rPr>
-              <a:t>(</a:t>
-            </a:r>
-            <a:r>
-              <a:rPr lang="en-CA" sz="3400" dirty="0" err="1">
-                <a:solidFill>
-                  <a:srgbClr val="9CDCFE"/>
-                </a:solidFill>
-                <a:latin typeface="Menlo" panose="020B0609030804020204" pitchFamily="49" charset="0"/>
-              </a:rPr>
-              <a:t>avg_r</a:t>
-            </a:r>
-            <a:r>
-              <a:rPr lang="en-CA" sz="3400" b="0" dirty="0" err="1">
-                <a:solidFill>
-                  <a:srgbClr val="9CDCFE"/>
-                </a:solidFill>
-                <a:effectLst/>
-                <a:latin typeface="Menlo" panose="020B0609030804020204" pitchFamily="49" charset="0"/>
-              </a:rPr>
-              <a:t>esiduals_squared</a:t>
-            </a:r>
-            <a:r>
-              <a:rPr kumimoji="0" lang="en-CA" sz="3400" b="0" i="0" u="none" strike="noStrike" kern="1200" cap="none" spc="0" normalizeH="0" baseline="0" noProof="0" dirty="0">
-                <a:ln>
-                  <a:noFill/>
-                </a:ln>
-                <a:solidFill>
-                  <a:prstClr val="white"/>
-                </a:solidFill>
-                <a:effectLst/>
-                <a:uLnTx/>
-                <a:uFillTx/>
-                <a:latin typeface="Menlo" panose="020B0609030804020204" pitchFamily="49" charset="0"/>
-                <a:ea typeface="+mn-ea"/>
-                <a:cs typeface="+mn-cs"/>
-              </a:rPr>
-              <a:t>)</a:t>
-            </a:r>
+              <a:t>RMSE</a:t>
+            </a:r>
+            <a:endParaRPr lang="en-CA" sz="3400" dirty="0">
+              <a:solidFill>
+                <a:prstClr val="white"/>
+              </a:solidFill>
+              <a:latin typeface="Menlo" panose="020B0609030804020204" pitchFamily="49" charset="0"/>
+            </a:endParaRPr>
           </a:p>
           <a:p>
             <a:pPr marL="0" marR="0" lvl="0" indent="0" algn="l" defTabSz="914400" rtl="0" eaLnBrk="1" fontAlgn="auto" latinLnBrk="0" hangingPunct="1">
@@ -23988,28 +23979,22 @@
               <a:defRPr/>
             </a:pPr>
             <a:r>
-              <a:rPr kumimoji="0" lang="en-CA" sz="3400" b="0" i="0" u="none" strike="noStrike" kern="1200" cap="none" spc="0" normalizeH="0" baseline="0" noProof="0" dirty="0">
+              <a:rPr kumimoji="0" lang="en-US" sz="3400" b="0" i="0" u="none" strike="noStrike" kern="1200" cap="none" spc="0" normalizeH="0" baseline="0" noProof="0" dirty="0">
                 <a:ln>
                   <a:noFill/>
                 </a:ln>
                 <a:solidFill>
-                  <a:srgbClr val="9CDCFE"/>
+                  <a:prstClr val="white"/>
                 </a:solidFill>
                 <a:effectLst/>
                 <a:uLnTx/>
                 <a:uFillTx/>
                 <a:latin typeface="Menlo" panose="020B0609030804020204" pitchFamily="49" charset="0"/>
-                <a:ea typeface="+mn-ea"/>
-                <a:cs typeface="+mn-cs"/>
-              </a:rPr>
-              <a:t>RMSE</a:t>
-            </a:r>
-            <a:endParaRPr lang="en-CA" sz="3400" dirty="0">
-              <a:solidFill>
-                <a:prstClr val="white"/>
-              </a:solidFill>
-              <a:latin typeface="Menlo" panose="020B0609030804020204" pitchFamily="49" charset="0"/>
-            </a:endParaRPr>
+                <a:ea typeface="Menlo" panose="020B0609030804020204" pitchFamily="49" charset="0"/>
+                <a:cs typeface="Menlo" panose="020B0609030804020204" pitchFamily="49" charset="0"/>
+              </a:rPr>
+              <a:t>81885.64 </a:t>
+            </a:r>
           </a:p>
           <a:p>
             <a:pPr marL="0" marR="0" lvl="0" indent="0" algn="l" defTabSz="914400" rtl="0" eaLnBrk="1" fontAlgn="auto" latinLnBrk="0" hangingPunct="1">
@@ -24035,7 +24020,7 @@
                   <a:noFill/>
                 </a:ln>
                 <a:solidFill>
-                  <a:prstClr val="white"/>
+                  <a:srgbClr val="7CA667"/>
                 </a:solidFill>
                 <a:effectLst/>
                 <a:uLnTx/>
@@ -24044,54 +24029,18 @@
                 <a:ea typeface="Menlo" panose="020B0609030804020204" pitchFamily="49" charset="0"/>
                 <a:cs typeface="Menlo" panose="020B0609030804020204" pitchFamily="49" charset="0"/>
               </a:rPr>
-              <a:t>81885.64 </a:t>
-            </a:r>
-          </a:p>
-          <a:p>
-            <a:pPr marL="0" marR="0" lvl="0" indent="0" algn="l" defTabSz="914400" rtl="0" eaLnBrk="1" fontAlgn="auto" latinLnBrk="0" hangingPunct="1">
-              <a:lnSpc>
-                <a:spcPct val="90000"/>
-              </a:lnSpc>
-              <a:spcBef>
-                <a:spcPts val="1000"/>
-              </a:spcBef>
-              <a:spcAft>
-                <a:spcPts val="0"/>
-              </a:spcAft>
-              <a:buClrTx/>
-              <a:buSzTx/>
-              <a:buFont typeface="Arial" panose="020B0604020202020204" pitchFamily="34" charset="0"/>
-              <a:buNone/>
-              <a:tabLst/>
-              <a:defRPr/>
-            </a:pPr>
-            <a:r>
-              <a:rPr kumimoji="0" lang="en-US" sz="3400" b="0" i="0" u="none" strike="noStrike" kern="1200" cap="none" spc="0" normalizeH="0" baseline="0" noProof="0" dirty="0">
-                <a:ln>
-                  <a:noFill/>
-                </a:ln>
+              <a:t># </a:t>
+            </a:r>
+            <a:r>
+              <a:rPr lang="en-CA" sz="3400" dirty="0">
                 <a:solidFill>
                   <a:srgbClr val="7CA667"/>
                 </a:solidFill>
-                <a:effectLst/>
-                <a:uLnTx/>
-                <a:uFillTx/>
                 <a:latin typeface="Menlo" panose="020B0609030804020204" pitchFamily="49" charset="0"/>
                 <a:ea typeface="Menlo" panose="020B0609030804020204" pitchFamily="49" charset="0"/>
                 <a:cs typeface="Menlo" panose="020B0609030804020204" pitchFamily="49" charset="0"/>
               </a:rPr>
-              <a:t># </a:t>
-            </a:r>
-            <a:r>
-              <a:rPr lang="en-CA" sz="3400" dirty="0">
-                <a:solidFill>
-                  <a:srgbClr val="7CA667"/>
-                </a:solidFill>
-                <a:latin typeface="Menlo" panose="020B0609030804020204" pitchFamily="49" charset="0"/>
-                <a:ea typeface="Menlo" panose="020B0609030804020204" pitchFamily="49" charset="0"/>
-                <a:cs typeface="Menlo" panose="020B0609030804020204" pitchFamily="49" charset="0"/>
-              </a:rPr>
-              <a:t>On average predictions are about $82,000 off from the true sale prices.</a:t>
+              <a:t>On average, the predicted sale prices are about $82,000 off from the true sale prices.</a:t>
             </a:r>
             <a:endParaRPr kumimoji="0" lang="en-US" sz="3400" i="0" u="none" strike="noStrike" kern="1200" cap="none" spc="0" normalizeH="0" baseline="0" noProof="0" dirty="0">
               <a:ln>
@@ -24171,15 +24120,33 @@
                                   </p:childTnLst>
                                 </p:cTn>
                               </p:par>
+                            </p:childTnLst>
+                          </p:cTn>
+                        </p:par>
+                      </p:childTnLst>
+                    </p:cTn>
+                  </p:par>
+                  <p:par>
+                    <p:cTn id="7" fill="hold">
+                      <p:stCondLst>
+                        <p:cond delay="indefinite"/>
+                      </p:stCondLst>
+                      <p:childTnLst>
+                        <p:par>
+                          <p:cTn id="8" fill="hold">
+                            <p:stCondLst>
+                              <p:cond delay="0"/>
+                            </p:stCondLst>
+                            <p:childTnLst>
                               <p:par>
-                                <p:cTn id="7" presetID="1" presetClass="entr" presetSubtype="0" fill="hold" nodeType="withEffect">
+                                <p:cTn id="9" presetID="1" presetClass="entr" presetSubtype="0" fill="hold" nodeType="clickEffect">
                                   <p:stCondLst>
                                     <p:cond delay="0"/>
                                   </p:stCondLst>
                                   <p:childTnLst>
                                     <p:set>
                                       <p:cBhvr>
-                                        <p:cTn id="8" dur="1" fill="hold">
+                                        <p:cTn id="10" dur="1" fill="hold">
                                           <p:stCondLst>
                                             <p:cond delay="0"/>
                                           </p:stCondLst>
@@ -24209,50 +24176,19 @@
                     </p:cTn>
                   </p:par>
                   <p:par>
-                    <p:cTn id="9" fill="hold">
+                    <p:cTn id="11" fill="hold">
                       <p:stCondLst>
                         <p:cond delay="indefinite"/>
                       </p:stCondLst>
                       <p:childTnLst>
                         <p:par>
-                          <p:cTn id="10" fill="hold">
+                          <p:cTn id="12" fill="hold">
                             <p:stCondLst>
                               <p:cond delay="0"/>
                             </p:stCondLst>
                             <p:childTnLst>
                               <p:par>
-                                <p:cTn id="11" presetID="1" presetClass="entr" presetSubtype="0" fill="hold" nodeType="clickEffect">
-                                  <p:stCondLst>
-                                    <p:cond delay="0"/>
-                                  </p:stCondLst>
-                                  <p:childTnLst>
-                                    <p:set>
-                                      <p:cBhvr>
-                                        <p:cTn id="12" dur="1" fill="hold">
-                                          <p:stCondLst>
-                                            <p:cond delay="0"/>
-                                          </p:stCondLst>
-                                        </p:cTn>
-                                        <p:tgtEl>
-                                          <p:spTgt spid="5">
-                                            <p:txEl>
-                                              <p:pRg st="5" end="5"/>
-                                            </p:txEl>
-                                          </p:spTgt>
-                                        </p:tgtEl>
-                                        <p:attrNameLst>
-                                          <p:attrName>style.visibility</p:attrName>
-                                        </p:attrNameLst>
-                                      </p:cBhvr>
-                                      <p:to>
-                                        <p:strVal val="visible"/>
-                                      </p:to>
-                                    </p:set>
-                                  </p:childTnLst>
-                                </p:cTn>
-                              </p:par>
-                              <p:par>
-                                <p:cTn id="13" presetID="1" presetClass="entr" presetSubtype="0" fill="hold" nodeType="withEffect">
+                                <p:cTn id="13" presetID="1" presetClass="entr" presetSubtype="0" fill="hold" nodeType="clickEffect">
                                   <p:stCondLst>
                                     <p:cond delay="0"/>
                                   </p:stCondLst>
@@ -24267,7 +24203,7 @@
                                         <p:tgtEl>
                                           <p:spTgt spid="5">
                                             <p:txEl>
-                                              <p:pRg st="6" end="6"/>
+                                              <p:pRg st="5" end="5"/>
                                             </p:txEl>
                                           </p:spTgt>
                                         </p:tgtEl>
@@ -24316,6 +24252,55 @@
                                         <p:tgtEl>
                                           <p:spTgt spid="5">
                                             <p:txEl>
+                                              <p:pRg st="6" end="6"/>
+                                            </p:txEl>
+                                          </p:spTgt>
+                                        </p:tgtEl>
+                                        <p:attrNameLst>
+                                          <p:attrName>style.visibility</p:attrName>
+                                        </p:attrNameLst>
+                                      </p:cBhvr>
+                                      <p:to>
+                                        <p:strVal val="visible"/>
+                                      </p:to>
+                                    </p:set>
+                                  </p:childTnLst>
+                                </p:cTn>
+                              </p:par>
+                            </p:childTnLst>
+                          </p:cTn>
+                        </p:par>
+                      </p:childTnLst>
+                    </p:cTn>
+                  </p:par>
+                  <p:par>
+                    <p:cTn id="19" fill="hold">
+                      <p:stCondLst>
+                        <p:cond delay="indefinite"/>
+                      </p:stCondLst>
+                      <p:childTnLst>
+                        <p:par>
+                          <p:cTn id="20" fill="hold">
+                            <p:stCondLst>
+                              <p:cond delay="0"/>
+                            </p:stCondLst>
+                            <p:childTnLst>
+                              <p:par>
+                                <p:cTn id="21" presetID="1" presetClass="entr" presetSubtype="0" fill="hold" nodeType="clickEffect">
+                                  <p:stCondLst>
+                                    <p:cond delay="0"/>
+                                  </p:stCondLst>
+                                  <p:childTnLst>
+                                    <p:set>
+                                      <p:cBhvr>
+                                        <p:cTn id="22" dur="1" fill="hold">
+                                          <p:stCondLst>
+                                            <p:cond delay="0"/>
+                                          </p:stCondLst>
+                                        </p:cTn>
+                                        <p:tgtEl>
+                                          <p:spTgt spid="5">
+                                            <p:txEl>
                                               <p:pRg st="7" end="7"/>
                                             </p:txEl>
                                           </p:spTgt>
@@ -24332,14 +24317,14 @@
                                 </p:cTn>
                               </p:par>
                               <p:par>
-                                <p:cTn id="19" presetID="1" presetClass="entr" presetSubtype="0" fill="hold" nodeType="withEffect">
+                                <p:cTn id="23" presetID="1" presetClass="entr" presetSubtype="0" fill="hold" nodeType="withEffect">
                                   <p:stCondLst>
                                     <p:cond delay="0"/>
                                   </p:stCondLst>
                                   <p:childTnLst>
                                     <p:set>
                                       <p:cBhvr>
-                                        <p:cTn id="20" dur="1" fill="hold">
+                                        <p:cTn id="24" dur="1" fill="hold">
                                           <p:stCondLst>
                                             <p:cond delay="0"/>
                                           </p:stCondLst>
@@ -24369,26 +24354,26 @@
                     </p:cTn>
                   </p:par>
                   <p:par>
-                    <p:cTn id="21" fill="hold">
+                    <p:cTn id="25" fill="hold">
                       <p:stCondLst>
                         <p:cond delay="indefinite"/>
                       </p:stCondLst>
                       <p:childTnLst>
                         <p:par>
-                          <p:cTn id="22" fill="hold">
+                          <p:cTn id="26" fill="hold">
                             <p:stCondLst>
                               <p:cond delay="0"/>
                             </p:stCondLst>
                             <p:childTnLst>
                               <p:par>
-                                <p:cTn id="23" presetID="1" presetClass="entr" presetSubtype="0" fill="hold" nodeType="clickEffect">
+                                <p:cTn id="27" presetID="1" presetClass="entr" presetSubtype="0" fill="hold" nodeType="clickEffect">
                                   <p:stCondLst>
                                     <p:cond delay="0"/>
                                   </p:stCondLst>
                                   <p:childTnLst>
                                     <p:set>
                                       <p:cBhvr>
-                                        <p:cTn id="24" dur="1" fill="hold">
+                                        <p:cTn id="28" dur="1" fill="hold">
                                           <p:stCondLst>
                                             <p:cond delay="0"/>
                                           </p:stCondLst>
@@ -24412,14 +24397,14 @@
                                 </p:cTn>
                               </p:par>
                               <p:par>
-                                <p:cTn id="25" presetID="1" presetClass="entr" presetSubtype="0" fill="hold" nodeType="withEffect">
+                                <p:cTn id="29" presetID="1" presetClass="entr" presetSubtype="0" fill="hold" nodeType="withEffect">
                                   <p:stCondLst>
                                     <p:cond delay="0"/>
                                   </p:stCondLst>
                                   <p:childTnLst>
                                     <p:set>
                                       <p:cBhvr>
-                                        <p:cTn id="26" dur="1" fill="hold">
+                                        <p:cTn id="30" dur="1" fill="hold">
                                           <p:stCondLst>
                                             <p:cond delay="0"/>
                                           </p:stCondLst>
@@ -24443,14 +24428,14 @@
                                 </p:cTn>
                               </p:par>
                               <p:par>
-                                <p:cTn id="27" presetID="1" presetClass="entr" presetSubtype="0" fill="hold" nodeType="withEffect">
+                                <p:cTn id="31" presetID="1" presetClass="entr" presetSubtype="0" fill="hold" nodeType="withEffect">
                                   <p:stCondLst>
                                     <p:cond delay="0"/>
                                   </p:stCondLst>
                                   <p:childTnLst>
                                     <p:set>
                                       <p:cBhvr>
-                                        <p:cTn id="28" dur="1" fill="hold">
+                                        <p:cTn id="32" dur="1" fill="hold">
                                           <p:stCondLst>
                                             <p:cond delay="0"/>
                                           </p:stCondLst>
@@ -24892,17 +24877,7 @@
                 <a:effectLst/>
                 <a:latin typeface="Menlo" panose="020B0609030804020204" pitchFamily="49" charset="0"/>
               </a:rPr>
-              <a:t>R</a:t>
-            </a:r>
-            <a:r>
-              <a:rPr lang="en-CA" sz="2400" b="0" baseline="30000" dirty="0">
-                <a:solidFill>
-                  <a:srgbClr val="7CA667"/>
-                </a:solidFill>
-                <a:effectLst/>
-                <a:latin typeface="Menlo" panose="020B0609030804020204" pitchFamily="49" charset="0"/>
-              </a:rPr>
-              <a:t>2</a:t>
+              <a:t>About 53% </a:t>
             </a:r>
             <a:r>
               <a:rPr lang="en-US" sz="2400" dirty="0">
@@ -24913,7 +24888,7 @@
                 <a:ea typeface="Menlo" panose="020B0609030804020204" pitchFamily="49" charset="0"/>
                 <a:cs typeface="Menlo" panose="020B0609030804020204" pitchFamily="49" charset="0"/>
               </a:rPr>
-              <a:t> tells us how much of the variation in price we can explain using size — here, about half!</a:t>
+              <a:t>of the variation in price can be explained by house size alone!</a:t>
             </a:r>
             <a:endParaRPr lang="en-CA" sz="2400" b="0" dirty="0">
               <a:effectLst/>
@@ -29384,6 +29359,403 @@
         <p:cNvPr id="1" name="">
           <a:extLst>
             <a:ext uri="{FF2B5EF4-FFF2-40B4-BE49-F238E27FC236}">
+              <a16:creationId xmlns:a16="http://schemas.microsoft.com/office/drawing/2014/main" id="{7B788942-A90B-4191-DB4E-8635EB19F75D}"/>
+            </a:ext>
+          </a:extLst>
+        </p:cNvPr>
+        <p:cNvGrpSpPr/>
+        <p:nvPr/>
+      </p:nvGrpSpPr>
+      <p:grpSpPr>
+        <a:xfrm>
+          <a:off x="0" y="0"/>
+          <a:ext cx="0" cy="0"/>
+          <a:chOff x="0" y="0"/>
+          <a:chExt cx="0" cy="0"/>
+        </a:xfrm>
+      </p:grpSpPr>
+      <p:sp>
+        <p:nvSpPr>
+          <p:cNvPr id="11" name="Title 1">
+            <a:extLst>
+              <a:ext uri="{FF2B5EF4-FFF2-40B4-BE49-F238E27FC236}">
+                <a16:creationId xmlns:a16="http://schemas.microsoft.com/office/drawing/2014/main" id="{7A56C48D-8330-5AF8-665F-30FA3638CC73}"/>
+              </a:ext>
+            </a:extLst>
+          </p:cNvPr>
+          <p:cNvSpPr txBox="1">
+            <a:spLocks/>
+          </p:cNvSpPr>
+          <p:nvPr/>
+        </p:nvSpPr>
+        <p:spPr>
+          <a:xfrm>
+            <a:off x="702128" y="517525"/>
+            <a:ext cx="10651672" cy="1325563"/>
+          </a:xfrm>
+          <a:prstGeom prst="rect">
+            <a:avLst/>
+          </a:prstGeom>
+        </p:spPr>
+        <p:txBody>
+          <a:bodyPr vert="horz" lIns="91440" tIns="45720" rIns="91440" bIns="45720" rtlCol="0" anchor="ctr">
+            <a:normAutofit/>
+          </a:bodyPr>
+          <a:lstStyle>
+            <a:lvl1pPr algn="l" defTabSz="914400" rtl="0" eaLnBrk="1" latinLnBrk="0" hangingPunct="1">
+              <a:lnSpc>
+                <a:spcPct val="90000"/>
+              </a:lnSpc>
+              <a:spcBef>
+                <a:spcPct val="0"/>
+              </a:spcBef>
+              <a:buNone/>
+              <a:defRPr sz="4400" kern="1200">
+                <a:solidFill>
+                  <a:schemeClr val="tx1"/>
+                </a:solidFill>
+                <a:latin typeface="+mj-lt"/>
+                <a:ea typeface="+mj-ea"/>
+                <a:cs typeface="+mj-cs"/>
+              </a:defRPr>
+            </a:lvl1pPr>
+          </a:lstStyle>
+          <a:p>
+            <a:pPr marL="0" marR="0" lvl="0" indent="0" algn="l" defTabSz="914400" rtl="0" eaLnBrk="1" fontAlgn="auto" latinLnBrk="0" hangingPunct="1">
+              <a:lnSpc>
+                <a:spcPct val="90000"/>
+              </a:lnSpc>
+              <a:spcBef>
+                <a:spcPct val="0"/>
+              </a:spcBef>
+              <a:spcAft>
+                <a:spcPts val="0"/>
+              </a:spcAft>
+              <a:buClrTx/>
+              <a:buSzTx/>
+              <a:buFontTx/>
+              <a:buNone/>
+              <a:tabLst/>
+              <a:defRPr/>
+            </a:pPr>
+            <a:r>
+              <a:rPr kumimoji="0" lang="en-US" sz="4400" b="0" i="0" u="none" strike="noStrike" kern="1200" cap="none" spc="0" normalizeH="0" baseline="0" noProof="0" dirty="0">
+                <a:ln>
+                  <a:noFill/>
+                </a:ln>
+                <a:solidFill>
+                  <a:prstClr val="black"/>
+                </a:solidFill>
+                <a:effectLst/>
+                <a:uLnTx/>
+                <a:uFillTx/>
+                <a:latin typeface="Aptos Display" panose="02110004020202020204"/>
+                <a:ea typeface="+mj-ea"/>
+                <a:cs typeface="+mj-cs"/>
+              </a:rPr>
+              <a:t>Simple</a:t>
+            </a:r>
+            <a:r>
+              <a:rPr lang="en-US" dirty="0">
+                <a:solidFill>
+                  <a:prstClr val="black"/>
+                </a:solidFill>
+                <a:latin typeface="Aptos Display" panose="02110004020202020204"/>
+              </a:rPr>
+              <a:t> linear regression is just the start!</a:t>
+            </a:r>
+            <a:endParaRPr kumimoji="0" lang="en-US" sz="4400" b="0" i="0" u="none" strike="noStrike" kern="1200" cap="none" spc="0" normalizeH="0" baseline="0" noProof="0" dirty="0">
+              <a:ln>
+                <a:noFill/>
+              </a:ln>
+              <a:solidFill>
+                <a:prstClr val="black"/>
+              </a:solidFill>
+              <a:effectLst/>
+              <a:uLnTx/>
+              <a:uFillTx/>
+              <a:latin typeface="Aptos Display" panose="02110004020202020204"/>
+              <a:ea typeface="+mj-ea"/>
+              <a:cs typeface="+mj-cs"/>
+            </a:endParaRPr>
+          </a:p>
+        </p:txBody>
+      </p:sp>
+      <p:sp>
+        <p:nvSpPr>
+          <p:cNvPr id="13" name="Content Placeholder 2">
+            <a:extLst>
+              <a:ext uri="{FF2B5EF4-FFF2-40B4-BE49-F238E27FC236}">
+                <a16:creationId xmlns:a16="http://schemas.microsoft.com/office/drawing/2014/main" id="{CF6F61C7-2976-C825-55A8-0E08054B5A97}"/>
+              </a:ext>
+            </a:extLst>
+          </p:cNvPr>
+          <p:cNvSpPr>
+            <a:spLocks noGrp="1"/>
+          </p:cNvSpPr>
+          <p:nvPr>
+            <p:ph idx="1"/>
+          </p:nvPr>
+        </p:nvSpPr>
+        <p:spPr>
+          <a:xfrm>
+            <a:off x="702128" y="1989137"/>
+            <a:ext cx="10511972" cy="4351338"/>
+          </a:xfrm>
+        </p:spPr>
+        <p:txBody>
+          <a:bodyPr>
+            <a:noAutofit/>
+          </a:bodyPr>
+          <a:lstStyle/>
+          <a:p>
+            <a:r>
+              <a:rPr lang="en-CA" sz="2400" dirty="0">
+                <a:solidFill>
+                  <a:schemeClr val="bg1"/>
+                </a:solidFill>
+              </a:rPr>
+              <a:t>Some extensions allow us to model </a:t>
+            </a:r>
+            <a:r>
+              <a:rPr lang="en-CA" sz="2400" b="1" dirty="0">
+                <a:solidFill>
+                  <a:schemeClr val="bg1"/>
+                </a:solidFill>
+              </a:rPr>
+              <a:t>more complex patterns</a:t>
+            </a:r>
+            <a:r>
+              <a:rPr lang="en-CA" sz="2400" dirty="0">
+                <a:solidFill>
+                  <a:schemeClr val="bg1"/>
+                </a:solidFill>
+              </a:rPr>
+              <a:t> in our data:</a:t>
+            </a:r>
+          </a:p>
+          <a:p>
+            <a:pPr lvl="1">
+              <a:buFont typeface="Courier New" panose="02070309020205020404" pitchFamily="49" charset="0"/>
+              <a:buChar char="o"/>
+            </a:pPr>
+            <a:endParaRPr lang="en-CA" i="1" dirty="0">
+              <a:solidFill>
+                <a:schemeClr val="bg1"/>
+              </a:solidFill>
+            </a:endParaRPr>
+          </a:p>
+          <a:p>
+            <a:pPr>
+              <a:buFont typeface="Courier New" panose="02070309020205020404" pitchFamily="49" charset="0"/>
+              <a:buChar char="o"/>
+            </a:pPr>
+            <a:endParaRPr lang="en-CA" i="1" dirty="0">
+              <a:solidFill>
+                <a:schemeClr val="bg1"/>
+              </a:solidFill>
+            </a:endParaRPr>
+          </a:p>
+        </p:txBody>
+      </p:sp>
+      <p:pic>
+        <p:nvPicPr>
+          <p:cNvPr id="2" name="Picture 1">
+            <a:extLst>
+              <a:ext uri="{FF2B5EF4-FFF2-40B4-BE49-F238E27FC236}">
+                <a16:creationId xmlns:a16="http://schemas.microsoft.com/office/drawing/2014/main" id="{F70DAE5B-3B80-7834-CEF0-9ADAAA711876}"/>
+              </a:ext>
+            </a:extLst>
+          </p:cNvPr>
+          <p:cNvPicPr>
+            <a:picLocks noChangeAspect="1"/>
+          </p:cNvPicPr>
+          <p:nvPr/>
+        </p:nvPicPr>
+        <p:blipFill>
+          <a:blip r:embed="rId3"/>
+          <a:srcRect t="13842"/>
+          <a:stretch/>
+        </p:blipFill>
+        <p:spPr>
+          <a:xfrm>
+            <a:off x="6210432" y="2732970"/>
+            <a:ext cx="5642923" cy="3757974"/>
+          </a:xfrm>
+          <a:prstGeom prst="rect">
+            <a:avLst/>
+          </a:prstGeom>
+        </p:spPr>
+      </p:pic>
+      <p:sp>
+        <p:nvSpPr>
+          <p:cNvPr id="4" name="TextBox 3">
+            <a:extLst>
+              <a:ext uri="{FF2B5EF4-FFF2-40B4-BE49-F238E27FC236}">
+                <a16:creationId xmlns:a16="http://schemas.microsoft.com/office/drawing/2014/main" id="{7B3B274B-26E0-0576-031C-01749FFB7832}"/>
+              </a:ext>
+            </a:extLst>
+          </p:cNvPr>
+          <p:cNvSpPr txBox="1"/>
+          <p:nvPr/>
+        </p:nvSpPr>
+        <p:spPr>
+          <a:xfrm>
+            <a:off x="702128" y="2486429"/>
+            <a:ext cx="6147559" cy="4154984"/>
+          </a:xfrm>
+          <a:prstGeom prst="rect">
+            <a:avLst/>
+          </a:prstGeom>
+          <a:noFill/>
+        </p:spPr>
+        <p:txBody>
+          <a:bodyPr wrap="square">
+            <a:spAutoFit/>
+          </a:bodyPr>
+          <a:lstStyle/>
+          <a:p>
+            <a:pPr marL="800100" lvl="1" indent="-342900">
+              <a:buFont typeface="Courier New" panose="02070309020205020404" pitchFamily="49" charset="0"/>
+              <a:buChar char="o"/>
+            </a:pPr>
+            <a:r>
+              <a:rPr lang="en-CA" sz="2400" b="1" dirty="0">
+                <a:solidFill>
+                  <a:schemeClr val="bg1"/>
+                </a:solidFill>
+              </a:rPr>
+              <a:t>Include categorical predictors</a:t>
+            </a:r>
+            <a:br>
+              <a:rPr lang="en-CA" sz="2400" dirty="0">
+                <a:solidFill>
+                  <a:schemeClr val="bg1"/>
+                </a:solidFill>
+              </a:rPr>
+            </a:br>
+            <a:r>
+              <a:rPr lang="en-CA" sz="2400" i="1" dirty="0">
+                <a:solidFill>
+                  <a:schemeClr val="bg1"/>
+                </a:solidFill>
+              </a:rPr>
+              <a:t>(e.g., type of home — Residential, Multi-family, Condo)</a:t>
+            </a:r>
+          </a:p>
+          <a:p>
+            <a:pPr marL="800100" lvl="1" indent="-342900">
+              <a:buFont typeface="Courier New" panose="02070309020205020404" pitchFamily="49" charset="0"/>
+              <a:buChar char="o"/>
+            </a:pPr>
+            <a:endParaRPr lang="en-CA" sz="2400" dirty="0">
+              <a:solidFill>
+                <a:schemeClr val="bg1"/>
+              </a:solidFill>
+            </a:endParaRPr>
+          </a:p>
+          <a:p>
+            <a:pPr marL="800100" lvl="1" indent="-342900">
+              <a:buFont typeface="Courier New" panose="02070309020205020404" pitchFamily="49" charset="0"/>
+              <a:buChar char="o"/>
+            </a:pPr>
+            <a:r>
+              <a:rPr lang="en-CA" sz="2400" b="1" dirty="0">
+                <a:solidFill>
+                  <a:schemeClr val="bg1"/>
+                </a:solidFill>
+              </a:rPr>
+              <a:t>Add multiple predictors</a:t>
+            </a:r>
+            <a:br>
+              <a:rPr lang="en-CA" sz="2400" dirty="0">
+                <a:solidFill>
+                  <a:schemeClr val="bg1"/>
+                </a:solidFill>
+              </a:rPr>
+            </a:br>
+            <a:r>
+              <a:rPr lang="en-CA" sz="2400" i="1" dirty="0">
+                <a:solidFill>
+                  <a:schemeClr val="bg1"/>
+                </a:solidFill>
+              </a:rPr>
+              <a:t>(e.g., house size + number of bedrooms)</a:t>
+            </a:r>
+          </a:p>
+          <a:p>
+            <a:pPr marL="800100" lvl="1" indent="-342900">
+              <a:buFont typeface="Courier New" panose="02070309020205020404" pitchFamily="49" charset="0"/>
+              <a:buChar char="o"/>
+            </a:pPr>
+            <a:endParaRPr lang="en-CA" sz="2400" dirty="0">
+              <a:solidFill>
+                <a:schemeClr val="bg1"/>
+              </a:solidFill>
+            </a:endParaRPr>
+          </a:p>
+          <a:p>
+            <a:pPr marL="800100" lvl="1" indent="-342900">
+              <a:buFont typeface="Courier New" panose="02070309020205020404" pitchFamily="49" charset="0"/>
+              <a:buChar char="o"/>
+            </a:pPr>
+            <a:r>
+              <a:rPr lang="en-CA" sz="2400" b="1" dirty="0">
+                <a:solidFill>
+                  <a:schemeClr val="bg1"/>
+                </a:solidFill>
+              </a:rPr>
+              <a:t>Model non-linear relationships</a:t>
+            </a:r>
+            <a:br>
+              <a:rPr lang="en-CA" sz="2400" dirty="0">
+                <a:solidFill>
+                  <a:schemeClr val="bg1"/>
+                </a:solidFill>
+              </a:rPr>
+            </a:br>
+            <a:r>
+              <a:rPr lang="en-CA" sz="2400" i="1" dirty="0">
+                <a:solidFill>
+                  <a:schemeClr val="bg1"/>
+                </a:solidFill>
+              </a:rPr>
+              <a:t>(e.g., curved trends captured using polynomial terms)</a:t>
+            </a:r>
+          </a:p>
+        </p:txBody>
+      </p:sp>
+    </p:spTree>
+    <p:extLst>
+      <p:ext uri="{BB962C8B-B14F-4D97-AF65-F5344CB8AC3E}">
+        <p14:creationId xmlns:p14="http://schemas.microsoft.com/office/powerpoint/2010/main" val="2139612907"/>
+      </p:ext>
+    </p:extLst>
+  </p:cSld>
+  <p:clrMapOvr>
+    <a:masterClrMapping/>
+  </p:clrMapOvr>
+</p:sld>
+</file>
+
+<file path=ppt/slides/slide33.xml><?xml version="1.0" encoding="utf-8"?>
+<p:sld xmlns:a="http://schemas.openxmlformats.org/drawingml/2006/main" xmlns:r="http://schemas.openxmlformats.org/officeDocument/2006/relationships" xmlns:p="http://schemas.openxmlformats.org/presentationml/2006/main">
+  <p:cSld>
+    <p:bg>
+      <p:bgPr>
+        <a:solidFill>
+          <a:schemeClr val="bg1">
+            <a:alpha val="0"/>
+          </a:schemeClr>
+        </a:solidFill>
+        <a:effectLst/>
+      </p:bgPr>
+    </p:bg>
+    <p:spTree>
+      <p:nvGrpSpPr>
+        <p:cNvPr id="1" name="">
+          <a:extLst>
+            <a:ext uri="{FF2B5EF4-FFF2-40B4-BE49-F238E27FC236}">
               <a16:creationId xmlns:a16="http://schemas.microsoft.com/office/drawing/2014/main" id="{B8D21151-4F6A-781A-C1D9-A822C7C9009B}"/>
             </a:ext>
           </a:extLst>
@@ -29860,7 +30232,7 @@
 </p:sld>
 </file>
 
-<file path=ppt/slides/slide33.xml><?xml version="1.0" encoding="utf-8"?>
+<file path=ppt/slides/slide34.xml><?xml version="1.0" encoding="utf-8"?>
 <p:sld xmlns:a="http://schemas.openxmlformats.org/drawingml/2006/main" xmlns:r="http://schemas.openxmlformats.org/officeDocument/2006/relationships" xmlns:p="http://schemas.openxmlformats.org/presentationml/2006/main">
   <p:cSld>
     <p:bg>
@@ -30204,7 +30576,7 @@
 </p:sld>
 </file>
 
-<file path=ppt/slides/slide34.xml><?xml version="1.0" encoding="utf-8"?>
+<file path=ppt/slides/slide35.xml><?xml version="1.0" encoding="utf-8"?>
 <p:sld xmlns:a="http://schemas.openxmlformats.org/drawingml/2006/main" xmlns:r="http://schemas.openxmlformats.org/officeDocument/2006/relationships" xmlns:p="http://schemas.openxmlformats.org/presentationml/2006/main">
   <p:cSld>
     <p:bg>
@@ -30517,585 +30889,6 @@
     <p:extLst>
       <p:ext uri="{BB962C8B-B14F-4D97-AF65-F5344CB8AC3E}">
         <p14:creationId xmlns:p14="http://schemas.microsoft.com/office/powerpoint/2010/main" val="594438426"/>
-      </p:ext>
-    </p:extLst>
-  </p:cSld>
-  <p:clrMapOvr>
-    <a:masterClrMapping/>
-  </p:clrMapOvr>
-</p:sld>
-</file>
-
-<file path=ppt/slides/slide35.xml><?xml version="1.0" encoding="utf-8"?>
-<p:sld xmlns:a="http://schemas.openxmlformats.org/drawingml/2006/main" xmlns:r="http://schemas.openxmlformats.org/officeDocument/2006/relationships" xmlns:p="http://schemas.openxmlformats.org/presentationml/2006/main">
-  <p:cSld>
-    <p:bg>
-      <p:bgPr>
-        <a:solidFill>
-          <a:schemeClr val="bg1">
-            <a:alpha val="0"/>
-          </a:schemeClr>
-        </a:solidFill>
-        <a:effectLst/>
-      </p:bgPr>
-    </p:bg>
-    <p:spTree>
-      <p:nvGrpSpPr>
-        <p:cNvPr id="1" name="">
-          <a:extLst>
-            <a:ext uri="{FF2B5EF4-FFF2-40B4-BE49-F238E27FC236}">
-              <a16:creationId xmlns:a16="http://schemas.microsoft.com/office/drawing/2014/main" id="{506C44EF-9671-C3CF-32CD-0D8049785A1A}"/>
-            </a:ext>
-          </a:extLst>
-        </p:cNvPr>
-        <p:cNvGrpSpPr/>
-        <p:nvPr/>
-      </p:nvGrpSpPr>
-      <p:grpSpPr>
-        <a:xfrm>
-          <a:off x="0" y="0"/>
-          <a:ext cx="0" cy="0"/>
-          <a:chOff x="0" y="0"/>
-          <a:chExt cx="0" cy="0"/>
-        </a:xfrm>
-      </p:grpSpPr>
-      <p:sp>
-        <p:nvSpPr>
-          <p:cNvPr id="2" name="Title 1">
-            <a:extLst>
-              <a:ext uri="{FF2B5EF4-FFF2-40B4-BE49-F238E27FC236}">
-                <a16:creationId xmlns:a16="http://schemas.microsoft.com/office/drawing/2014/main" id="{D338B1E1-A96E-3C28-01BF-CE27AF39455F}"/>
-              </a:ext>
-            </a:extLst>
-          </p:cNvPr>
-          <p:cNvSpPr>
-            <a:spLocks noGrp="1"/>
-          </p:cNvSpPr>
-          <p:nvPr>
-            <p:ph type="title"/>
-          </p:nvPr>
-        </p:nvSpPr>
-        <p:spPr/>
-        <p:txBody>
-          <a:bodyPr/>
-          <a:lstStyle/>
-          <a:p>
-            <a:r>
-              <a:rPr lang="en-US" dirty="0">
-                <a:solidFill>
-                  <a:schemeClr val="bg1"/>
-                </a:solidFill>
-                <a:latin typeface="Courier" pitchFamily="2" charset="0"/>
-              </a:rPr>
-              <a:t>R code</a:t>
-            </a:r>
-          </a:p>
-        </p:txBody>
-      </p:sp>
-      <p:sp>
-        <p:nvSpPr>
-          <p:cNvPr id="5" name="Content Placeholder 4">
-            <a:extLst>
-              <a:ext uri="{FF2B5EF4-FFF2-40B4-BE49-F238E27FC236}">
-                <a16:creationId xmlns:a16="http://schemas.microsoft.com/office/drawing/2014/main" id="{AE803DB7-F94F-DC47-7F41-E2A6F75D79C9}"/>
-              </a:ext>
-            </a:extLst>
-          </p:cNvPr>
-          <p:cNvSpPr>
-            <a:spLocks noGrp="1"/>
-          </p:cNvSpPr>
-          <p:nvPr>
-            <p:ph idx="1"/>
-          </p:nvPr>
-        </p:nvSpPr>
-        <p:spPr>
-          <a:xfrm>
-            <a:off x="838200" y="1690688"/>
-            <a:ext cx="10515600" cy="4521387"/>
-          </a:xfrm>
-          <a:solidFill>
-            <a:schemeClr val="tx2">
-              <a:lumMod val="25000"/>
-            </a:schemeClr>
-          </a:solidFill>
-        </p:spPr>
-        <p:txBody>
-          <a:bodyPr>
-            <a:normAutofit/>
-          </a:bodyPr>
-          <a:lstStyle/>
-          <a:p>
-            <a:pPr marL="0" indent="0">
-              <a:buNone/>
-            </a:pPr>
-            <a:endParaRPr lang="en-CA" sz="2400" b="0" dirty="0">
-              <a:solidFill>
-                <a:srgbClr val="7CA668"/>
-              </a:solidFill>
-              <a:effectLst/>
-              <a:latin typeface="Menlo" panose="020B0609030804020204" pitchFamily="49" charset="0"/>
-            </a:endParaRPr>
-          </a:p>
-          <a:p>
-            <a:pPr marL="0" indent="0">
-              <a:buNone/>
-            </a:pPr>
-            <a:r>
-              <a:rPr lang="en-CA" sz="2400" b="0" dirty="0">
-                <a:solidFill>
-                  <a:srgbClr val="7CA668"/>
-                </a:solidFill>
-                <a:effectLst/>
-                <a:latin typeface="Menlo" panose="020B0609030804020204" pitchFamily="49" charset="0"/>
-              </a:rPr>
-              <a:t># 3. Visualize data: Scatter plot for </a:t>
-            </a:r>
-            <a:r>
-              <a:rPr lang="en-CA" sz="2400" b="0" dirty="0" err="1">
-                <a:solidFill>
-                  <a:srgbClr val="7CA668"/>
-                </a:solidFill>
-                <a:effectLst/>
-                <a:latin typeface="Menlo" panose="020B0609030804020204" pitchFamily="49" charset="0"/>
-              </a:rPr>
-              <a:t>sq_</a:t>
-            </a:r>
-            <a:r>
-              <a:rPr lang="en-CA" sz="2400" dirty="0" err="1">
-                <a:solidFill>
-                  <a:srgbClr val="7CA668"/>
-                </a:solidFill>
-                <a:latin typeface="Menlo" panose="020B0609030804020204" pitchFamily="49" charset="0"/>
-              </a:rPr>
-              <a:t>ft</a:t>
-            </a:r>
-            <a:r>
-              <a:rPr lang="en-CA" sz="2400" dirty="0">
-                <a:solidFill>
-                  <a:srgbClr val="7CA668"/>
-                </a:solidFill>
-                <a:latin typeface="Menlo" panose="020B0609030804020204" pitchFamily="49" charset="0"/>
-              </a:rPr>
-              <a:t> </a:t>
-            </a:r>
-            <a:r>
-              <a:rPr lang="en-CA" sz="2400" b="0" dirty="0">
-                <a:solidFill>
-                  <a:srgbClr val="7CA668"/>
-                </a:solidFill>
-                <a:effectLst/>
-                <a:latin typeface="Menlo" panose="020B0609030804020204" pitchFamily="49" charset="0"/>
-              </a:rPr>
-              <a:t>vs price</a:t>
-            </a:r>
-            <a:endParaRPr lang="en-CA" sz="2400" b="0" dirty="0">
-              <a:solidFill>
-                <a:srgbClr val="FFFFFF"/>
-              </a:solidFill>
-              <a:effectLst/>
-              <a:latin typeface="Menlo" panose="020B0609030804020204" pitchFamily="49" charset="0"/>
-            </a:endParaRPr>
-          </a:p>
-          <a:p>
-            <a:pPr marL="0" indent="0">
-              <a:buNone/>
-            </a:pPr>
-            <a:r>
-              <a:rPr lang="en-CA" sz="2400" dirty="0">
-                <a:solidFill>
-                  <a:srgbClr val="4EC9B0"/>
-                </a:solidFill>
-                <a:latin typeface="Menlo" panose="020B0609030804020204" pitchFamily="49" charset="0"/>
-              </a:rPr>
-              <a:t>g</a:t>
-            </a:r>
-            <a:r>
-              <a:rPr lang="en-CA" sz="2400" b="0" dirty="0">
-                <a:solidFill>
-                  <a:srgbClr val="4EC9B0"/>
-                </a:solidFill>
-                <a:effectLst/>
-                <a:latin typeface="Menlo" panose="020B0609030804020204" pitchFamily="49" charset="0"/>
-              </a:rPr>
-              <a:t>gplot</a:t>
-            </a:r>
-            <a:r>
-              <a:rPr lang="en-CA" sz="2400" b="0" dirty="0">
-                <a:solidFill>
-                  <a:srgbClr val="FFFFFF"/>
-                </a:solidFill>
-                <a:effectLst/>
-                <a:latin typeface="Menlo" panose="020B0609030804020204" pitchFamily="49" charset="0"/>
-              </a:rPr>
-              <a:t>(</a:t>
-            </a:r>
-            <a:r>
-              <a:rPr lang="en-CA" sz="2400" dirty="0">
-                <a:solidFill>
-                  <a:srgbClr val="DCDCAA"/>
-                </a:solidFill>
-                <a:latin typeface="Menlo" panose="020B0609030804020204" pitchFamily="49" charset="0"/>
-              </a:rPr>
-              <a:t>data </a:t>
-            </a:r>
-            <a:r>
-              <a:rPr lang="en-CA" sz="2400" dirty="0">
-                <a:latin typeface="Menlo" panose="020B0609030804020204" pitchFamily="49" charset="0"/>
-              </a:rPr>
-              <a:t>=</a:t>
-            </a:r>
-            <a:r>
-              <a:rPr lang="en-CA" sz="2400" dirty="0">
-                <a:solidFill>
-                  <a:srgbClr val="DCDCAA"/>
-                </a:solidFill>
-                <a:latin typeface="Menlo" panose="020B0609030804020204" pitchFamily="49" charset="0"/>
-              </a:rPr>
-              <a:t> </a:t>
-            </a:r>
-            <a:r>
-              <a:rPr lang="en-CA" sz="2400" dirty="0">
-                <a:solidFill>
-                  <a:srgbClr val="9CDCFE"/>
-                </a:solidFill>
-                <a:latin typeface="Menlo" panose="020B0609030804020204" pitchFamily="49" charset="0"/>
-              </a:rPr>
-              <a:t>sacramento, </a:t>
-            </a:r>
-            <a:r>
-              <a:rPr lang="en-CA" sz="2400" dirty="0">
-                <a:solidFill>
-                  <a:srgbClr val="DCDCAA"/>
-                </a:solidFill>
-                <a:latin typeface="Menlo" panose="020B0609030804020204" pitchFamily="49" charset="0"/>
-              </a:rPr>
-              <a:t>aes</a:t>
-            </a:r>
-            <a:r>
-              <a:rPr lang="en-CA" sz="2400" dirty="0">
-                <a:solidFill>
-                  <a:srgbClr val="9CDCFE"/>
-                </a:solidFill>
-                <a:latin typeface="Menlo" panose="020B0609030804020204" pitchFamily="49" charset="0"/>
-              </a:rPr>
-              <a:t>(</a:t>
-            </a:r>
-            <a:r>
-              <a:rPr lang="en-CA" sz="2400" dirty="0">
-                <a:solidFill>
-                  <a:srgbClr val="DCDCAA"/>
-                </a:solidFill>
-                <a:latin typeface="Menlo" panose="020B0609030804020204" pitchFamily="49" charset="0"/>
-              </a:rPr>
-              <a:t>x </a:t>
-            </a:r>
-            <a:r>
-              <a:rPr lang="en-CA" sz="2400" dirty="0">
-                <a:latin typeface="Menlo" panose="020B0609030804020204" pitchFamily="49" charset="0"/>
-              </a:rPr>
-              <a:t>=</a:t>
-            </a:r>
-            <a:r>
-              <a:rPr lang="en-CA" sz="2400" dirty="0">
-                <a:solidFill>
-                  <a:srgbClr val="DCDCAA"/>
-                </a:solidFill>
-                <a:latin typeface="Menlo" panose="020B0609030804020204" pitchFamily="49" charset="0"/>
-              </a:rPr>
-              <a:t> </a:t>
-            </a:r>
-            <a:r>
-              <a:rPr lang="en-CA" sz="2400" dirty="0" err="1">
-                <a:solidFill>
-                  <a:srgbClr val="9CDCFE"/>
-                </a:solidFill>
-                <a:latin typeface="Menlo" panose="020B0609030804020204" pitchFamily="49" charset="0"/>
-              </a:rPr>
-              <a:t>sq_ft</a:t>
-            </a:r>
-            <a:r>
-              <a:rPr lang="en-CA" sz="2400" dirty="0">
-                <a:latin typeface="Menlo" panose="020B0609030804020204" pitchFamily="49" charset="0"/>
-              </a:rPr>
-              <a:t>, </a:t>
-            </a:r>
-            <a:r>
-              <a:rPr lang="en-CA" sz="2400" dirty="0">
-                <a:solidFill>
-                  <a:srgbClr val="DCDCAA"/>
-                </a:solidFill>
-                <a:latin typeface="Menlo" panose="020B0609030804020204" pitchFamily="49" charset="0"/>
-              </a:rPr>
-              <a:t>y </a:t>
-            </a:r>
-            <a:r>
-              <a:rPr lang="en-CA" sz="2400" dirty="0">
-                <a:latin typeface="Menlo" panose="020B0609030804020204" pitchFamily="49" charset="0"/>
-              </a:rPr>
-              <a:t>=</a:t>
-            </a:r>
-            <a:r>
-              <a:rPr lang="en-CA" sz="2400" dirty="0">
-                <a:solidFill>
-                  <a:srgbClr val="DCDCAA"/>
-                </a:solidFill>
-                <a:latin typeface="Menlo" panose="020B0609030804020204" pitchFamily="49" charset="0"/>
-              </a:rPr>
-              <a:t> </a:t>
-            </a:r>
-            <a:r>
-              <a:rPr lang="en-CA" sz="2400" dirty="0">
-                <a:solidFill>
-                  <a:srgbClr val="9CDCFE"/>
-                </a:solidFill>
-                <a:latin typeface="Menlo" panose="020B0609030804020204" pitchFamily="49" charset="0"/>
-              </a:rPr>
-              <a:t>price</a:t>
-            </a:r>
-            <a:r>
-              <a:rPr lang="en-CA" sz="2400" b="0" dirty="0">
-                <a:solidFill>
-                  <a:srgbClr val="FFFFFF"/>
-                </a:solidFill>
-                <a:effectLst/>
-                <a:latin typeface="Menlo" panose="020B0609030804020204" pitchFamily="49" charset="0"/>
-              </a:rPr>
-              <a:t>)) +</a:t>
-            </a:r>
-          </a:p>
-          <a:p>
-            <a:pPr marL="457200" lvl="1" indent="0">
-              <a:buNone/>
-            </a:pPr>
-            <a:r>
-              <a:rPr lang="en-CA" b="0" dirty="0">
-                <a:solidFill>
-                  <a:srgbClr val="DCDCAA"/>
-                </a:solidFill>
-                <a:effectLst/>
-                <a:latin typeface="Menlo" panose="020B0609030804020204" pitchFamily="49" charset="0"/>
-              </a:rPr>
-              <a:t>geom_point</a:t>
-            </a:r>
-            <a:r>
-              <a:rPr lang="en-CA" b="0" dirty="0">
-                <a:solidFill>
-                  <a:srgbClr val="FFFFFF"/>
-                </a:solidFill>
-                <a:effectLst/>
-                <a:latin typeface="Menlo" panose="020B0609030804020204" pitchFamily="49" charset="0"/>
-              </a:rPr>
-              <a:t>()</a:t>
-            </a:r>
-            <a:r>
-              <a:rPr lang="en-CA" dirty="0">
-                <a:solidFill>
-                  <a:srgbClr val="FFFFFF"/>
-                </a:solidFill>
-                <a:latin typeface="Menlo" panose="020B0609030804020204" pitchFamily="49" charset="0"/>
-              </a:rPr>
-              <a:t> + </a:t>
-            </a:r>
-            <a:r>
-              <a:rPr lang="en-CA" b="0" dirty="0">
-                <a:solidFill>
-                  <a:srgbClr val="7CA668"/>
-                </a:solidFill>
-                <a:effectLst/>
-                <a:latin typeface="Menlo" panose="020B0609030804020204" pitchFamily="49" charset="0"/>
-              </a:rPr>
-              <a:t># Adding scatter plot</a:t>
-            </a:r>
-            <a:endParaRPr lang="en-CA" dirty="0">
-              <a:solidFill>
-                <a:srgbClr val="FFFFFF"/>
-              </a:solidFill>
-              <a:latin typeface="Menlo" panose="020B0609030804020204" pitchFamily="49" charset="0"/>
-            </a:endParaRPr>
-          </a:p>
-          <a:p>
-            <a:pPr marL="457200" lvl="1" indent="0">
-              <a:buNone/>
-            </a:pPr>
-            <a:r>
-              <a:rPr lang="en-CA" dirty="0">
-                <a:solidFill>
-                  <a:srgbClr val="FFFFFF"/>
-                </a:solidFill>
-                <a:latin typeface="Menlo" panose="020B0609030804020204" pitchFamily="49" charset="0"/>
-              </a:rPr>
-              <a:t>l</a:t>
-            </a:r>
-            <a:r>
-              <a:rPr lang="en-CA" b="0" dirty="0">
-                <a:solidFill>
-                  <a:srgbClr val="FFFFFF"/>
-                </a:solidFill>
-                <a:effectLst/>
-                <a:latin typeface="Menlo" panose="020B0609030804020204" pitchFamily="49" charset="0"/>
-              </a:rPr>
-              <a:t>abs(</a:t>
-            </a:r>
-            <a:r>
-              <a:rPr lang="en-CA" dirty="0">
-                <a:solidFill>
-                  <a:srgbClr val="DCDCAA"/>
-                </a:solidFill>
-                <a:latin typeface="Menlo" panose="020B0609030804020204" pitchFamily="49" charset="0"/>
-              </a:rPr>
-              <a:t>x </a:t>
-            </a:r>
-            <a:r>
-              <a:rPr lang="en-CA" dirty="0">
-                <a:latin typeface="Menlo" panose="020B0609030804020204" pitchFamily="49" charset="0"/>
-              </a:rPr>
-              <a:t>=</a:t>
-            </a:r>
-            <a:r>
-              <a:rPr lang="en-CA" dirty="0">
-                <a:solidFill>
-                  <a:srgbClr val="DCDCAA"/>
-                </a:solidFill>
-                <a:latin typeface="Menlo" panose="020B0609030804020204" pitchFamily="49" charset="0"/>
-              </a:rPr>
-              <a:t> </a:t>
-            </a:r>
-            <a:r>
-              <a:rPr lang="en-CA" b="0" dirty="0">
-                <a:solidFill>
-                  <a:srgbClr val="CE9178"/>
-                </a:solidFill>
-                <a:effectLst/>
-                <a:latin typeface="Menlo" panose="020B0609030804020204" pitchFamily="49" charset="0"/>
-              </a:rPr>
-              <a:t>‘Square Feet’,</a:t>
-            </a:r>
-            <a:r>
-              <a:rPr lang="en-CA" dirty="0">
-                <a:solidFill>
-                  <a:srgbClr val="DCDCAA"/>
-                </a:solidFill>
-                <a:latin typeface="Menlo" panose="020B0609030804020204" pitchFamily="49" charset="0"/>
-              </a:rPr>
-              <a:t> y </a:t>
-            </a:r>
-            <a:r>
-              <a:rPr lang="en-CA" dirty="0">
-                <a:latin typeface="Menlo" panose="020B0609030804020204" pitchFamily="49" charset="0"/>
-              </a:rPr>
-              <a:t>=</a:t>
-            </a:r>
-            <a:r>
-              <a:rPr lang="en-CA" dirty="0">
-                <a:solidFill>
-                  <a:srgbClr val="DCDCAA"/>
-                </a:solidFill>
-                <a:latin typeface="Menlo" panose="020B0609030804020204" pitchFamily="49" charset="0"/>
-              </a:rPr>
-              <a:t> </a:t>
-            </a:r>
-            <a:r>
-              <a:rPr lang="en-CA" b="0" dirty="0">
-                <a:solidFill>
-                  <a:srgbClr val="CE9178"/>
-                </a:solidFill>
-                <a:effectLst/>
-                <a:latin typeface="Menlo" panose="020B0609030804020204" pitchFamily="49" charset="0"/>
-              </a:rPr>
-              <a:t>‘Price’</a:t>
-            </a:r>
-            <a:r>
-              <a:rPr lang="en-CA" b="0" dirty="0">
-                <a:solidFill>
-                  <a:srgbClr val="FFFFFF"/>
-                </a:solidFill>
-                <a:effectLst/>
-                <a:latin typeface="Menlo" panose="020B0609030804020204" pitchFamily="49" charset="0"/>
-              </a:rPr>
-              <a:t>) +</a:t>
-            </a:r>
-            <a:r>
-              <a:rPr lang="en-CA" dirty="0">
-                <a:solidFill>
-                  <a:srgbClr val="FFFFFF"/>
-                </a:solidFill>
-                <a:latin typeface="Menlo" panose="020B0609030804020204" pitchFamily="49" charset="0"/>
-              </a:rPr>
-              <a:t> </a:t>
-            </a:r>
-            <a:r>
-              <a:rPr lang="en-CA" b="0" dirty="0">
-                <a:solidFill>
-                  <a:srgbClr val="7CA668"/>
-                </a:solidFill>
-                <a:effectLst/>
-                <a:latin typeface="Menlo" panose="020B0609030804020204" pitchFamily="49" charset="0"/>
-              </a:rPr>
-              <a:t># Adding label</a:t>
-            </a:r>
-            <a:endParaRPr lang="en-CA" b="0" dirty="0">
-              <a:solidFill>
-                <a:srgbClr val="FFFFFF"/>
-              </a:solidFill>
-              <a:effectLst/>
-              <a:latin typeface="Menlo" panose="020B0609030804020204" pitchFamily="49" charset="0"/>
-            </a:endParaRPr>
-          </a:p>
-          <a:p>
-            <a:pPr marL="457200" lvl="1" indent="0">
-              <a:buNone/>
-            </a:pPr>
-            <a:r>
-              <a:rPr lang="en-CA" dirty="0">
-                <a:solidFill>
-                  <a:srgbClr val="DCDCAA"/>
-                </a:solidFill>
-                <a:latin typeface="Menlo" panose="020B0609030804020204" pitchFamily="49" charset="0"/>
-              </a:rPr>
-              <a:t>theme_classic</a:t>
-            </a:r>
-            <a:r>
-              <a:rPr lang="en-US" dirty="0"/>
-              <a:t> </a:t>
-            </a:r>
-            <a:r>
-              <a:rPr lang="en-CA" b="0" dirty="0">
-                <a:solidFill>
-                  <a:srgbClr val="FFFFFF"/>
-                </a:solidFill>
-                <a:effectLst/>
-                <a:latin typeface="Menlo" panose="020B0609030804020204" pitchFamily="49" charset="0"/>
-              </a:rPr>
-              <a:t>()</a:t>
-            </a:r>
-            <a:r>
-              <a:rPr lang="en-US" dirty="0"/>
-              <a:t>  </a:t>
-            </a:r>
-            <a:r>
-              <a:rPr lang="en-CA" b="0" dirty="0">
-                <a:solidFill>
-                  <a:srgbClr val="7CA668"/>
-                </a:solidFill>
-                <a:effectLst/>
-                <a:latin typeface="Menlo" panose="020B0609030804020204" pitchFamily="49" charset="0"/>
-              </a:rPr>
-              <a:t># Format background and font</a:t>
-            </a:r>
-            <a:endParaRPr lang="en-US" dirty="0"/>
-          </a:p>
-          <a:p>
-            <a:pPr marL="0" indent="0">
-              <a:buNone/>
-            </a:pPr>
-            <a:endParaRPr lang="en-US" dirty="0"/>
-          </a:p>
-        </p:txBody>
-      </p:sp>
-    </p:spTree>
-    <p:extLst>
-      <p:ext uri="{BB962C8B-B14F-4D97-AF65-F5344CB8AC3E}">
-        <p14:creationId xmlns:p14="http://schemas.microsoft.com/office/powerpoint/2010/main" val="3232341792"/>
       </p:ext>
     </p:extLst>
   </p:cSld>

--- a/slide_decks/Correlation-Regression-demo2.pptx
+++ b/slide_decks/Correlation-Regression-demo2.pptx
@@ -2410,7 +2410,7 @@
             </a:r>
             <a:r>
               <a:rPr lang="en-CA" sz="6000" dirty="0"/>
-              <a:t>, where the scatter widens or narrows, that’s a sign of </a:t>
+              <a:t>, where the scatter widens, that’s a sign of </a:t>
             </a:r>
             <a:r>
               <a:rPr lang="en-CA" sz="6000" b="1" dirty="0"/>
@@ -2468,7 +2468,7 @@
             </a:r>
             <a:r>
               <a:rPr lang="en-CA" sz="6000" b="1" dirty="0"/>
-              <a:t>normal, bell-shaped pattern</a:t>
+              <a:t>normal distribution</a:t>
             </a:r>
             <a:r>
               <a:rPr lang="en-CA" sz="6000" dirty="0"/>
@@ -3480,7 +3480,7 @@
             </a:r>
             <a:r>
               <a:rPr lang="en-CA" sz="9600" dirty="0"/>
-              <a:t>, which allows us to easily visualize our data — including the </a:t>
+              <a:t>, which allows us to easily visualize our data — including the scatter plot and the  </a:t>
             </a:r>
             <a:r>
               <a:rPr lang="en-CA" sz="9600" b="1" dirty="0"/>
@@ -4074,11 +4074,11 @@
           <a:p>
             <a:r>
               <a:rPr lang="en-CA" dirty="0"/>
-              <a:t>Now that we’ve looked at our data, let’s </a:t>
+              <a:t>Now that we’ve loaded in our data, let’s </a:t>
             </a:r>
             <a:r>
               <a:rPr lang="en-CA" b="1" dirty="0"/>
-              <a:t>quantify the relationship</a:t>
+              <a:t>look the relationship</a:t>
             </a:r>
             <a:r>
               <a:rPr lang="en-CA" dirty="0"/>
@@ -4819,7 +4819,7 @@
           <a:p>
             <a:r>
               <a:rPr lang="en-CA" dirty="0"/>
-              <a:t>This means that for every additional square foot, the model predicts the price will increase by roughly </a:t>
+              <a:t>This means that the base price for 0 sq ft is 16,200 and for every additional square foot, the model predicts the price will increase by roughly </a:t>
             </a:r>
             <a:r>
               <a:rPr lang="en-CA" b="1" dirty="0"/>
@@ -5730,7 +5730,7 @@
           <a:p>
             <a:r>
               <a:rPr lang="en-CA" sz="4000" dirty="0"/>
-              <a:t>Once we’ve fit our regression model, we can evaluate how </a:t>
+              <a:t>Once we’ve confirmed our model assumptions, we can evaluate how </a:t>
             </a:r>
             <a:r>
               <a:rPr lang="en-CA" sz="4000" i="1" dirty="0"/>
@@ -5849,7 +5849,7 @@
             </a:r>
             <a:r>
               <a:rPr lang="en-CA" sz="4000" b="1" dirty="0"/>
-              <a:t>$81,885</a:t>
+              <a:t>$82,000</a:t>
             </a:r>
             <a:r>
               <a:rPr lang="en-CA" sz="4000" dirty="0"/>
@@ -6092,67 +6092,42 @@
             <a:br>
               <a:rPr lang="en-CA" dirty="0"/>
             </a:br>
+            <a:endParaRPr lang="en-CA" dirty="0"/>
+          </a:p>
+          <a:p>
+            <a:r>
+              <a:rPr lang="en-CA" dirty="0"/>
+              <a:t>We can actually verify that value — if we square our correlation coefficient from earlier, we get the same result.</a:t>
+            </a:r>
             <a:br>
               <a:rPr lang="en-CA" dirty="0"/>
             </a:br>
             <a:r>
               <a:rPr lang="en-CA" dirty="0"/>
-              <a:t>Here, R² is </a:t>
+              <a:t>That’s because in </a:t>
             </a:r>
             <a:r>
               <a:rPr lang="en-CA" b="1" dirty="0"/>
-              <a:t>0.53</a:t>
+              <a:t>simple linear regression</a:t>
             </a:r>
             <a:r>
               <a:rPr lang="en-CA" dirty="0"/>
-              <a:t>, meaning our model explains about </a:t>
-            </a:r>
-            <a:r>
-              <a:rPr lang="en-CA" b="1" dirty="0"/>
-              <a:t>53% of the variation</a:t>
-            </a:r>
+              <a:t>, R² is literally the square of the correlation coefficient , as we talked about.”</a:t>
+            </a:r>
+          </a:p>
+          <a:p>
+            <a:endParaRPr lang="en-CA" dirty="0"/>
+          </a:p>
+          <a:p>
             <a:r>
               <a:rPr lang="en-CA" dirty="0"/>
-              <a:t> in house prices using size alone.</a:t>
-            </a:r>
-          </a:p>
-          <a:p>
-            <a:endParaRPr lang="en-CA" dirty="0"/>
-          </a:p>
-          <a:p>
-            <a:r>
-              <a:rPr lang="en-CA" dirty="0"/>
-              <a:t>We can actually verify that value — if we square our correlation coefficient from earlier, we get the same result.</a:t>
+              <a:t>So, what does 0.53 mean in practical terms?</a:t>
             </a:r>
             <a:br>
               <a:rPr lang="en-CA" dirty="0"/>
             </a:br>
             <a:r>
               <a:rPr lang="en-CA" dirty="0"/>
-              <a:t>That’s because in </a:t>
-            </a:r>
-            <a:r>
-              <a:rPr lang="en-CA" b="1" dirty="0"/>
-              <a:t>simple linear regression</a:t>
-            </a:r>
-            <a:r>
-              <a:rPr lang="en-CA" dirty="0"/>
-              <a:t>, R² is literally the square of the correlation coefficient , as we talked about.”</a:t>
-            </a:r>
-          </a:p>
-          <a:p>
-            <a:endParaRPr lang="en-CA" dirty="0"/>
-          </a:p>
-          <a:p>
-            <a:r>
-              <a:rPr lang="en-CA" dirty="0"/>
-              <a:t>So, what does 0.53 mean in practical terms?</a:t>
-            </a:r>
-            <a:br>
-              <a:rPr lang="en-CA" dirty="0"/>
-            </a:br>
-            <a:r>
-              <a:rPr lang="en-CA" dirty="0"/>
               <a:t>It tells us that </a:t>
             </a:r>
             <a:r>
@@ -6161,8 +6136,13 @@
             </a:r>
             <a:r>
               <a:rPr lang="en-CA" dirty="0"/>
-              <a:t> can be explained by house size alone!</a:t>
-            </a:r>
+              <a:t> can be explained by house size alone, which is </a:t>
+            </a:r>
+            <a:r>
+              <a:rPr lang="en-CA"/>
+              <a:t>pretty great for a single predictor!</a:t>
+            </a:r>
+            <a:endParaRPr lang="en-CA" dirty="0"/>
           </a:p>
           <a:p>
             <a:endParaRPr lang="en-CA" dirty="0"/>
@@ -15683,7 +15663,7 @@
         </p:nvPicPr>
         <p:blipFill>
           <a:blip r:embed="rId5"/>
-          <a:srcRect l="410" r="410"/>
+          <a:srcRect t="1896" b="1896"/>
           <a:stretch/>
         </p:blipFill>
         <p:spPr>
@@ -24120,33 +24100,15 @@
                                   </p:childTnLst>
                                 </p:cTn>
                               </p:par>
-                            </p:childTnLst>
-                          </p:cTn>
-                        </p:par>
-                      </p:childTnLst>
-                    </p:cTn>
-                  </p:par>
-                  <p:par>
-                    <p:cTn id="7" fill="hold">
-                      <p:stCondLst>
-                        <p:cond delay="indefinite"/>
-                      </p:stCondLst>
-                      <p:childTnLst>
-                        <p:par>
-                          <p:cTn id="8" fill="hold">
-                            <p:stCondLst>
-                              <p:cond delay="0"/>
-                            </p:stCondLst>
-                            <p:childTnLst>
                               <p:par>
-                                <p:cTn id="9" presetID="1" presetClass="entr" presetSubtype="0" fill="hold" nodeType="clickEffect">
+                                <p:cTn id="7" presetID="1" presetClass="entr" presetSubtype="0" fill="hold" nodeType="withEffect">
                                   <p:stCondLst>
                                     <p:cond delay="0"/>
                                   </p:stCondLst>
                                   <p:childTnLst>
                                     <p:set>
                                       <p:cBhvr>
-                                        <p:cTn id="10" dur="1" fill="hold">
+                                        <p:cTn id="8" dur="1" fill="hold">
                                           <p:stCondLst>
                                             <p:cond delay="0"/>
                                           </p:stCondLst>
@@ -24176,19 +24138,50 @@
                     </p:cTn>
                   </p:par>
                   <p:par>
-                    <p:cTn id="11" fill="hold">
+                    <p:cTn id="9" fill="hold">
                       <p:stCondLst>
                         <p:cond delay="indefinite"/>
                       </p:stCondLst>
                       <p:childTnLst>
                         <p:par>
-                          <p:cTn id="12" fill="hold">
+                          <p:cTn id="10" fill="hold">
                             <p:stCondLst>
                               <p:cond delay="0"/>
                             </p:stCondLst>
                             <p:childTnLst>
                               <p:par>
-                                <p:cTn id="13" presetID="1" presetClass="entr" presetSubtype="0" fill="hold" nodeType="clickEffect">
+                                <p:cTn id="11" presetID="1" presetClass="entr" presetSubtype="0" fill="hold" nodeType="clickEffect">
+                                  <p:stCondLst>
+                                    <p:cond delay="0"/>
+                                  </p:stCondLst>
+                                  <p:childTnLst>
+                                    <p:set>
+                                      <p:cBhvr>
+                                        <p:cTn id="12" dur="1" fill="hold">
+                                          <p:stCondLst>
+                                            <p:cond delay="0"/>
+                                          </p:stCondLst>
+                                        </p:cTn>
+                                        <p:tgtEl>
+                                          <p:spTgt spid="5">
+                                            <p:txEl>
+                                              <p:pRg st="5" end="5"/>
+                                            </p:txEl>
+                                          </p:spTgt>
+                                        </p:tgtEl>
+                                        <p:attrNameLst>
+                                          <p:attrName>style.visibility</p:attrName>
+                                        </p:attrNameLst>
+                                      </p:cBhvr>
+                                      <p:to>
+                                        <p:strVal val="visible"/>
+                                      </p:to>
+                                    </p:set>
+                                  </p:childTnLst>
+                                </p:cTn>
+                              </p:par>
+                              <p:par>
+                                <p:cTn id="13" presetID="1" presetClass="entr" presetSubtype="0" fill="hold" nodeType="withEffect">
                                   <p:stCondLst>
                                     <p:cond delay="0"/>
                                   </p:stCondLst>
@@ -24203,7 +24196,7 @@
                                         <p:tgtEl>
                                           <p:spTgt spid="5">
                                             <p:txEl>
-                                              <p:pRg st="5" end="5"/>
+                                              <p:pRg st="6" end="6"/>
                                             </p:txEl>
                                           </p:spTgt>
                                         </p:tgtEl>
@@ -24252,55 +24245,6 @@
                                         <p:tgtEl>
                                           <p:spTgt spid="5">
                                             <p:txEl>
-                                              <p:pRg st="6" end="6"/>
-                                            </p:txEl>
-                                          </p:spTgt>
-                                        </p:tgtEl>
-                                        <p:attrNameLst>
-                                          <p:attrName>style.visibility</p:attrName>
-                                        </p:attrNameLst>
-                                      </p:cBhvr>
-                                      <p:to>
-                                        <p:strVal val="visible"/>
-                                      </p:to>
-                                    </p:set>
-                                  </p:childTnLst>
-                                </p:cTn>
-                              </p:par>
-                            </p:childTnLst>
-                          </p:cTn>
-                        </p:par>
-                      </p:childTnLst>
-                    </p:cTn>
-                  </p:par>
-                  <p:par>
-                    <p:cTn id="19" fill="hold">
-                      <p:stCondLst>
-                        <p:cond delay="indefinite"/>
-                      </p:stCondLst>
-                      <p:childTnLst>
-                        <p:par>
-                          <p:cTn id="20" fill="hold">
-                            <p:stCondLst>
-                              <p:cond delay="0"/>
-                            </p:stCondLst>
-                            <p:childTnLst>
-                              <p:par>
-                                <p:cTn id="21" presetID="1" presetClass="entr" presetSubtype="0" fill="hold" nodeType="clickEffect">
-                                  <p:stCondLst>
-                                    <p:cond delay="0"/>
-                                  </p:stCondLst>
-                                  <p:childTnLst>
-                                    <p:set>
-                                      <p:cBhvr>
-                                        <p:cTn id="22" dur="1" fill="hold">
-                                          <p:stCondLst>
-                                            <p:cond delay="0"/>
-                                          </p:stCondLst>
-                                        </p:cTn>
-                                        <p:tgtEl>
-                                          <p:spTgt spid="5">
-                                            <p:txEl>
                                               <p:pRg st="7" end="7"/>
                                             </p:txEl>
                                           </p:spTgt>
@@ -24317,14 +24261,14 @@
                                 </p:cTn>
                               </p:par>
                               <p:par>
-                                <p:cTn id="23" presetID="1" presetClass="entr" presetSubtype="0" fill="hold" nodeType="withEffect">
+                                <p:cTn id="19" presetID="1" presetClass="entr" presetSubtype="0" fill="hold" nodeType="withEffect">
                                   <p:stCondLst>
                                     <p:cond delay="0"/>
                                   </p:stCondLst>
                                   <p:childTnLst>
                                     <p:set>
                                       <p:cBhvr>
-                                        <p:cTn id="24" dur="1" fill="hold">
+                                        <p:cTn id="20" dur="1" fill="hold">
                                           <p:stCondLst>
                                             <p:cond delay="0"/>
                                           </p:stCondLst>
@@ -24354,26 +24298,26 @@
                     </p:cTn>
                   </p:par>
                   <p:par>
-                    <p:cTn id="25" fill="hold">
+                    <p:cTn id="21" fill="hold">
                       <p:stCondLst>
                         <p:cond delay="indefinite"/>
                       </p:stCondLst>
                       <p:childTnLst>
                         <p:par>
-                          <p:cTn id="26" fill="hold">
+                          <p:cTn id="22" fill="hold">
                             <p:stCondLst>
                               <p:cond delay="0"/>
                             </p:stCondLst>
                             <p:childTnLst>
                               <p:par>
-                                <p:cTn id="27" presetID="1" presetClass="entr" presetSubtype="0" fill="hold" nodeType="clickEffect">
+                                <p:cTn id="23" presetID="1" presetClass="entr" presetSubtype="0" fill="hold" nodeType="clickEffect">
                                   <p:stCondLst>
                                     <p:cond delay="0"/>
                                   </p:stCondLst>
                                   <p:childTnLst>
                                     <p:set>
                                       <p:cBhvr>
-                                        <p:cTn id="28" dur="1" fill="hold">
+                                        <p:cTn id="24" dur="1" fill="hold">
                                           <p:stCondLst>
                                             <p:cond delay="0"/>
                                           </p:stCondLst>
@@ -24397,14 +24341,14 @@
                                 </p:cTn>
                               </p:par>
                               <p:par>
-                                <p:cTn id="29" presetID="1" presetClass="entr" presetSubtype="0" fill="hold" nodeType="withEffect">
+                                <p:cTn id="25" presetID="1" presetClass="entr" presetSubtype="0" fill="hold" nodeType="withEffect">
                                   <p:stCondLst>
                                     <p:cond delay="0"/>
                                   </p:stCondLst>
                                   <p:childTnLst>
                                     <p:set>
                                       <p:cBhvr>
-                                        <p:cTn id="30" dur="1" fill="hold">
+                                        <p:cTn id="26" dur="1" fill="hold">
                                           <p:stCondLst>
                                             <p:cond delay="0"/>
                                           </p:stCondLst>
@@ -24428,14 +24372,14 @@
                                 </p:cTn>
                               </p:par>
                               <p:par>
-                                <p:cTn id="31" presetID="1" presetClass="entr" presetSubtype="0" fill="hold" nodeType="withEffect">
+                                <p:cTn id="27" presetID="1" presetClass="entr" presetSubtype="0" fill="hold" nodeType="withEffect">
                                   <p:stCondLst>
                                     <p:cond delay="0"/>
                                   </p:stCondLst>
                                   <p:childTnLst>
                                     <p:set>
                                       <p:cBhvr>
-                                        <p:cTn id="32" dur="1" fill="hold">
+                                        <p:cTn id="28" dur="1" fill="hold">
                                           <p:stCondLst>
                                             <p:cond delay="0"/>
                                           </p:stCondLst>
